--- a/docs/content/05-teaching-resources/slides/network-cabling/05-health-safety-and-compliance-for-cabling.pptx
+++ b/docs/content/05-teaching-resources/slides/network-cabling/05-health-safety-and-compliance-for-cabling.pptx
@@ -10,12 +10,18 @@
     <p:sldId id="258" r:id="rId9"/>
     <p:sldId id="259" r:id="rId10"/>
     <p:sldId id="260" r:id="rId11"/>
-    <p:sldId id="261" r:id="rId12"/>
-    <p:sldId id="262" r:id="rId13"/>
-    <p:sldId id="263" r:id="rId14"/>
+    <p:sldId id="261" r:id="rId13"/>
+    <p:sldId id="262" r:id="rId14"/>
+    <p:sldId id="263" r:id="rId15"/>
     <p:sldId id="264" r:id="rId16"/>
     <p:sldId id="265" r:id="rId17"/>
     <p:sldId id="266" r:id="rId18"/>
+    <p:sldId id="267" r:id="rId19"/>
+    <p:sldId id="268" r:id="rId20"/>
+    <p:sldId id="269" r:id="rId21"/>
+    <p:sldId id="270" r:id="rId22"/>
+    <p:sldId id="271" r:id="rId23"/>
+    <p:sldId id="272" r:id="rId24"/>
   </p:sldIdLst>
   <p:sldSz cx="12191695" cy="6858000" type="screen4x3"/>
   <p:notesSz cx="6858000" cy="9144000"/>
@@ -512,7 +518,22 @@
           <a:lstStyle/>
           <a:p>
             <a:r>
-              <a:t>Give students a few minutes to answer on mini whiteboards or paper, then reveal the answers on the next slide.</a:t>
+              <a:t>Answers:</a:t>
+            </a:r>
+          </a:p>
+          <a:p>
+            <a:r>
+              <a:t>1. To find other services and avoid damaging them.</a:t>
+            </a:r>
+          </a:p>
+          <a:p>
+            <a:r>
+              <a:t>2. BS EN 50174.</a:t>
+            </a:r>
+          </a:p>
+          <a:p>
+            <a:r>
+              <a:t>3. Any two: telecoms, CCTV, alarms, AV, access points, IoT.</a:t>
             </a:r>
           </a:p>
         </p:txBody>
@@ -582,7 +603,22 @@
           <a:lstStyle/>
           <a:p>
             <a:r>
-              <a:t>Talk through any answers the class found difficult.</a:t>
+              <a:t>Answers:</a:t>
+            </a:r>
+          </a:p>
+          <a:p>
+            <a:r>
+              <a:t>1. Stop work immediately.</a:t>
+            </a:r>
+          </a:p>
+          <a:p>
+            <a:r>
+              <a:t>2. An asbestos-registered professional.</a:t>
+            </a:r>
+          </a:p>
+          <a:p>
+            <a:r>
+              <a:t>3. It releases fibres that can cause fatal lung disease.</a:t>
             </a:r>
           </a:p>
         </p:txBody>
@@ -608,6 +644,231 @@
 </file>
 
 <file path=ppt/notesSlides/notesSlide3.xml><?xml version="1.0" encoding="utf-8"?>
+<p:notes xmlns:a="http://schemas.openxmlformats.org/drawingml/2006/main" xmlns:p="http://schemas.openxmlformats.org/presentationml/2006/main" xmlns:r="http://schemas.openxmlformats.org/officeDocument/2006/relationships">
+  <p:cSld>
+    <p:spTree>
+      <p:nvGrpSpPr>
+        <p:cNvPr id="1" name=""/>
+        <p:cNvGrpSpPr/>
+        <p:nvPr/>
+      </p:nvGrpSpPr>
+      <p:grpSpPr>
+        <a:xfrm>
+          <a:off x="0" y="0"/>
+          <a:ext cx="0" cy="0"/>
+          <a:chOff x="0" y="0"/>
+          <a:chExt cx="0" cy="0"/>
+        </a:xfrm>
+      </p:grpSpPr>
+      <p:sp>
+        <p:nvSpPr>
+          <p:cNvPr id="2" name="Slide Image Placeholder 1"/>
+          <p:cNvSpPr>
+            <a:spLocks noGrp="1"/>
+          </p:cNvSpPr>
+          <p:nvPr>
+            <p:ph type="sldImg" idx="2"/>
+          </p:nvPr>
+        </p:nvSpPr>
+        <p:spPr/>
+      </p:sp>
+      <p:sp>
+        <p:nvSpPr>
+          <p:cNvPr id="3" name="Notes Placeholder 2"/>
+          <p:cNvSpPr>
+            <a:spLocks noGrp="1"/>
+          </p:cNvSpPr>
+          <p:nvPr>
+            <p:ph type="body" idx="3" sz="quarter"/>
+          </p:nvPr>
+        </p:nvSpPr>
+        <p:spPr/>
+        <p:txBody>
+          <a:bodyPr/>
+          <a:lstStyle/>
+          <a:p>
+            <a:r>
+              <a:t>Answers:</a:t>
+            </a:r>
+          </a:p>
+          <a:p>
+            <a:r>
+              <a:t>1. Trained operators.</a:t>
+            </a:r>
+          </a:p>
+          <a:p>
+            <a:r>
+              <a:t>2. The Confined Spaces Regulations 1997.</a:t>
+            </a:r>
+          </a:p>
+          <a:p>
+            <a:r>
+              <a:t>3. Escape may be difficult if something goes wrong.</a:t>
+            </a:r>
+          </a:p>
+        </p:txBody>
+      </p:sp>
+      <p:sp>
+        <p:nvSpPr>
+          <p:cNvPr id="4" name="Slide Number Placeholder 3"/>
+          <p:cNvSpPr>
+            <a:spLocks noGrp="1"/>
+          </p:cNvSpPr>
+          <p:nvPr>
+            <p:ph type="sldNum" idx="5" sz="quarter"/>
+          </p:nvPr>
+        </p:nvSpPr>
+        <p:spPr/>
+      </p:sp>
+    </p:spTree>
+  </p:cSld>
+  <p:clrMapOvr>
+    <a:masterClrMapping/>
+  </p:clrMapOvr>
+</p:notes>
+</file>
+
+<file path=ppt/notesSlides/notesSlide4.xml><?xml version="1.0" encoding="utf-8"?>
+<p:notes xmlns:a="http://schemas.openxmlformats.org/drawingml/2006/main" xmlns:p="http://schemas.openxmlformats.org/presentationml/2006/main" xmlns:r="http://schemas.openxmlformats.org/officeDocument/2006/relationships">
+  <p:cSld>
+    <p:spTree>
+      <p:nvGrpSpPr>
+        <p:cNvPr id="1" name=""/>
+        <p:cNvGrpSpPr/>
+        <p:nvPr/>
+      </p:nvGrpSpPr>
+      <p:grpSpPr>
+        <a:xfrm>
+          <a:off x="0" y="0"/>
+          <a:ext cx="0" cy="0"/>
+          <a:chOff x="0" y="0"/>
+          <a:chExt cx="0" cy="0"/>
+        </a:xfrm>
+      </p:grpSpPr>
+      <p:sp>
+        <p:nvSpPr>
+          <p:cNvPr id="2" name="Slide Image Placeholder 1"/>
+          <p:cNvSpPr>
+            <a:spLocks noGrp="1"/>
+          </p:cNvSpPr>
+          <p:nvPr>
+            <p:ph type="sldImg" idx="2"/>
+          </p:nvPr>
+        </p:nvSpPr>
+        <p:spPr/>
+      </p:sp>
+      <p:sp>
+        <p:nvSpPr>
+          <p:cNvPr id="3" name="Notes Placeholder 2"/>
+          <p:cNvSpPr>
+            <a:spLocks noGrp="1"/>
+          </p:cNvSpPr>
+          <p:nvPr>
+            <p:ph type="body" idx="3" sz="quarter"/>
+          </p:nvPr>
+        </p:nvSpPr>
+        <p:spPr/>
+        <p:txBody>
+          <a:bodyPr/>
+          <a:lstStyle/>
+          <a:p>
+            <a:r>
+              <a:t>Give students a few minutes to answer on mini whiteboards or paper, then reveal the answers on the next slide.</a:t>
+            </a:r>
+          </a:p>
+        </p:txBody>
+      </p:sp>
+      <p:sp>
+        <p:nvSpPr>
+          <p:cNvPr id="4" name="Slide Number Placeholder 3"/>
+          <p:cNvSpPr>
+            <a:spLocks noGrp="1"/>
+          </p:cNvSpPr>
+          <p:nvPr>
+            <p:ph type="sldNum" idx="5" sz="quarter"/>
+          </p:nvPr>
+        </p:nvSpPr>
+        <p:spPr/>
+      </p:sp>
+    </p:spTree>
+  </p:cSld>
+  <p:clrMapOvr>
+    <a:masterClrMapping/>
+  </p:clrMapOvr>
+</p:notes>
+</file>
+
+<file path=ppt/notesSlides/notesSlide5.xml><?xml version="1.0" encoding="utf-8"?>
+<p:notes xmlns:a="http://schemas.openxmlformats.org/drawingml/2006/main" xmlns:p="http://schemas.openxmlformats.org/presentationml/2006/main" xmlns:r="http://schemas.openxmlformats.org/officeDocument/2006/relationships">
+  <p:cSld>
+    <p:spTree>
+      <p:nvGrpSpPr>
+        <p:cNvPr id="1" name=""/>
+        <p:cNvGrpSpPr/>
+        <p:nvPr/>
+      </p:nvGrpSpPr>
+      <p:grpSpPr>
+        <a:xfrm>
+          <a:off x="0" y="0"/>
+          <a:ext cx="0" cy="0"/>
+          <a:chOff x="0" y="0"/>
+          <a:chExt cx="0" cy="0"/>
+        </a:xfrm>
+      </p:grpSpPr>
+      <p:sp>
+        <p:nvSpPr>
+          <p:cNvPr id="2" name="Slide Image Placeholder 1"/>
+          <p:cNvSpPr>
+            <a:spLocks noGrp="1"/>
+          </p:cNvSpPr>
+          <p:nvPr>
+            <p:ph type="sldImg" idx="2"/>
+          </p:nvPr>
+        </p:nvSpPr>
+        <p:spPr/>
+      </p:sp>
+      <p:sp>
+        <p:nvSpPr>
+          <p:cNvPr id="3" name="Notes Placeholder 2"/>
+          <p:cNvSpPr>
+            <a:spLocks noGrp="1"/>
+          </p:cNvSpPr>
+          <p:nvPr>
+            <p:ph type="body" idx="3" sz="quarter"/>
+          </p:nvPr>
+        </p:nvSpPr>
+        <p:spPr/>
+        <p:txBody>
+          <a:bodyPr/>
+          <a:lstStyle/>
+          <a:p>
+            <a:r>
+              <a:t>Talk through any answers the class found difficult.</a:t>
+            </a:r>
+          </a:p>
+        </p:txBody>
+      </p:sp>
+      <p:sp>
+        <p:nvSpPr>
+          <p:cNvPr id="4" name="Slide Number Placeholder 3"/>
+          <p:cNvSpPr>
+            <a:spLocks noGrp="1"/>
+          </p:cNvSpPr>
+          <p:nvPr>
+            <p:ph type="sldNum" idx="5" sz="quarter"/>
+          </p:nvPr>
+        </p:nvSpPr>
+        <p:spPr/>
+      </p:sp>
+    </p:spTree>
+  </p:cSld>
+  <p:clrMapOvr>
+    <a:masterClrMapping/>
+  </p:clrMapOvr>
+</p:notes>
+</file>
+
+<file path=ppt/notesSlides/notesSlide6.xml><?xml version="1.0" encoding="utf-8"?>
 <p:notes xmlns:a="http://schemas.openxmlformats.org/drawingml/2006/main" xmlns:p="http://schemas.openxmlformats.org/presentationml/2006/main" xmlns:r="http://schemas.openxmlformats.org/officeDocument/2006/relationships">
   <p:cSld>
     <p:spTree>
@@ -4056,7 +4317,7 @@
                 </a:solidFill>
                 <a:latin typeface="Cambria"/>
               </a:rPr>
-              <a:t>Activity: Method statement</a:t>
+              <a:t>Quick check: If you suspect asbestos</a:t>
             </a:r>
           </a:p>
         </p:txBody>
@@ -4123,6 +4384,2958 @@
                 <a:latin typeface="Calibri"/>
               </a:rPr>
               <a:t>10</a:t>
+            </a:r>
+          </a:p>
+        </p:txBody>
+      </p:sp>
+      <p:sp>
+        <p:nvSpPr>
+          <p:cNvPr id="6" name="Oval 5"/>
+          <p:cNvSpPr/>
+          <p:nvPr/>
+        </p:nvSpPr>
+        <p:spPr>
+          <a:xfrm>
+            <a:off x="548640" y="1691640"/>
+            <a:ext cx="502920" cy="502920"/>
+          </a:xfrm>
+          <a:prstGeom prst="ellipse">
+            <a:avLst/>
+          </a:prstGeom>
+          <a:solidFill>
+            <a:srgbClr val="F2B705"/>
+          </a:solidFill>
+          <a:ln>
+            <a:noFill/>
+          </a:ln>
+          <a:effectLst/>
+        </p:spPr>
+        <p:style>
+          <a:lnRef idx="1">
+            <a:schemeClr val="accent1"/>
+          </a:lnRef>
+          <a:fillRef idx="3">
+            <a:schemeClr val="accent1"/>
+          </a:fillRef>
+          <a:effectRef idx="2">
+            <a:schemeClr val="accent1"/>
+          </a:effectRef>
+          <a:fontRef idx="minor">
+            <a:schemeClr val="lt1"/>
+          </a:fontRef>
+        </p:style>
+        <p:txBody>
+          <a:bodyPr rtlCol="0" anchor="ctr" lIns="0" rIns="0" tIns="0" bIns="0"/>
+          <a:lstStyle/>
+          <a:p>
+            <a:pPr algn="ctr"/>
+            <a:r>
+              <a:rPr sz="1600" b="1">
+                <a:solidFill>
+                  <a:srgbClr val="202122"/>
+                </a:solidFill>
+                <a:latin typeface="Calibri"/>
+              </a:rPr>
+              <a:t>1</a:t>
+            </a:r>
+          </a:p>
+        </p:txBody>
+      </p:sp>
+      <p:sp>
+        <p:nvSpPr>
+          <p:cNvPr id="7" name="TextBox 6"/>
+          <p:cNvSpPr txBox="1"/>
+          <p:nvPr/>
+        </p:nvSpPr>
+        <p:spPr>
+          <a:xfrm>
+            <a:off x="1371600" y="1645920"/>
+            <a:ext cx="10271455" cy="1188720"/>
+          </a:xfrm>
+          <a:prstGeom prst="rect">
+            <a:avLst/>
+          </a:prstGeom>
+          <a:noFill/>
+        </p:spPr>
+        <p:txBody>
+          <a:bodyPr wrap="square" anchor="t" lIns="0" rIns="0" tIns="0" bIns="0"/>
+          <a:lstStyle/>
+          <a:p>
+            <a:pPr algn="l"/>
+            <a:r>
+              <a:rPr sz="2400" b="0" i="0">
+                <a:solidFill>
+                  <a:srgbClr val="202122"/>
+                </a:solidFill>
+                <a:latin typeface="Calibri"/>
+              </a:rPr>
+              <a:t>What is the first thing to do if you suspect asbestos?</a:t>
+            </a:r>
+          </a:p>
+        </p:txBody>
+      </p:sp>
+      <p:sp>
+        <p:nvSpPr>
+          <p:cNvPr id="8" name="Oval 7"/>
+          <p:cNvSpPr/>
+          <p:nvPr/>
+        </p:nvSpPr>
+        <p:spPr>
+          <a:xfrm>
+            <a:off x="548640" y="3108960"/>
+            <a:ext cx="502920" cy="502920"/>
+          </a:xfrm>
+          <a:prstGeom prst="ellipse">
+            <a:avLst/>
+          </a:prstGeom>
+          <a:solidFill>
+            <a:srgbClr val="F2B705"/>
+          </a:solidFill>
+          <a:ln>
+            <a:noFill/>
+          </a:ln>
+          <a:effectLst/>
+        </p:spPr>
+        <p:style>
+          <a:lnRef idx="1">
+            <a:schemeClr val="accent1"/>
+          </a:lnRef>
+          <a:fillRef idx="3">
+            <a:schemeClr val="accent1"/>
+          </a:fillRef>
+          <a:effectRef idx="2">
+            <a:schemeClr val="accent1"/>
+          </a:effectRef>
+          <a:fontRef idx="minor">
+            <a:schemeClr val="lt1"/>
+          </a:fontRef>
+        </p:style>
+        <p:txBody>
+          <a:bodyPr rtlCol="0" anchor="ctr" lIns="0" rIns="0" tIns="0" bIns="0"/>
+          <a:lstStyle/>
+          <a:p>
+            <a:pPr algn="ctr"/>
+            <a:r>
+              <a:rPr sz="1600" b="1">
+                <a:solidFill>
+                  <a:srgbClr val="202122"/>
+                </a:solidFill>
+                <a:latin typeface="Calibri"/>
+              </a:rPr>
+              <a:t>2</a:t>
+            </a:r>
+          </a:p>
+        </p:txBody>
+      </p:sp>
+      <p:sp>
+        <p:nvSpPr>
+          <p:cNvPr id="9" name="TextBox 8"/>
+          <p:cNvSpPr txBox="1"/>
+          <p:nvPr/>
+        </p:nvSpPr>
+        <p:spPr>
+          <a:xfrm>
+            <a:off x="1371600" y="3063240"/>
+            <a:ext cx="10271455" cy="1188720"/>
+          </a:xfrm>
+          <a:prstGeom prst="rect">
+            <a:avLst/>
+          </a:prstGeom>
+          <a:noFill/>
+        </p:spPr>
+        <p:txBody>
+          <a:bodyPr wrap="square" anchor="t" lIns="0" rIns="0" tIns="0" bIns="0"/>
+          <a:lstStyle/>
+          <a:p>
+            <a:pPr algn="l"/>
+            <a:r>
+              <a:rPr sz="2400" b="0" i="0">
+                <a:solidFill>
+                  <a:srgbClr val="202122"/>
+                </a:solidFill>
+                <a:latin typeface="Calibri"/>
+              </a:rPr>
+              <a:t>Who should investigate suspected asbestos?</a:t>
+            </a:r>
+          </a:p>
+        </p:txBody>
+      </p:sp>
+      <p:sp>
+        <p:nvSpPr>
+          <p:cNvPr id="10" name="Oval 9"/>
+          <p:cNvSpPr/>
+          <p:nvPr/>
+        </p:nvSpPr>
+        <p:spPr>
+          <a:xfrm>
+            <a:off x="548640" y="4526280"/>
+            <a:ext cx="502920" cy="502920"/>
+          </a:xfrm>
+          <a:prstGeom prst="ellipse">
+            <a:avLst/>
+          </a:prstGeom>
+          <a:solidFill>
+            <a:srgbClr val="F2B705"/>
+          </a:solidFill>
+          <a:ln>
+            <a:noFill/>
+          </a:ln>
+          <a:effectLst/>
+        </p:spPr>
+        <p:style>
+          <a:lnRef idx="1">
+            <a:schemeClr val="accent1"/>
+          </a:lnRef>
+          <a:fillRef idx="3">
+            <a:schemeClr val="accent1"/>
+          </a:fillRef>
+          <a:effectRef idx="2">
+            <a:schemeClr val="accent1"/>
+          </a:effectRef>
+          <a:fontRef idx="minor">
+            <a:schemeClr val="lt1"/>
+          </a:fontRef>
+        </p:style>
+        <p:txBody>
+          <a:bodyPr rtlCol="0" anchor="ctr" lIns="0" rIns="0" tIns="0" bIns="0"/>
+          <a:lstStyle/>
+          <a:p>
+            <a:pPr algn="ctr"/>
+            <a:r>
+              <a:rPr sz="1600" b="1">
+                <a:solidFill>
+                  <a:srgbClr val="202122"/>
+                </a:solidFill>
+                <a:latin typeface="Calibri"/>
+              </a:rPr>
+              <a:t>3</a:t>
+            </a:r>
+          </a:p>
+        </p:txBody>
+      </p:sp>
+      <p:sp>
+        <p:nvSpPr>
+          <p:cNvPr id="11" name="TextBox 10"/>
+          <p:cNvSpPr txBox="1"/>
+          <p:nvPr/>
+        </p:nvSpPr>
+        <p:spPr>
+          <a:xfrm>
+            <a:off x="1371600" y="4480560"/>
+            <a:ext cx="10271455" cy="1188720"/>
+          </a:xfrm>
+          <a:prstGeom prst="rect">
+            <a:avLst/>
+          </a:prstGeom>
+          <a:noFill/>
+        </p:spPr>
+        <p:txBody>
+          <a:bodyPr wrap="square" anchor="t" lIns="0" rIns="0" tIns="0" bIns="0"/>
+          <a:lstStyle/>
+          <a:p>
+            <a:pPr algn="l"/>
+            <a:r>
+              <a:rPr sz="2400" b="0" i="0">
+                <a:solidFill>
+                  <a:srgbClr val="202122"/>
+                </a:solidFill>
+                <a:latin typeface="Calibri"/>
+              </a:rPr>
+              <a:t>Why is disturbing asbestos dangerous?</a:t>
+            </a:r>
+          </a:p>
+        </p:txBody>
+      </p:sp>
+      <p:sp>
+        <p:nvSpPr>
+          <p:cNvPr id="12" name="TextBox 11"/>
+          <p:cNvSpPr txBox="1"/>
+          <p:nvPr/>
+        </p:nvSpPr>
+        <p:spPr>
+          <a:xfrm>
+            <a:off x="548640" y="5852160"/>
+            <a:ext cx="11094415" cy="365760"/>
+          </a:xfrm>
+          <a:prstGeom prst="rect">
+            <a:avLst/>
+          </a:prstGeom>
+          <a:noFill/>
+        </p:spPr>
+        <p:txBody>
+          <a:bodyPr wrap="square" anchor="t" lIns="0" rIns="0" tIns="0" bIns="0"/>
+          <a:lstStyle/>
+          <a:p>
+            <a:pPr algn="l"/>
+            <a:r>
+              <a:rPr sz="1300" b="0" i="1">
+                <a:solidFill>
+                  <a:srgbClr val="54595D"/>
+                </a:solidFill>
+                <a:latin typeface="Calibri"/>
+              </a:rPr>
+              <a:t>Answer on mini whiteboards or in your book. Answers are in the speaker notes.</a:t>
+            </a:r>
+          </a:p>
+        </p:txBody>
+      </p:sp>
+    </p:spTree>
+  </p:cSld>
+  <p:clrMapOvr>
+    <a:masterClrMapping/>
+  </p:clrMapOvr>
+</p:sld>
+</file>
+
+<file path=ppt/slides/slide11.xml><?xml version="1.0" encoding="utf-8"?>
+<p:sld xmlns:a="http://schemas.openxmlformats.org/drawingml/2006/main" xmlns:p="http://schemas.openxmlformats.org/presentationml/2006/main" xmlns:r="http://schemas.openxmlformats.org/officeDocument/2006/relationships">
+  <p:cSld>
+    <p:bg>
+      <p:bgPr>
+        <a:solidFill>
+          <a:srgbClr val="FFFFFF"/>
+        </a:solidFill>
+        <a:effectLst/>
+      </p:bgPr>
+    </p:bg>
+    <p:spTree>
+      <p:nvGrpSpPr>
+        <p:cNvPr id="1" name=""/>
+        <p:cNvGrpSpPr/>
+        <p:nvPr/>
+      </p:nvGrpSpPr>
+      <p:grpSpPr/>
+      <p:sp>
+        <p:nvSpPr>
+          <p:cNvPr id="2" name="TextBox 1"/>
+          <p:cNvSpPr txBox="1"/>
+          <p:nvPr/>
+        </p:nvSpPr>
+        <p:spPr>
+          <a:xfrm>
+            <a:off x="548640" y="320040"/>
+            <a:ext cx="11094415" cy="274320"/>
+          </a:xfrm>
+          <a:prstGeom prst="rect">
+            <a:avLst/>
+          </a:prstGeom>
+          <a:noFill/>
+        </p:spPr>
+        <p:txBody>
+          <a:bodyPr wrap="square" anchor="t" lIns="0" rIns="0" tIns="0" bIns="0"/>
+          <a:lstStyle/>
+          <a:p>
+            <a:pPr algn="l"/>
+            <a:r>
+              <a:rPr sz="1100" b="1" i="0">
+                <a:solidFill>
+                  <a:srgbClr val="54595D"/>
+                </a:solidFill>
+                <a:latin typeface="Calibri"/>
+              </a:rPr>
+              <a:t>NETWORK CABLING  ·  Network Cabling Content Area 2</a:t>
+            </a:r>
+          </a:p>
+        </p:txBody>
+      </p:sp>
+      <p:sp>
+        <p:nvSpPr>
+          <p:cNvPr id="3" name="TextBox 2"/>
+          <p:cNvSpPr txBox="1"/>
+          <p:nvPr/>
+        </p:nvSpPr>
+        <p:spPr>
+          <a:xfrm>
+            <a:off x="548640" y="566928"/>
+            <a:ext cx="11094415" cy="822960"/>
+          </a:xfrm>
+          <a:prstGeom prst="rect">
+            <a:avLst/>
+          </a:prstGeom>
+          <a:noFill/>
+        </p:spPr>
+        <p:txBody>
+          <a:bodyPr wrap="square" anchor="ctr" lIns="0" rIns="0" tIns="0" bIns="0"/>
+          <a:lstStyle/>
+          <a:p>
+            <a:pPr algn="l"/>
+            <a:r>
+              <a:rPr sz="3200" b="1" i="0">
+                <a:solidFill>
+                  <a:srgbClr val="03306E"/>
+                </a:solidFill>
+                <a:latin typeface="Cambria"/>
+              </a:rPr>
+              <a:t>Working at height and in confined spaces</a:t>
+            </a:r>
+          </a:p>
+        </p:txBody>
+      </p:sp>
+      <p:sp>
+        <p:nvSpPr>
+          <p:cNvPr id="4" name="TextBox 3"/>
+          <p:cNvSpPr txBox="1"/>
+          <p:nvPr/>
+        </p:nvSpPr>
+        <p:spPr>
+          <a:xfrm>
+            <a:off x="548640" y="6446520"/>
+            <a:ext cx="8229600" cy="274320"/>
+          </a:xfrm>
+          <a:prstGeom prst="rect">
+            <a:avLst/>
+          </a:prstGeom>
+          <a:noFill/>
+        </p:spPr>
+        <p:txBody>
+          <a:bodyPr wrap="square" anchor="t" lIns="0" rIns="0" tIns="0" bIns="0"/>
+          <a:lstStyle/>
+          <a:p>
+            <a:pPr algn="l"/>
+            <a:r>
+              <a:rPr sz="1000" b="0" i="0">
+                <a:solidFill>
+                  <a:srgbClr val="54595D"/>
+                </a:solidFill>
+                <a:latin typeface="Calibri"/>
+              </a:rPr>
+              <a:t>Digital Support and Security T Level  ·  Health, Safety and Compliance for Cabling</a:t>
+            </a:r>
+          </a:p>
+        </p:txBody>
+      </p:sp>
+      <p:sp>
+        <p:nvSpPr>
+          <p:cNvPr id="5" name="TextBox 4"/>
+          <p:cNvSpPr txBox="1"/>
+          <p:nvPr/>
+        </p:nvSpPr>
+        <p:spPr>
+          <a:xfrm>
+            <a:off x="10728655" y="6446520"/>
+            <a:ext cx="914400" cy="274320"/>
+          </a:xfrm>
+          <a:prstGeom prst="rect">
+            <a:avLst/>
+          </a:prstGeom>
+          <a:noFill/>
+        </p:spPr>
+        <p:txBody>
+          <a:bodyPr wrap="square" anchor="t" lIns="0" rIns="0" tIns="0" bIns="0"/>
+          <a:lstStyle/>
+          <a:p>
+            <a:pPr algn="r"/>
+            <a:r>
+              <a:rPr sz="1000" b="0" i="0">
+                <a:solidFill>
+                  <a:srgbClr val="54595D"/>
+                </a:solidFill>
+                <a:latin typeface="Calibri"/>
+              </a:rPr>
+              <a:t>11</a:t>
+            </a:r>
+          </a:p>
+        </p:txBody>
+      </p:sp>
+      <p:sp>
+        <p:nvSpPr>
+          <p:cNvPr id="6" name="TextBox 5"/>
+          <p:cNvSpPr txBox="1"/>
+          <p:nvPr/>
+        </p:nvSpPr>
+        <p:spPr>
+          <a:xfrm>
+            <a:off x="548640" y="1554480"/>
+            <a:ext cx="6720840" cy="4617720"/>
+          </a:xfrm>
+          <a:prstGeom prst="rect">
+            <a:avLst/>
+          </a:prstGeom>
+          <a:noFill/>
+        </p:spPr>
+        <p:txBody>
+          <a:bodyPr wrap="square" lIns="0" rIns="0" tIns="0" bIns="0">
+            <a:spAutoFit/>
+          </a:bodyPr>
+          <a:lstStyle/>
+          <a:p>
+            <a:pPr>
+              <a:spcAft>
+                <a:spcPts val="1200"/>
+              </a:spcAft>
+            </a:pPr>
+            <a:r>
+              <a:rPr sz="2000" b="0">
+                <a:solidFill>
+                  <a:srgbClr val="202122"/>
+                </a:solidFill>
+                <a:latin typeface="Calibri"/>
+              </a:rPr>
+              <a:t>Before working at height, risk-assess the job and choose the safest equipment. Mobile elevating work platforms (MEWPs) must be used by trained operators. Low-level access towers must be assembled, inspected, used and dismantled following the manufacturer's instructions. The Work at Height Regulations 2005 apply.</a:t>
+            </a:r>
+          </a:p>
+          <a:p>
+            <a:pPr>
+              <a:spcAft>
+                <a:spcPts val="1200"/>
+              </a:spcAft>
+            </a:pPr>
+            <a:r>
+              <a:rPr sz="2000" b="0">
+                <a:solidFill>
+                  <a:srgbClr val="202122"/>
+                </a:solidFill>
+                <a:latin typeface="Calibri"/>
+              </a:rPr>
+              <a:t>Confined spaces, such as ceiling voids, ducts and underfloor areas, bring risks of poor air, heat and difficulty escaping. The same risk management process applies, with the right PPE, properly maintained, and a rescue plan. The Confined Spaces Regulations 1997 apply.</a:t>
+            </a:r>
+          </a:p>
+          <a:p>
+            <a:pPr>
+              <a:spcAft>
+                <a:spcPts val="1200"/>
+              </a:spcAft>
+            </a:pPr>
+            <a:r>
+              <a:rPr sz="2000" b="0">
+                <a:solidFill>
+                  <a:srgbClr val="202122"/>
+                </a:solidFill>
+                <a:latin typeface="Calibri"/>
+              </a:rPr>
+              <a:t>Record your findings clearly.</a:t>
+            </a:r>
+          </a:p>
+        </p:txBody>
+      </p:sp>
+      <p:sp>
+        <p:nvSpPr>
+          <p:cNvPr id="7" name="Rounded Rectangle 6"/>
+          <p:cNvSpPr/>
+          <p:nvPr/>
+        </p:nvSpPr>
+        <p:spPr>
+          <a:xfrm>
+            <a:off x="7772400" y="1554480"/>
+            <a:ext cx="3867912" cy="4526280"/>
+          </a:xfrm>
+          <a:prstGeom prst="roundRect">
+            <a:avLst>
+              <a:gd name="adj" fmla="val 8000"/>
+            </a:avLst>
+          </a:prstGeom>
+          <a:solidFill>
+            <a:srgbClr val="03306E"/>
+          </a:solidFill>
+          <a:ln>
+            <a:noFill/>
+          </a:ln>
+          <a:effectLst/>
+        </p:spPr>
+        <p:style>
+          <a:lnRef idx="1">
+            <a:schemeClr val="accent1"/>
+          </a:lnRef>
+          <a:fillRef idx="3">
+            <a:schemeClr val="accent1"/>
+          </a:fillRef>
+          <a:effectRef idx="2">
+            <a:schemeClr val="accent1"/>
+          </a:effectRef>
+          <a:fontRef idx="minor">
+            <a:schemeClr val="lt1"/>
+          </a:fontRef>
+        </p:style>
+        <p:txBody>
+          <a:bodyPr rtlCol="0" anchor="ctr"/>
+          <a:lstStyle/>
+          <a:p/>
+        </p:txBody>
+      </p:sp>
+      <p:sp>
+        <p:nvSpPr>
+          <p:cNvPr id="8" name="Oval 7"/>
+          <p:cNvSpPr/>
+          <p:nvPr/>
+        </p:nvSpPr>
+        <p:spPr>
+          <a:xfrm>
+            <a:off x="8046720" y="1828800"/>
+            <a:ext cx="548640" cy="548640"/>
+          </a:xfrm>
+          <a:prstGeom prst="ellipse">
+            <a:avLst/>
+          </a:prstGeom>
+          <a:solidFill>
+            <a:srgbClr val="F2B705"/>
+          </a:solidFill>
+          <a:ln>
+            <a:noFill/>
+          </a:ln>
+          <a:effectLst/>
+        </p:spPr>
+        <p:style>
+          <a:lnRef idx="1">
+            <a:schemeClr val="accent1"/>
+          </a:lnRef>
+          <a:fillRef idx="3">
+            <a:schemeClr val="accent1"/>
+          </a:fillRef>
+          <a:effectRef idx="2">
+            <a:schemeClr val="accent1"/>
+          </a:effectRef>
+          <a:fontRef idx="minor">
+            <a:schemeClr val="lt1"/>
+          </a:fontRef>
+        </p:style>
+        <p:txBody>
+          <a:bodyPr rtlCol="0" anchor="ctr" lIns="0" rIns="0" tIns="0" bIns="0"/>
+          <a:lstStyle/>
+          <a:p>
+            <a:pPr algn="ctr"/>
+            <a:r>
+              <a:rPr sz="1300" b="1">
+                <a:solidFill>
+                  <a:srgbClr val="202122"/>
+                </a:solidFill>
+                <a:latin typeface="Calibri"/>
+              </a:rPr>
+              <a:t>e.g.</a:t>
+            </a:r>
+          </a:p>
+        </p:txBody>
+      </p:sp>
+      <p:sp>
+        <p:nvSpPr>
+          <p:cNvPr id="9" name="TextBox 8"/>
+          <p:cNvSpPr txBox="1"/>
+          <p:nvPr/>
+        </p:nvSpPr>
+        <p:spPr>
+          <a:xfrm>
+            <a:off x="8046720" y="2560320"/>
+            <a:ext cx="3291840" cy="365760"/>
+          </a:xfrm>
+          <a:prstGeom prst="rect">
+            <a:avLst/>
+          </a:prstGeom>
+          <a:noFill/>
+        </p:spPr>
+        <p:txBody>
+          <a:bodyPr wrap="square" anchor="t" lIns="0" rIns="0" tIns="0" bIns="0"/>
+          <a:lstStyle/>
+          <a:p>
+            <a:pPr algn="l"/>
+            <a:r>
+              <a:rPr sz="1300" b="1" i="0">
+                <a:solidFill>
+                  <a:srgbClr val="A9C8F0"/>
+                </a:solidFill>
+                <a:latin typeface="Calibri"/>
+              </a:rPr>
+              <a:t>EXAMPLE</a:t>
+            </a:r>
+          </a:p>
+        </p:txBody>
+      </p:sp>
+      <p:sp>
+        <p:nvSpPr>
+          <p:cNvPr id="10" name="TextBox 9"/>
+          <p:cNvSpPr txBox="1"/>
+          <p:nvPr/>
+        </p:nvSpPr>
+        <p:spPr>
+          <a:xfrm>
+            <a:off x="8046720" y="2971800"/>
+            <a:ext cx="3291840" cy="2971800"/>
+          </a:xfrm>
+          <a:prstGeom prst="rect">
+            <a:avLst/>
+          </a:prstGeom>
+          <a:noFill/>
+        </p:spPr>
+        <p:txBody>
+          <a:bodyPr wrap="square" anchor="t" lIns="0" rIns="0" tIns="0" bIns="0"/>
+          <a:lstStyle/>
+          <a:p>
+            <a:pPr algn="l"/>
+            <a:r>
+              <a:rPr sz="1900" b="0" i="0">
+                <a:solidFill>
+                  <a:srgbClr val="FFFFFF"/>
+                </a:solidFill>
+                <a:latin typeface="Cambria"/>
+              </a:rPr>
+              <a:t>Running cable through a raised floor void: check the air, plan how to get out, keep a colleague outside, and wear knee pads and gloves.</a:t>
+            </a:r>
+          </a:p>
+        </p:txBody>
+      </p:sp>
+    </p:spTree>
+  </p:cSld>
+  <p:clrMapOvr>
+    <a:masterClrMapping/>
+  </p:clrMapOvr>
+</p:sld>
+</file>
+
+<file path=ppt/slides/slide12.xml><?xml version="1.0" encoding="utf-8"?>
+<p:sld xmlns:a="http://schemas.openxmlformats.org/drawingml/2006/main" xmlns:p="http://schemas.openxmlformats.org/presentationml/2006/main" xmlns:r="http://schemas.openxmlformats.org/officeDocument/2006/relationships">
+  <p:cSld>
+    <p:bg>
+      <p:bgPr>
+        <a:solidFill>
+          <a:srgbClr val="FFFFFF"/>
+        </a:solidFill>
+        <a:effectLst/>
+      </p:bgPr>
+    </p:bg>
+    <p:spTree>
+      <p:nvGrpSpPr>
+        <p:cNvPr id="1" name=""/>
+        <p:cNvGrpSpPr/>
+        <p:nvPr/>
+      </p:nvGrpSpPr>
+      <p:grpSpPr/>
+      <p:sp>
+        <p:nvSpPr>
+          <p:cNvPr id="2" name="TextBox 1"/>
+          <p:cNvSpPr txBox="1"/>
+          <p:nvPr/>
+        </p:nvSpPr>
+        <p:spPr>
+          <a:xfrm>
+            <a:off x="548640" y="320040"/>
+            <a:ext cx="11094415" cy="274320"/>
+          </a:xfrm>
+          <a:prstGeom prst="rect">
+            <a:avLst/>
+          </a:prstGeom>
+          <a:noFill/>
+        </p:spPr>
+        <p:txBody>
+          <a:bodyPr wrap="square" anchor="t" lIns="0" rIns="0" tIns="0" bIns="0"/>
+          <a:lstStyle/>
+          <a:p>
+            <a:pPr algn="l"/>
+            <a:r>
+              <a:rPr sz="1100" b="1" i="0">
+                <a:solidFill>
+                  <a:srgbClr val="54595D"/>
+                </a:solidFill>
+                <a:latin typeface="Calibri"/>
+              </a:rPr>
+              <a:t>NETWORK CABLING  ·  Network Cabling Content Area 2</a:t>
+            </a:r>
+          </a:p>
+        </p:txBody>
+      </p:sp>
+      <p:sp>
+        <p:nvSpPr>
+          <p:cNvPr id="3" name="TextBox 2"/>
+          <p:cNvSpPr txBox="1"/>
+          <p:nvPr/>
+        </p:nvSpPr>
+        <p:spPr>
+          <a:xfrm>
+            <a:off x="548640" y="566928"/>
+            <a:ext cx="11094415" cy="822960"/>
+          </a:xfrm>
+          <a:prstGeom prst="rect">
+            <a:avLst/>
+          </a:prstGeom>
+          <a:noFill/>
+        </p:spPr>
+        <p:txBody>
+          <a:bodyPr wrap="square" anchor="ctr" lIns="0" rIns="0" tIns="0" bIns="0"/>
+          <a:lstStyle/>
+          <a:p>
+            <a:pPr algn="l"/>
+            <a:r>
+              <a:rPr sz="3200" b="1" i="0">
+                <a:solidFill>
+                  <a:srgbClr val="03306E"/>
+                </a:solidFill>
+                <a:latin typeface="Cambria"/>
+              </a:rPr>
+              <a:t>Working at height and in confined spaces</a:t>
+            </a:r>
+          </a:p>
+        </p:txBody>
+      </p:sp>
+      <p:sp>
+        <p:nvSpPr>
+          <p:cNvPr id="4" name="TextBox 3"/>
+          <p:cNvSpPr txBox="1"/>
+          <p:nvPr/>
+        </p:nvSpPr>
+        <p:spPr>
+          <a:xfrm>
+            <a:off x="548640" y="6446520"/>
+            <a:ext cx="8229600" cy="274320"/>
+          </a:xfrm>
+          <a:prstGeom prst="rect">
+            <a:avLst/>
+          </a:prstGeom>
+          <a:noFill/>
+        </p:spPr>
+        <p:txBody>
+          <a:bodyPr wrap="square" anchor="t" lIns="0" rIns="0" tIns="0" bIns="0"/>
+          <a:lstStyle/>
+          <a:p>
+            <a:pPr algn="l"/>
+            <a:r>
+              <a:rPr sz="1000" b="0" i="0">
+                <a:solidFill>
+                  <a:srgbClr val="54595D"/>
+                </a:solidFill>
+                <a:latin typeface="Calibri"/>
+              </a:rPr>
+              <a:t>Digital Support and Security T Level  ·  Health, Safety and Compliance for Cabling</a:t>
+            </a:r>
+          </a:p>
+        </p:txBody>
+      </p:sp>
+      <p:sp>
+        <p:nvSpPr>
+          <p:cNvPr id="5" name="TextBox 4"/>
+          <p:cNvSpPr txBox="1"/>
+          <p:nvPr/>
+        </p:nvSpPr>
+        <p:spPr>
+          <a:xfrm>
+            <a:off x="10728655" y="6446520"/>
+            <a:ext cx="914400" cy="274320"/>
+          </a:xfrm>
+          <a:prstGeom prst="rect">
+            <a:avLst/>
+          </a:prstGeom>
+          <a:noFill/>
+        </p:spPr>
+        <p:txBody>
+          <a:bodyPr wrap="square" anchor="t" lIns="0" rIns="0" tIns="0" bIns="0"/>
+          <a:lstStyle/>
+          <a:p>
+            <a:pPr algn="r"/>
+            <a:r>
+              <a:rPr sz="1000" b="0" i="0">
+                <a:solidFill>
+                  <a:srgbClr val="54595D"/>
+                </a:solidFill>
+                <a:latin typeface="Calibri"/>
+              </a:rPr>
+              <a:t>12</a:t>
+            </a:r>
+          </a:p>
+        </p:txBody>
+      </p:sp>
+      <p:sp>
+        <p:nvSpPr>
+          <p:cNvPr id="6" name="Rounded Rectangle 5"/>
+          <p:cNvSpPr/>
+          <p:nvPr/>
+        </p:nvSpPr>
+        <p:spPr>
+          <a:xfrm>
+            <a:off x="548640" y="1600200"/>
+            <a:ext cx="5364327" cy="640080"/>
+          </a:xfrm>
+          <a:prstGeom prst="roundRect">
+            <a:avLst>
+              <a:gd name="adj" fmla="val 15000"/>
+            </a:avLst>
+          </a:prstGeom>
+          <a:solidFill>
+            <a:srgbClr val="03306E"/>
+          </a:solidFill>
+          <a:ln>
+            <a:noFill/>
+          </a:ln>
+          <a:effectLst/>
+        </p:spPr>
+        <p:style>
+          <a:lnRef idx="1">
+            <a:schemeClr val="accent1"/>
+          </a:lnRef>
+          <a:fillRef idx="3">
+            <a:schemeClr val="accent1"/>
+          </a:fillRef>
+          <a:effectRef idx="2">
+            <a:schemeClr val="accent1"/>
+          </a:effectRef>
+          <a:fontRef idx="minor">
+            <a:schemeClr val="lt1"/>
+          </a:fontRef>
+        </p:style>
+        <p:txBody>
+          <a:bodyPr rtlCol="0" anchor="ctr"/>
+          <a:lstStyle/>
+          <a:p/>
+        </p:txBody>
+      </p:sp>
+      <p:sp>
+        <p:nvSpPr>
+          <p:cNvPr id="7" name="TextBox 6"/>
+          <p:cNvSpPr txBox="1"/>
+          <p:nvPr/>
+        </p:nvSpPr>
+        <p:spPr>
+          <a:xfrm>
+            <a:off x="777240" y="1600200"/>
+            <a:ext cx="4907127" cy="640080"/>
+          </a:xfrm>
+          <a:prstGeom prst="rect">
+            <a:avLst/>
+          </a:prstGeom>
+          <a:noFill/>
+        </p:spPr>
+        <p:txBody>
+          <a:bodyPr wrap="square" anchor="ctr" lIns="0" rIns="0" tIns="0" bIns="0"/>
+          <a:lstStyle/>
+          <a:p>
+            <a:pPr algn="l"/>
+            <a:r>
+              <a:rPr sz="2000" b="1" i="0">
+                <a:solidFill>
+                  <a:srgbClr val="FFFFFF"/>
+                </a:solidFill>
+                <a:latin typeface="Calibri"/>
+              </a:rPr>
+              <a:t>At height</a:t>
+            </a:r>
+          </a:p>
+        </p:txBody>
+      </p:sp>
+      <p:sp>
+        <p:nvSpPr>
+          <p:cNvPr id="8" name="Rounded Rectangle 7"/>
+          <p:cNvSpPr/>
+          <p:nvPr/>
+        </p:nvSpPr>
+        <p:spPr>
+          <a:xfrm>
+            <a:off x="548640" y="2377440"/>
+            <a:ext cx="5364327" cy="3794760"/>
+          </a:xfrm>
+          <a:prstGeom prst="roundRect">
+            <a:avLst>
+              <a:gd name="adj" fmla="val 4000"/>
+            </a:avLst>
+          </a:prstGeom>
+          <a:solidFill>
+            <a:srgbClr val="EAF3FF"/>
+          </a:solidFill>
+          <a:ln>
+            <a:noFill/>
+          </a:ln>
+          <a:effectLst/>
+        </p:spPr>
+        <p:style>
+          <a:lnRef idx="1">
+            <a:schemeClr val="accent1"/>
+          </a:lnRef>
+          <a:fillRef idx="3">
+            <a:schemeClr val="accent1"/>
+          </a:fillRef>
+          <a:effectRef idx="2">
+            <a:schemeClr val="accent1"/>
+          </a:effectRef>
+          <a:fontRef idx="minor">
+            <a:schemeClr val="lt1"/>
+          </a:fontRef>
+        </p:style>
+        <p:txBody>
+          <a:bodyPr rtlCol="0" anchor="ctr"/>
+          <a:lstStyle/>
+          <a:p/>
+        </p:txBody>
+      </p:sp>
+      <p:sp>
+        <p:nvSpPr>
+          <p:cNvPr id="9" name="TextBox 8"/>
+          <p:cNvSpPr txBox="1"/>
+          <p:nvPr/>
+        </p:nvSpPr>
+        <p:spPr>
+          <a:xfrm>
+            <a:off x="822959" y="2606040"/>
+            <a:ext cx="4815687" cy="3337560"/>
+          </a:xfrm>
+          <a:prstGeom prst="rect">
+            <a:avLst/>
+          </a:prstGeom>
+          <a:noFill/>
+        </p:spPr>
+        <p:txBody>
+          <a:bodyPr wrap="square" lIns="0" rIns="0" tIns="0" bIns="0">
+            <a:spAutoFit/>
+          </a:bodyPr>
+          <a:lstStyle/>
+          <a:p>
+            <a:pPr marL="274320" indent="-274320">
+              <a:spcAft>
+                <a:spcPts val="990"/>
+              </a:spcAft>
+              <a:buClr>
+                <a:srgbClr val="0645AD"/>
+              </a:buClr>
+              <a:buFont typeface="Arial"/>
+              <a:buChar char="•"/>
+            </a:pPr>
+            <a:r>
+              <a:rPr sz="2200" b="0">
+                <a:solidFill>
+                  <a:srgbClr val="202122"/>
+                </a:solidFill>
+                <a:latin typeface="Calibri"/>
+              </a:rPr>
+              <a:t>Risk assess before starting</a:t>
+            </a:r>
+          </a:p>
+          <a:p>
+            <a:pPr marL="274320" indent="-274320">
+              <a:spcAft>
+                <a:spcPts val="990"/>
+              </a:spcAft>
+              <a:buClr>
+                <a:srgbClr val="0645AD"/>
+              </a:buClr>
+              <a:buFont typeface="Arial"/>
+              <a:buChar char="•"/>
+            </a:pPr>
+            <a:r>
+              <a:rPr sz="2200" b="0">
+                <a:solidFill>
+                  <a:srgbClr val="202122"/>
+                </a:solidFill>
+                <a:latin typeface="Calibri"/>
+              </a:rPr>
+              <a:t>Use MEWPs safely</a:t>
+            </a:r>
+          </a:p>
+          <a:p>
+            <a:pPr marL="274320" indent="-274320">
+              <a:spcAft>
+                <a:spcPts val="990"/>
+              </a:spcAft>
+              <a:buClr>
+                <a:srgbClr val="0645AD"/>
+              </a:buClr>
+              <a:buFont typeface="Arial"/>
+              <a:buChar char="•"/>
+            </a:pPr>
+            <a:r>
+              <a:rPr sz="2200" b="0">
+                <a:solidFill>
+                  <a:srgbClr val="202122"/>
+                </a:solidFill>
+                <a:latin typeface="Calibri"/>
+              </a:rPr>
+              <a:t>Assemble, inspect and dismantle towers per the manufacturer</a:t>
+            </a:r>
+          </a:p>
+          <a:p>
+            <a:pPr marL="274320" indent="-274320">
+              <a:spcAft>
+                <a:spcPts val="990"/>
+              </a:spcAft>
+              <a:buClr>
+                <a:srgbClr val="0645AD"/>
+              </a:buClr>
+              <a:buFont typeface="Arial"/>
+              <a:buChar char="•"/>
+            </a:pPr>
+            <a:r>
+              <a:rPr sz="2200" b="0">
+                <a:solidFill>
+                  <a:srgbClr val="202122"/>
+                </a:solidFill>
+                <a:latin typeface="Calibri"/>
+              </a:rPr>
+              <a:t>Record findings</a:t>
+            </a:r>
+          </a:p>
+        </p:txBody>
+      </p:sp>
+      <p:sp>
+        <p:nvSpPr>
+          <p:cNvPr id="10" name="Rounded Rectangle 9"/>
+          <p:cNvSpPr/>
+          <p:nvPr/>
+        </p:nvSpPr>
+        <p:spPr>
+          <a:xfrm>
+            <a:off x="6278727" y="1600200"/>
+            <a:ext cx="5364327" cy="640080"/>
+          </a:xfrm>
+          <a:prstGeom prst="roundRect">
+            <a:avLst>
+              <a:gd name="adj" fmla="val 15000"/>
+            </a:avLst>
+          </a:prstGeom>
+          <a:solidFill>
+            <a:srgbClr val="0645AD"/>
+          </a:solidFill>
+          <a:ln>
+            <a:noFill/>
+          </a:ln>
+          <a:effectLst/>
+        </p:spPr>
+        <p:style>
+          <a:lnRef idx="1">
+            <a:schemeClr val="accent1"/>
+          </a:lnRef>
+          <a:fillRef idx="3">
+            <a:schemeClr val="accent1"/>
+          </a:fillRef>
+          <a:effectRef idx="2">
+            <a:schemeClr val="accent1"/>
+          </a:effectRef>
+          <a:fontRef idx="minor">
+            <a:schemeClr val="lt1"/>
+          </a:fontRef>
+        </p:style>
+        <p:txBody>
+          <a:bodyPr rtlCol="0" anchor="ctr"/>
+          <a:lstStyle/>
+          <a:p/>
+        </p:txBody>
+      </p:sp>
+      <p:sp>
+        <p:nvSpPr>
+          <p:cNvPr id="11" name="TextBox 10"/>
+          <p:cNvSpPr txBox="1"/>
+          <p:nvPr/>
+        </p:nvSpPr>
+        <p:spPr>
+          <a:xfrm>
+            <a:off x="6507327" y="1600200"/>
+            <a:ext cx="4907127" cy="640080"/>
+          </a:xfrm>
+          <a:prstGeom prst="rect">
+            <a:avLst/>
+          </a:prstGeom>
+          <a:noFill/>
+        </p:spPr>
+        <p:txBody>
+          <a:bodyPr wrap="square" anchor="ctr" lIns="0" rIns="0" tIns="0" bIns="0"/>
+          <a:lstStyle/>
+          <a:p>
+            <a:pPr algn="l"/>
+            <a:r>
+              <a:rPr sz="2000" b="1" i="0">
+                <a:solidFill>
+                  <a:srgbClr val="FFFFFF"/>
+                </a:solidFill>
+                <a:latin typeface="Calibri"/>
+              </a:rPr>
+              <a:t>Confined spaces</a:t>
+            </a:r>
+          </a:p>
+        </p:txBody>
+      </p:sp>
+      <p:sp>
+        <p:nvSpPr>
+          <p:cNvPr id="12" name="Rounded Rectangle 11"/>
+          <p:cNvSpPr/>
+          <p:nvPr/>
+        </p:nvSpPr>
+        <p:spPr>
+          <a:xfrm>
+            <a:off x="6278727" y="2377440"/>
+            <a:ext cx="5364327" cy="3794760"/>
+          </a:xfrm>
+          <a:prstGeom prst="roundRect">
+            <a:avLst>
+              <a:gd name="adj" fmla="val 4000"/>
+            </a:avLst>
+          </a:prstGeom>
+          <a:solidFill>
+            <a:srgbClr val="EAF3FF"/>
+          </a:solidFill>
+          <a:ln>
+            <a:noFill/>
+          </a:ln>
+          <a:effectLst/>
+        </p:spPr>
+        <p:style>
+          <a:lnRef idx="1">
+            <a:schemeClr val="accent1"/>
+          </a:lnRef>
+          <a:fillRef idx="3">
+            <a:schemeClr val="accent1"/>
+          </a:fillRef>
+          <a:effectRef idx="2">
+            <a:schemeClr val="accent1"/>
+          </a:effectRef>
+          <a:fontRef idx="minor">
+            <a:schemeClr val="lt1"/>
+          </a:fontRef>
+        </p:style>
+        <p:txBody>
+          <a:bodyPr rtlCol="0" anchor="ctr"/>
+          <a:lstStyle/>
+          <a:p/>
+        </p:txBody>
+      </p:sp>
+      <p:sp>
+        <p:nvSpPr>
+          <p:cNvPr id="13" name="TextBox 12"/>
+          <p:cNvSpPr txBox="1"/>
+          <p:nvPr/>
+        </p:nvSpPr>
+        <p:spPr>
+          <a:xfrm>
+            <a:off x="6553047" y="2606040"/>
+            <a:ext cx="4815687" cy="3337560"/>
+          </a:xfrm>
+          <a:prstGeom prst="rect">
+            <a:avLst/>
+          </a:prstGeom>
+          <a:noFill/>
+        </p:spPr>
+        <p:txBody>
+          <a:bodyPr wrap="square" lIns="0" rIns="0" tIns="0" bIns="0">
+            <a:spAutoFit/>
+          </a:bodyPr>
+          <a:lstStyle/>
+          <a:p>
+            <a:pPr marL="274320" indent="-274320">
+              <a:spcAft>
+                <a:spcPts val="990"/>
+              </a:spcAft>
+              <a:buClr>
+                <a:srgbClr val="0645AD"/>
+              </a:buClr>
+              <a:buFont typeface="Arial"/>
+              <a:buChar char="•"/>
+            </a:pPr>
+            <a:r>
+              <a:rPr sz="2200" b="0">
+                <a:solidFill>
+                  <a:srgbClr val="202122"/>
+                </a:solidFill>
+                <a:latin typeface="Calibri"/>
+              </a:rPr>
+              <a:t>Same risk management process</a:t>
+            </a:r>
+          </a:p>
+          <a:p>
+            <a:pPr marL="274320" indent="-274320">
+              <a:spcAft>
+                <a:spcPts val="990"/>
+              </a:spcAft>
+              <a:buClr>
+                <a:srgbClr val="0645AD"/>
+              </a:buClr>
+              <a:buFont typeface="Arial"/>
+              <a:buChar char="•"/>
+            </a:pPr>
+            <a:r>
+              <a:rPr sz="2200" b="0">
+                <a:solidFill>
+                  <a:srgbClr val="202122"/>
+                </a:solidFill>
+                <a:latin typeface="Calibri"/>
+              </a:rPr>
+              <a:t>Correct PPE, properly maintained</a:t>
+            </a:r>
+          </a:p>
+          <a:p>
+            <a:pPr marL="274320" indent="-274320">
+              <a:spcAft>
+                <a:spcPts val="990"/>
+              </a:spcAft>
+              <a:buClr>
+                <a:srgbClr val="0645AD"/>
+              </a:buClr>
+              <a:buFont typeface="Arial"/>
+              <a:buChar char="•"/>
+            </a:pPr>
+            <a:r>
+              <a:rPr sz="2200" b="0">
+                <a:solidFill>
+                  <a:srgbClr val="202122"/>
+                </a:solidFill>
+                <a:latin typeface="Calibri"/>
+              </a:rPr>
+              <a:t>Plan for rescue</a:t>
+            </a:r>
+          </a:p>
+          <a:p>
+            <a:pPr marL="274320" indent="-274320">
+              <a:spcAft>
+                <a:spcPts val="990"/>
+              </a:spcAft>
+              <a:buClr>
+                <a:srgbClr val="0645AD"/>
+              </a:buClr>
+              <a:buFont typeface="Arial"/>
+              <a:buChar char="•"/>
+            </a:pPr>
+            <a:r>
+              <a:rPr sz="2200" b="0">
+                <a:solidFill>
+                  <a:srgbClr val="202122"/>
+                </a:solidFill>
+                <a:latin typeface="Calibri"/>
+              </a:rPr>
+              <a:t>Record findings clearly</a:t>
+            </a:r>
+          </a:p>
+        </p:txBody>
+      </p:sp>
+    </p:spTree>
+  </p:cSld>
+  <p:clrMapOvr>
+    <a:masterClrMapping/>
+  </p:clrMapOvr>
+</p:sld>
+</file>
+
+<file path=ppt/slides/slide13.xml><?xml version="1.0" encoding="utf-8"?>
+<p:sld xmlns:a="http://schemas.openxmlformats.org/drawingml/2006/main" xmlns:p="http://schemas.openxmlformats.org/presentationml/2006/main" xmlns:r="http://schemas.openxmlformats.org/officeDocument/2006/relationships">
+  <p:cSld>
+    <p:bg>
+      <p:bgPr>
+        <a:solidFill>
+          <a:srgbClr val="FFFFFF"/>
+        </a:solidFill>
+        <a:effectLst/>
+      </p:bgPr>
+    </p:bg>
+    <p:spTree>
+      <p:nvGrpSpPr>
+        <p:cNvPr id="1" name=""/>
+        <p:cNvGrpSpPr/>
+        <p:nvPr/>
+      </p:nvGrpSpPr>
+      <p:grpSpPr/>
+      <p:sp>
+        <p:nvSpPr>
+          <p:cNvPr id="2" name="TextBox 1"/>
+          <p:cNvSpPr txBox="1"/>
+          <p:nvPr/>
+        </p:nvSpPr>
+        <p:spPr>
+          <a:xfrm>
+            <a:off x="548640" y="320040"/>
+            <a:ext cx="11094415" cy="274320"/>
+          </a:xfrm>
+          <a:prstGeom prst="rect">
+            <a:avLst/>
+          </a:prstGeom>
+          <a:noFill/>
+        </p:spPr>
+        <p:txBody>
+          <a:bodyPr wrap="square" anchor="t" lIns="0" rIns="0" tIns="0" bIns="0"/>
+          <a:lstStyle/>
+          <a:p>
+            <a:pPr algn="l"/>
+            <a:r>
+              <a:rPr sz="1100" b="1" i="0">
+                <a:solidFill>
+                  <a:srgbClr val="54595D"/>
+                </a:solidFill>
+                <a:latin typeface="Calibri"/>
+              </a:rPr>
+              <a:t>NETWORK CABLING  ·  Network Cabling Content Area 2</a:t>
+            </a:r>
+          </a:p>
+        </p:txBody>
+      </p:sp>
+      <p:sp>
+        <p:nvSpPr>
+          <p:cNvPr id="3" name="TextBox 2"/>
+          <p:cNvSpPr txBox="1"/>
+          <p:nvPr/>
+        </p:nvSpPr>
+        <p:spPr>
+          <a:xfrm>
+            <a:off x="548640" y="566928"/>
+            <a:ext cx="11094415" cy="822960"/>
+          </a:xfrm>
+          <a:prstGeom prst="rect">
+            <a:avLst/>
+          </a:prstGeom>
+          <a:noFill/>
+        </p:spPr>
+        <p:txBody>
+          <a:bodyPr wrap="square" anchor="ctr" lIns="0" rIns="0" tIns="0" bIns="0"/>
+          <a:lstStyle/>
+          <a:p>
+            <a:pPr algn="l"/>
+            <a:r>
+              <a:rPr sz="3100" b="1" i="0">
+                <a:solidFill>
+                  <a:srgbClr val="03306E"/>
+                </a:solidFill>
+                <a:latin typeface="Cambria"/>
+              </a:rPr>
+              <a:t>Quick check: Working at height and in confined spaces</a:t>
+            </a:r>
+          </a:p>
+        </p:txBody>
+      </p:sp>
+      <p:sp>
+        <p:nvSpPr>
+          <p:cNvPr id="4" name="TextBox 3"/>
+          <p:cNvSpPr txBox="1"/>
+          <p:nvPr/>
+        </p:nvSpPr>
+        <p:spPr>
+          <a:xfrm>
+            <a:off x="548640" y="6446520"/>
+            <a:ext cx="8229600" cy="274320"/>
+          </a:xfrm>
+          <a:prstGeom prst="rect">
+            <a:avLst/>
+          </a:prstGeom>
+          <a:noFill/>
+        </p:spPr>
+        <p:txBody>
+          <a:bodyPr wrap="square" anchor="t" lIns="0" rIns="0" tIns="0" bIns="0"/>
+          <a:lstStyle/>
+          <a:p>
+            <a:pPr algn="l"/>
+            <a:r>
+              <a:rPr sz="1000" b="0" i="0">
+                <a:solidFill>
+                  <a:srgbClr val="54595D"/>
+                </a:solidFill>
+                <a:latin typeface="Calibri"/>
+              </a:rPr>
+              <a:t>Digital Support and Security T Level  ·  Health, Safety and Compliance for Cabling</a:t>
+            </a:r>
+          </a:p>
+        </p:txBody>
+      </p:sp>
+      <p:sp>
+        <p:nvSpPr>
+          <p:cNvPr id="5" name="TextBox 4"/>
+          <p:cNvSpPr txBox="1"/>
+          <p:nvPr/>
+        </p:nvSpPr>
+        <p:spPr>
+          <a:xfrm>
+            <a:off x="10728655" y="6446520"/>
+            <a:ext cx="914400" cy="274320"/>
+          </a:xfrm>
+          <a:prstGeom prst="rect">
+            <a:avLst/>
+          </a:prstGeom>
+          <a:noFill/>
+        </p:spPr>
+        <p:txBody>
+          <a:bodyPr wrap="square" anchor="t" lIns="0" rIns="0" tIns="0" bIns="0"/>
+          <a:lstStyle/>
+          <a:p>
+            <a:pPr algn="r"/>
+            <a:r>
+              <a:rPr sz="1000" b="0" i="0">
+                <a:solidFill>
+                  <a:srgbClr val="54595D"/>
+                </a:solidFill>
+                <a:latin typeface="Calibri"/>
+              </a:rPr>
+              <a:t>13</a:t>
+            </a:r>
+          </a:p>
+        </p:txBody>
+      </p:sp>
+      <p:sp>
+        <p:nvSpPr>
+          <p:cNvPr id="6" name="Oval 5"/>
+          <p:cNvSpPr/>
+          <p:nvPr/>
+        </p:nvSpPr>
+        <p:spPr>
+          <a:xfrm>
+            <a:off x="548640" y="1691640"/>
+            <a:ext cx="502920" cy="502920"/>
+          </a:xfrm>
+          <a:prstGeom prst="ellipse">
+            <a:avLst/>
+          </a:prstGeom>
+          <a:solidFill>
+            <a:srgbClr val="F2B705"/>
+          </a:solidFill>
+          <a:ln>
+            <a:noFill/>
+          </a:ln>
+          <a:effectLst/>
+        </p:spPr>
+        <p:style>
+          <a:lnRef idx="1">
+            <a:schemeClr val="accent1"/>
+          </a:lnRef>
+          <a:fillRef idx="3">
+            <a:schemeClr val="accent1"/>
+          </a:fillRef>
+          <a:effectRef idx="2">
+            <a:schemeClr val="accent1"/>
+          </a:effectRef>
+          <a:fontRef idx="minor">
+            <a:schemeClr val="lt1"/>
+          </a:fontRef>
+        </p:style>
+        <p:txBody>
+          <a:bodyPr rtlCol="0" anchor="ctr" lIns="0" rIns="0" tIns="0" bIns="0"/>
+          <a:lstStyle/>
+          <a:p>
+            <a:pPr algn="ctr"/>
+            <a:r>
+              <a:rPr sz="1600" b="1">
+                <a:solidFill>
+                  <a:srgbClr val="202122"/>
+                </a:solidFill>
+                <a:latin typeface="Calibri"/>
+              </a:rPr>
+              <a:t>1</a:t>
+            </a:r>
+          </a:p>
+        </p:txBody>
+      </p:sp>
+      <p:sp>
+        <p:nvSpPr>
+          <p:cNvPr id="7" name="TextBox 6"/>
+          <p:cNvSpPr txBox="1"/>
+          <p:nvPr/>
+        </p:nvSpPr>
+        <p:spPr>
+          <a:xfrm>
+            <a:off x="1371600" y="1645920"/>
+            <a:ext cx="10271455" cy="1188720"/>
+          </a:xfrm>
+          <a:prstGeom prst="rect">
+            <a:avLst/>
+          </a:prstGeom>
+          <a:noFill/>
+        </p:spPr>
+        <p:txBody>
+          <a:bodyPr wrap="square" anchor="t" lIns="0" rIns="0" tIns="0" bIns="0"/>
+          <a:lstStyle/>
+          <a:p>
+            <a:pPr algn="l"/>
+            <a:r>
+              <a:rPr sz="2400" b="0" i="0">
+                <a:solidFill>
+                  <a:srgbClr val="202122"/>
+                </a:solidFill>
+                <a:latin typeface="Calibri"/>
+              </a:rPr>
+              <a:t>Who may operate a MEWP?</a:t>
+            </a:r>
+          </a:p>
+        </p:txBody>
+      </p:sp>
+      <p:sp>
+        <p:nvSpPr>
+          <p:cNvPr id="8" name="Oval 7"/>
+          <p:cNvSpPr/>
+          <p:nvPr/>
+        </p:nvSpPr>
+        <p:spPr>
+          <a:xfrm>
+            <a:off x="548640" y="3108960"/>
+            <a:ext cx="502920" cy="502920"/>
+          </a:xfrm>
+          <a:prstGeom prst="ellipse">
+            <a:avLst/>
+          </a:prstGeom>
+          <a:solidFill>
+            <a:srgbClr val="F2B705"/>
+          </a:solidFill>
+          <a:ln>
+            <a:noFill/>
+          </a:ln>
+          <a:effectLst/>
+        </p:spPr>
+        <p:style>
+          <a:lnRef idx="1">
+            <a:schemeClr val="accent1"/>
+          </a:lnRef>
+          <a:fillRef idx="3">
+            <a:schemeClr val="accent1"/>
+          </a:fillRef>
+          <a:effectRef idx="2">
+            <a:schemeClr val="accent1"/>
+          </a:effectRef>
+          <a:fontRef idx="minor">
+            <a:schemeClr val="lt1"/>
+          </a:fontRef>
+        </p:style>
+        <p:txBody>
+          <a:bodyPr rtlCol="0" anchor="ctr" lIns="0" rIns="0" tIns="0" bIns="0"/>
+          <a:lstStyle/>
+          <a:p>
+            <a:pPr algn="ctr"/>
+            <a:r>
+              <a:rPr sz="1600" b="1">
+                <a:solidFill>
+                  <a:srgbClr val="202122"/>
+                </a:solidFill>
+                <a:latin typeface="Calibri"/>
+              </a:rPr>
+              <a:t>2</a:t>
+            </a:r>
+          </a:p>
+        </p:txBody>
+      </p:sp>
+      <p:sp>
+        <p:nvSpPr>
+          <p:cNvPr id="9" name="TextBox 8"/>
+          <p:cNvSpPr txBox="1"/>
+          <p:nvPr/>
+        </p:nvSpPr>
+        <p:spPr>
+          <a:xfrm>
+            <a:off x="1371600" y="3063240"/>
+            <a:ext cx="10271455" cy="1188720"/>
+          </a:xfrm>
+          <a:prstGeom prst="rect">
+            <a:avLst/>
+          </a:prstGeom>
+          <a:noFill/>
+        </p:spPr>
+        <p:txBody>
+          <a:bodyPr wrap="square" anchor="t" lIns="0" rIns="0" tIns="0" bIns="0"/>
+          <a:lstStyle/>
+          <a:p>
+            <a:pPr algn="l"/>
+            <a:r>
+              <a:rPr sz="2400" b="0" i="0">
+                <a:solidFill>
+                  <a:srgbClr val="202122"/>
+                </a:solidFill>
+                <a:latin typeface="Calibri"/>
+              </a:rPr>
+              <a:t>Which regulations cover confined spaces?</a:t>
+            </a:r>
+          </a:p>
+        </p:txBody>
+      </p:sp>
+      <p:sp>
+        <p:nvSpPr>
+          <p:cNvPr id="10" name="Oval 9"/>
+          <p:cNvSpPr/>
+          <p:nvPr/>
+        </p:nvSpPr>
+        <p:spPr>
+          <a:xfrm>
+            <a:off x="548640" y="4526280"/>
+            <a:ext cx="502920" cy="502920"/>
+          </a:xfrm>
+          <a:prstGeom prst="ellipse">
+            <a:avLst/>
+          </a:prstGeom>
+          <a:solidFill>
+            <a:srgbClr val="F2B705"/>
+          </a:solidFill>
+          <a:ln>
+            <a:noFill/>
+          </a:ln>
+          <a:effectLst/>
+        </p:spPr>
+        <p:style>
+          <a:lnRef idx="1">
+            <a:schemeClr val="accent1"/>
+          </a:lnRef>
+          <a:fillRef idx="3">
+            <a:schemeClr val="accent1"/>
+          </a:fillRef>
+          <a:effectRef idx="2">
+            <a:schemeClr val="accent1"/>
+          </a:effectRef>
+          <a:fontRef idx="minor">
+            <a:schemeClr val="lt1"/>
+          </a:fontRef>
+        </p:style>
+        <p:txBody>
+          <a:bodyPr rtlCol="0" anchor="ctr" lIns="0" rIns="0" tIns="0" bIns="0"/>
+          <a:lstStyle/>
+          <a:p>
+            <a:pPr algn="ctr"/>
+            <a:r>
+              <a:rPr sz="1600" b="1">
+                <a:solidFill>
+                  <a:srgbClr val="202122"/>
+                </a:solidFill>
+                <a:latin typeface="Calibri"/>
+              </a:rPr>
+              <a:t>3</a:t>
+            </a:r>
+          </a:p>
+        </p:txBody>
+      </p:sp>
+      <p:sp>
+        <p:nvSpPr>
+          <p:cNvPr id="11" name="TextBox 10"/>
+          <p:cNvSpPr txBox="1"/>
+          <p:nvPr/>
+        </p:nvSpPr>
+        <p:spPr>
+          <a:xfrm>
+            <a:off x="1371600" y="4480560"/>
+            <a:ext cx="10271455" cy="1188720"/>
+          </a:xfrm>
+          <a:prstGeom prst="rect">
+            <a:avLst/>
+          </a:prstGeom>
+          <a:noFill/>
+        </p:spPr>
+        <p:txBody>
+          <a:bodyPr wrap="square" anchor="t" lIns="0" rIns="0" tIns="0" bIns="0"/>
+          <a:lstStyle/>
+          <a:p>
+            <a:pPr algn="l"/>
+            <a:r>
+              <a:rPr sz="2400" b="0" i="0">
+                <a:solidFill>
+                  <a:srgbClr val="202122"/>
+                </a:solidFill>
+                <a:latin typeface="Calibri"/>
+              </a:rPr>
+              <a:t>Why is a rescue plan needed for confined spaces?</a:t>
+            </a:r>
+          </a:p>
+        </p:txBody>
+      </p:sp>
+      <p:sp>
+        <p:nvSpPr>
+          <p:cNvPr id="12" name="TextBox 11"/>
+          <p:cNvSpPr txBox="1"/>
+          <p:nvPr/>
+        </p:nvSpPr>
+        <p:spPr>
+          <a:xfrm>
+            <a:off x="548640" y="5852160"/>
+            <a:ext cx="11094415" cy="365760"/>
+          </a:xfrm>
+          <a:prstGeom prst="rect">
+            <a:avLst/>
+          </a:prstGeom>
+          <a:noFill/>
+        </p:spPr>
+        <p:txBody>
+          <a:bodyPr wrap="square" anchor="t" lIns="0" rIns="0" tIns="0" bIns="0"/>
+          <a:lstStyle/>
+          <a:p>
+            <a:pPr algn="l"/>
+            <a:r>
+              <a:rPr sz="1300" b="0" i="1">
+                <a:solidFill>
+                  <a:srgbClr val="54595D"/>
+                </a:solidFill>
+                <a:latin typeface="Calibri"/>
+              </a:rPr>
+              <a:t>Answer on mini whiteboards or in your book. Answers are in the speaker notes.</a:t>
+            </a:r>
+          </a:p>
+        </p:txBody>
+      </p:sp>
+    </p:spTree>
+  </p:cSld>
+  <p:clrMapOvr>
+    <a:masterClrMapping/>
+  </p:clrMapOvr>
+</p:sld>
+</file>
+
+<file path=ppt/slides/slide14.xml><?xml version="1.0" encoding="utf-8"?>
+<p:sld xmlns:a="http://schemas.openxmlformats.org/drawingml/2006/main" xmlns:p="http://schemas.openxmlformats.org/presentationml/2006/main" xmlns:r="http://schemas.openxmlformats.org/officeDocument/2006/relationships">
+  <p:cSld>
+    <p:bg>
+      <p:bgPr>
+        <a:solidFill>
+          <a:srgbClr val="FFFFFF"/>
+        </a:solidFill>
+        <a:effectLst/>
+      </p:bgPr>
+    </p:bg>
+    <p:spTree>
+      <p:nvGrpSpPr>
+        <p:cNvPr id="1" name=""/>
+        <p:cNvGrpSpPr/>
+        <p:nvPr/>
+      </p:nvGrpSpPr>
+      <p:grpSpPr/>
+      <p:sp>
+        <p:nvSpPr>
+          <p:cNvPr id="2" name="TextBox 1"/>
+          <p:cNvSpPr txBox="1"/>
+          <p:nvPr/>
+        </p:nvSpPr>
+        <p:spPr>
+          <a:xfrm>
+            <a:off x="548640" y="320040"/>
+            <a:ext cx="11094415" cy="274320"/>
+          </a:xfrm>
+          <a:prstGeom prst="rect">
+            <a:avLst/>
+          </a:prstGeom>
+          <a:noFill/>
+        </p:spPr>
+        <p:txBody>
+          <a:bodyPr wrap="square" anchor="t" lIns="0" rIns="0" tIns="0" bIns="0"/>
+          <a:lstStyle/>
+          <a:p>
+            <a:pPr algn="l"/>
+            <a:r>
+              <a:rPr sz="1100" b="1" i="0">
+                <a:solidFill>
+                  <a:srgbClr val="54595D"/>
+                </a:solidFill>
+                <a:latin typeface="Calibri"/>
+              </a:rPr>
+              <a:t>NETWORK CABLING  ·  Network Cabling Content Area 2</a:t>
+            </a:r>
+          </a:p>
+        </p:txBody>
+      </p:sp>
+      <p:sp>
+        <p:nvSpPr>
+          <p:cNvPr id="3" name="TextBox 2"/>
+          <p:cNvSpPr txBox="1"/>
+          <p:nvPr/>
+        </p:nvSpPr>
+        <p:spPr>
+          <a:xfrm>
+            <a:off x="548640" y="566928"/>
+            <a:ext cx="11094415" cy="822960"/>
+          </a:xfrm>
+          <a:prstGeom prst="rect">
+            <a:avLst/>
+          </a:prstGeom>
+          <a:noFill/>
+        </p:spPr>
+        <p:txBody>
+          <a:bodyPr wrap="square" anchor="ctr" lIns="0" rIns="0" tIns="0" bIns="0"/>
+          <a:lstStyle/>
+          <a:p>
+            <a:pPr algn="l"/>
+            <a:r>
+              <a:rPr sz="3200" b="1" i="0">
+                <a:solidFill>
+                  <a:srgbClr val="03306E"/>
+                </a:solidFill>
+                <a:latin typeface="Cambria"/>
+              </a:rPr>
+              <a:t>Check your understanding</a:t>
+            </a:r>
+          </a:p>
+        </p:txBody>
+      </p:sp>
+      <p:sp>
+        <p:nvSpPr>
+          <p:cNvPr id="4" name="TextBox 3"/>
+          <p:cNvSpPr txBox="1"/>
+          <p:nvPr/>
+        </p:nvSpPr>
+        <p:spPr>
+          <a:xfrm>
+            <a:off x="548640" y="6446520"/>
+            <a:ext cx="8229600" cy="274320"/>
+          </a:xfrm>
+          <a:prstGeom prst="rect">
+            <a:avLst/>
+          </a:prstGeom>
+          <a:noFill/>
+        </p:spPr>
+        <p:txBody>
+          <a:bodyPr wrap="square" anchor="t" lIns="0" rIns="0" tIns="0" bIns="0"/>
+          <a:lstStyle/>
+          <a:p>
+            <a:pPr algn="l"/>
+            <a:r>
+              <a:rPr sz="1000" b="0" i="0">
+                <a:solidFill>
+                  <a:srgbClr val="54595D"/>
+                </a:solidFill>
+                <a:latin typeface="Calibri"/>
+              </a:rPr>
+              <a:t>Digital Support and Security T Level  ·  Health, Safety and Compliance for Cabling</a:t>
+            </a:r>
+          </a:p>
+        </p:txBody>
+      </p:sp>
+      <p:sp>
+        <p:nvSpPr>
+          <p:cNvPr id="5" name="TextBox 4"/>
+          <p:cNvSpPr txBox="1"/>
+          <p:nvPr/>
+        </p:nvSpPr>
+        <p:spPr>
+          <a:xfrm>
+            <a:off x="10728655" y="6446520"/>
+            <a:ext cx="914400" cy="274320"/>
+          </a:xfrm>
+          <a:prstGeom prst="rect">
+            <a:avLst/>
+          </a:prstGeom>
+          <a:noFill/>
+        </p:spPr>
+        <p:txBody>
+          <a:bodyPr wrap="square" anchor="t" lIns="0" rIns="0" tIns="0" bIns="0"/>
+          <a:lstStyle/>
+          <a:p>
+            <a:pPr algn="r"/>
+            <a:r>
+              <a:rPr sz="1000" b="0" i="0">
+                <a:solidFill>
+                  <a:srgbClr val="54595D"/>
+                </a:solidFill>
+                <a:latin typeface="Calibri"/>
+              </a:rPr>
+              <a:t>14</a:t>
+            </a:r>
+          </a:p>
+        </p:txBody>
+      </p:sp>
+      <p:sp>
+        <p:nvSpPr>
+          <p:cNvPr id="6" name="Oval 5"/>
+          <p:cNvSpPr/>
+          <p:nvPr/>
+        </p:nvSpPr>
+        <p:spPr>
+          <a:xfrm>
+            <a:off x="548640" y="1618488"/>
+            <a:ext cx="411480" cy="411480"/>
+          </a:xfrm>
+          <a:prstGeom prst="ellipse">
+            <a:avLst/>
+          </a:prstGeom>
+          <a:solidFill>
+            <a:srgbClr val="F2B705"/>
+          </a:solidFill>
+          <a:ln>
+            <a:noFill/>
+          </a:ln>
+          <a:effectLst/>
+        </p:spPr>
+        <p:style>
+          <a:lnRef idx="1">
+            <a:schemeClr val="accent1"/>
+          </a:lnRef>
+          <a:fillRef idx="3">
+            <a:schemeClr val="accent1"/>
+          </a:fillRef>
+          <a:effectRef idx="2">
+            <a:schemeClr val="accent1"/>
+          </a:effectRef>
+          <a:fontRef idx="minor">
+            <a:schemeClr val="lt1"/>
+          </a:fontRef>
+        </p:style>
+        <p:txBody>
+          <a:bodyPr rtlCol="0" anchor="ctr" lIns="0" rIns="0" tIns="0" bIns="0"/>
+          <a:lstStyle/>
+          <a:p>
+            <a:pPr algn="ctr"/>
+            <a:r>
+              <a:rPr sz="1400" b="1">
+                <a:solidFill>
+                  <a:srgbClr val="202122"/>
+                </a:solidFill>
+                <a:latin typeface="Calibri"/>
+              </a:rPr>
+              <a:t>1</a:t>
+            </a:r>
+          </a:p>
+        </p:txBody>
+      </p:sp>
+      <p:sp>
+        <p:nvSpPr>
+          <p:cNvPr id="7" name="TextBox 6"/>
+          <p:cNvSpPr txBox="1"/>
+          <p:nvPr/>
+        </p:nvSpPr>
+        <p:spPr>
+          <a:xfrm>
+            <a:off x="1234440" y="1600200"/>
+            <a:ext cx="10408615" cy="1030986"/>
+          </a:xfrm>
+          <a:prstGeom prst="rect">
+            <a:avLst/>
+          </a:prstGeom>
+          <a:noFill/>
+        </p:spPr>
+        <p:txBody>
+          <a:bodyPr wrap="square" anchor="t" lIns="0" rIns="0" tIns="0" bIns="0"/>
+          <a:lstStyle/>
+          <a:p>
+            <a:pPr algn="l"/>
+            <a:r>
+              <a:rPr sz="2200" b="0" i="0">
+                <a:solidFill>
+                  <a:srgbClr val="202122"/>
+                </a:solidFill>
+                <a:latin typeface="Calibri"/>
+              </a:rPr>
+              <a:t>Which standard covers segregation of data and power cables?</a:t>
+            </a:r>
+          </a:p>
+        </p:txBody>
+      </p:sp>
+      <p:sp>
+        <p:nvSpPr>
+          <p:cNvPr id="8" name="Oval 7"/>
+          <p:cNvSpPr/>
+          <p:nvPr/>
+        </p:nvSpPr>
+        <p:spPr>
+          <a:xfrm>
+            <a:off x="548640" y="2814066"/>
+            <a:ext cx="411480" cy="411480"/>
+          </a:xfrm>
+          <a:prstGeom prst="ellipse">
+            <a:avLst/>
+          </a:prstGeom>
+          <a:solidFill>
+            <a:srgbClr val="F2B705"/>
+          </a:solidFill>
+          <a:ln>
+            <a:noFill/>
+          </a:ln>
+          <a:effectLst/>
+        </p:spPr>
+        <p:style>
+          <a:lnRef idx="1">
+            <a:schemeClr val="accent1"/>
+          </a:lnRef>
+          <a:fillRef idx="3">
+            <a:schemeClr val="accent1"/>
+          </a:fillRef>
+          <a:effectRef idx="2">
+            <a:schemeClr val="accent1"/>
+          </a:effectRef>
+          <a:fontRef idx="minor">
+            <a:schemeClr val="lt1"/>
+          </a:fontRef>
+        </p:style>
+        <p:txBody>
+          <a:bodyPr rtlCol="0" anchor="ctr" lIns="0" rIns="0" tIns="0" bIns="0"/>
+          <a:lstStyle/>
+          <a:p>
+            <a:pPr algn="ctr"/>
+            <a:r>
+              <a:rPr sz="1400" b="1">
+                <a:solidFill>
+                  <a:srgbClr val="202122"/>
+                </a:solidFill>
+                <a:latin typeface="Calibri"/>
+              </a:rPr>
+              <a:t>2</a:t>
+            </a:r>
+          </a:p>
+        </p:txBody>
+      </p:sp>
+      <p:sp>
+        <p:nvSpPr>
+          <p:cNvPr id="9" name="TextBox 8"/>
+          <p:cNvSpPr txBox="1"/>
+          <p:nvPr/>
+        </p:nvSpPr>
+        <p:spPr>
+          <a:xfrm>
+            <a:off x="1234440" y="2795778"/>
+            <a:ext cx="10408615" cy="1030986"/>
+          </a:xfrm>
+          <a:prstGeom prst="rect">
+            <a:avLst/>
+          </a:prstGeom>
+          <a:noFill/>
+        </p:spPr>
+        <p:txBody>
+          <a:bodyPr wrap="square" anchor="t" lIns="0" rIns="0" tIns="0" bIns="0"/>
+          <a:lstStyle/>
+          <a:p>
+            <a:pPr algn="l"/>
+            <a:r>
+              <a:rPr sz="2200" b="0" i="0">
+                <a:solidFill>
+                  <a:srgbClr val="202122"/>
+                </a:solidFill>
+                <a:latin typeface="Calibri"/>
+              </a:rPr>
+              <a:t>What is the first thing to do if you suspect asbestos?</a:t>
+            </a:r>
+          </a:p>
+        </p:txBody>
+      </p:sp>
+      <p:sp>
+        <p:nvSpPr>
+          <p:cNvPr id="10" name="Oval 9"/>
+          <p:cNvSpPr/>
+          <p:nvPr/>
+        </p:nvSpPr>
+        <p:spPr>
+          <a:xfrm>
+            <a:off x="548640" y="4009644"/>
+            <a:ext cx="411480" cy="411480"/>
+          </a:xfrm>
+          <a:prstGeom prst="ellipse">
+            <a:avLst/>
+          </a:prstGeom>
+          <a:solidFill>
+            <a:srgbClr val="F2B705"/>
+          </a:solidFill>
+          <a:ln>
+            <a:noFill/>
+          </a:ln>
+          <a:effectLst/>
+        </p:spPr>
+        <p:style>
+          <a:lnRef idx="1">
+            <a:schemeClr val="accent1"/>
+          </a:lnRef>
+          <a:fillRef idx="3">
+            <a:schemeClr val="accent1"/>
+          </a:fillRef>
+          <a:effectRef idx="2">
+            <a:schemeClr val="accent1"/>
+          </a:effectRef>
+          <a:fontRef idx="minor">
+            <a:schemeClr val="lt1"/>
+          </a:fontRef>
+        </p:style>
+        <p:txBody>
+          <a:bodyPr rtlCol="0" anchor="ctr" lIns="0" rIns="0" tIns="0" bIns="0"/>
+          <a:lstStyle/>
+          <a:p>
+            <a:pPr algn="ctr"/>
+            <a:r>
+              <a:rPr sz="1400" b="1">
+                <a:solidFill>
+                  <a:srgbClr val="202122"/>
+                </a:solidFill>
+                <a:latin typeface="Calibri"/>
+              </a:rPr>
+              <a:t>3</a:t>
+            </a:r>
+          </a:p>
+        </p:txBody>
+      </p:sp>
+      <p:sp>
+        <p:nvSpPr>
+          <p:cNvPr id="11" name="TextBox 10"/>
+          <p:cNvSpPr txBox="1"/>
+          <p:nvPr/>
+        </p:nvSpPr>
+        <p:spPr>
+          <a:xfrm>
+            <a:off x="1234440" y="3991356"/>
+            <a:ext cx="10408615" cy="1030986"/>
+          </a:xfrm>
+          <a:prstGeom prst="rect">
+            <a:avLst/>
+          </a:prstGeom>
+          <a:noFill/>
+        </p:spPr>
+        <p:txBody>
+          <a:bodyPr wrap="square" anchor="t" lIns="0" rIns="0" tIns="0" bIns="0"/>
+          <a:lstStyle/>
+          <a:p>
+            <a:pPr algn="l"/>
+            <a:r>
+              <a:rPr sz="2200" b="0" i="0">
+                <a:solidFill>
+                  <a:srgbClr val="202122"/>
+                </a:solidFill>
+                <a:latin typeface="Calibri"/>
+              </a:rPr>
+              <a:t>Which regulations cover work in ceiling voids and ducts?</a:t>
+            </a:r>
+          </a:p>
+        </p:txBody>
+      </p:sp>
+      <p:sp>
+        <p:nvSpPr>
+          <p:cNvPr id="12" name="Oval 11"/>
+          <p:cNvSpPr/>
+          <p:nvPr/>
+        </p:nvSpPr>
+        <p:spPr>
+          <a:xfrm>
+            <a:off x="548640" y="5205221"/>
+            <a:ext cx="411480" cy="411480"/>
+          </a:xfrm>
+          <a:prstGeom prst="ellipse">
+            <a:avLst/>
+          </a:prstGeom>
+          <a:solidFill>
+            <a:srgbClr val="F2B705"/>
+          </a:solidFill>
+          <a:ln>
+            <a:noFill/>
+          </a:ln>
+          <a:effectLst/>
+        </p:spPr>
+        <p:style>
+          <a:lnRef idx="1">
+            <a:schemeClr val="accent1"/>
+          </a:lnRef>
+          <a:fillRef idx="3">
+            <a:schemeClr val="accent1"/>
+          </a:fillRef>
+          <a:effectRef idx="2">
+            <a:schemeClr val="accent1"/>
+          </a:effectRef>
+          <a:fontRef idx="minor">
+            <a:schemeClr val="lt1"/>
+          </a:fontRef>
+        </p:style>
+        <p:txBody>
+          <a:bodyPr rtlCol="0" anchor="ctr" lIns="0" rIns="0" tIns="0" bIns="0"/>
+          <a:lstStyle/>
+          <a:p>
+            <a:pPr algn="ctr"/>
+            <a:r>
+              <a:rPr sz="1400" b="1">
+                <a:solidFill>
+                  <a:srgbClr val="202122"/>
+                </a:solidFill>
+                <a:latin typeface="Calibri"/>
+              </a:rPr>
+              <a:t>4</a:t>
+            </a:r>
+          </a:p>
+        </p:txBody>
+      </p:sp>
+      <p:sp>
+        <p:nvSpPr>
+          <p:cNvPr id="13" name="TextBox 12"/>
+          <p:cNvSpPr txBox="1"/>
+          <p:nvPr/>
+        </p:nvSpPr>
+        <p:spPr>
+          <a:xfrm>
+            <a:off x="1234440" y="5186933"/>
+            <a:ext cx="10408615" cy="1030986"/>
+          </a:xfrm>
+          <a:prstGeom prst="rect">
+            <a:avLst/>
+          </a:prstGeom>
+          <a:noFill/>
+        </p:spPr>
+        <p:txBody>
+          <a:bodyPr wrap="square" anchor="t" lIns="0" rIns="0" tIns="0" bIns="0"/>
+          <a:lstStyle/>
+          <a:p>
+            <a:pPr algn="l"/>
+            <a:r>
+              <a:rPr sz="2200" b="0" i="0">
+                <a:solidFill>
+                  <a:srgbClr val="202122"/>
+                </a:solidFill>
+                <a:latin typeface="Calibri"/>
+              </a:rPr>
+              <a:t>Which standard covers optical fibre safety?</a:t>
+            </a:r>
+          </a:p>
+        </p:txBody>
+      </p:sp>
+    </p:spTree>
+  </p:cSld>
+  <p:clrMapOvr>
+    <a:masterClrMapping/>
+  </p:clrMapOvr>
+</p:sld>
+</file>
+
+<file path=ppt/slides/slide15.xml><?xml version="1.0" encoding="utf-8"?>
+<p:sld xmlns:a="http://schemas.openxmlformats.org/drawingml/2006/main" xmlns:p="http://schemas.openxmlformats.org/presentationml/2006/main" xmlns:r="http://schemas.openxmlformats.org/officeDocument/2006/relationships">
+  <p:cSld>
+    <p:bg>
+      <p:bgPr>
+        <a:solidFill>
+          <a:srgbClr val="FFFFFF"/>
+        </a:solidFill>
+        <a:effectLst/>
+      </p:bgPr>
+    </p:bg>
+    <p:spTree>
+      <p:nvGrpSpPr>
+        <p:cNvPr id="1" name=""/>
+        <p:cNvGrpSpPr/>
+        <p:nvPr/>
+      </p:nvGrpSpPr>
+      <p:grpSpPr/>
+      <p:sp>
+        <p:nvSpPr>
+          <p:cNvPr id="2" name="TextBox 1"/>
+          <p:cNvSpPr txBox="1"/>
+          <p:nvPr/>
+        </p:nvSpPr>
+        <p:spPr>
+          <a:xfrm>
+            <a:off x="548640" y="320040"/>
+            <a:ext cx="11094415" cy="274320"/>
+          </a:xfrm>
+          <a:prstGeom prst="rect">
+            <a:avLst/>
+          </a:prstGeom>
+          <a:noFill/>
+        </p:spPr>
+        <p:txBody>
+          <a:bodyPr wrap="square" anchor="t" lIns="0" rIns="0" tIns="0" bIns="0"/>
+          <a:lstStyle/>
+          <a:p>
+            <a:pPr algn="l"/>
+            <a:r>
+              <a:rPr sz="1100" b="1" i="0">
+                <a:solidFill>
+                  <a:srgbClr val="54595D"/>
+                </a:solidFill>
+                <a:latin typeface="Calibri"/>
+              </a:rPr>
+              <a:t>NETWORK CABLING  ·  Network Cabling Content Area 2</a:t>
+            </a:r>
+          </a:p>
+        </p:txBody>
+      </p:sp>
+      <p:sp>
+        <p:nvSpPr>
+          <p:cNvPr id="3" name="TextBox 2"/>
+          <p:cNvSpPr txBox="1"/>
+          <p:nvPr/>
+        </p:nvSpPr>
+        <p:spPr>
+          <a:xfrm>
+            <a:off x="548640" y="566928"/>
+            <a:ext cx="11094415" cy="822960"/>
+          </a:xfrm>
+          <a:prstGeom prst="rect">
+            <a:avLst/>
+          </a:prstGeom>
+          <a:noFill/>
+        </p:spPr>
+        <p:txBody>
+          <a:bodyPr wrap="square" anchor="ctr" lIns="0" rIns="0" tIns="0" bIns="0"/>
+          <a:lstStyle/>
+          <a:p>
+            <a:pPr algn="l"/>
+            <a:r>
+              <a:rPr sz="3200" b="1" i="0">
+                <a:solidFill>
+                  <a:srgbClr val="03306E"/>
+                </a:solidFill>
+                <a:latin typeface="Cambria"/>
+              </a:rPr>
+              <a:t>Answers</a:t>
+            </a:r>
+          </a:p>
+        </p:txBody>
+      </p:sp>
+      <p:sp>
+        <p:nvSpPr>
+          <p:cNvPr id="4" name="TextBox 3"/>
+          <p:cNvSpPr txBox="1"/>
+          <p:nvPr/>
+        </p:nvSpPr>
+        <p:spPr>
+          <a:xfrm>
+            <a:off x="548640" y="6446520"/>
+            <a:ext cx="8229600" cy="274320"/>
+          </a:xfrm>
+          <a:prstGeom prst="rect">
+            <a:avLst/>
+          </a:prstGeom>
+          <a:noFill/>
+        </p:spPr>
+        <p:txBody>
+          <a:bodyPr wrap="square" anchor="t" lIns="0" rIns="0" tIns="0" bIns="0"/>
+          <a:lstStyle/>
+          <a:p>
+            <a:pPr algn="l"/>
+            <a:r>
+              <a:rPr sz="1000" b="0" i="0">
+                <a:solidFill>
+                  <a:srgbClr val="54595D"/>
+                </a:solidFill>
+                <a:latin typeface="Calibri"/>
+              </a:rPr>
+              <a:t>Digital Support and Security T Level  ·  Health, Safety and Compliance for Cabling</a:t>
+            </a:r>
+          </a:p>
+        </p:txBody>
+      </p:sp>
+      <p:sp>
+        <p:nvSpPr>
+          <p:cNvPr id="5" name="TextBox 4"/>
+          <p:cNvSpPr txBox="1"/>
+          <p:nvPr/>
+        </p:nvSpPr>
+        <p:spPr>
+          <a:xfrm>
+            <a:off x="10728655" y="6446520"/>
+            <a:ext cx="914400" cy="274320"/>
+          </a:xfrm>
+          <a:prstGeom prst="rect">
+            <a:avLst/>
+          </a:prstGeom>
+          <a:noFill/>
+        </p:spPr>
+        <p:txBody>
+          <a:bodyPr wrap="square" anchor="t" lIns="0" rIns="0" tIns="0" bIns="0"/>
+          <a:lstStyle/>
+          <a:p>
+            <a:pPr algn="r"/>
+            <a:r>
+              <a:rPr sz="1000" b="0" i="0">
+                <a:solidFill>
+                  <a:srgbClr val="54595D"/>
+                </a:solidFill>
+                <a:latin typeface="Calibri"/>
+              </a:rPr>
+              <a:t>15</a:t>
+            </a:r>
+          </a:p>
+        </p:txBody>
+      </p:sp>
+      <p:sp>
+        <p:nvSpPr>
+          <p:cNvPr id="6" name="Oval 5"/>
+          <p:cNvSpPr/>
+          <p:nvPr/>
+        </p:nvSpPr>
+        <p:spPr>
+          <a:xfrm>
+            <a:off x="548640" y="1618488"/>
+            <a:ext cx="411480" cy="411480"/>
+          </a:xfrm>
+          <a:prstGeom prst="ellipse">
+            <a:avLst/>
+          </a:prstGeom>
+          <a:solidFill>
+            <a:srgbClr val="F2B705"/>
+          </a:solidFill>
+          <a:ln>
+            <a:noFill/>
+          </a:ln>
+          <a:effectLst/>
+        </p:spPr>
+        <p:style>
+          <a:lnRef idx="1">
+            <a:schemeClr val="accent1"/>
+          </a:lnRef>
+          <a:fillRef idx="3">
+            <a:schemeClr val="accent1"/>
+          </a:fillRef>
+          <a:effectRef idx="2">
+            <a:schemeClr val="accent1"/>
+          </a:effectRef>
+          <a:fontRef idx="minor">
+            <a:schemeClr val="lt1"/>
+          </a:fontRef>
+        </p:style>
+        <p:txBody>
+          <a:bodyPr rtlCol="0" anchor="ctr" lIns="0" rIns="0" tIns="0" bIns="0"/>
+          <a:lstStyle/>
+          <a:p>
+            <a:pPr algn="ctr"/>
+            <a:r>
+              <a:rPr sz="1400" b="1">
+                <a:solidFill>
+                  <a:srgbClr val="202122"/>
+                </a:solidFill>
+                <a:latin typeface="Calibri"/>
+              </a:rPr>
+              <a:t>1</a:t>
+            </a:r>
+          </a:p>
+        </p:txBody>
+      </p:sp>
+      <p:sp>
+        <p:nvSpPr>
+          <p:cNvPr id="7" name="TextBox 6"/>
+          <p:cNvSpPr txBox="1"/>
+          <p:nvPr/>
+        </p:nvSpPr>
+        <p:spPr>
+          <a:xfrm>
+            <a:off x="1234440" y="1600200"/>
+            <a:ext cx="10408615" cy="1030986"/>
+          </a:xfrm>
+          <a:prstGeom prst="rect">
+            <a:avLst/>
+          </a:prstGeom>
+          <a:noFill/>
+        </p:spPr>
+        <p:txBody>
+          <a:bodyPr wrap="square" anchor="t" lIns="0" rIns="0" tIns="0" bIns="0"/>
+          <a:lstStyle/>
+          <a:p>
+            <a:pPr algn="l"/>
+            <a:r>
+              <a:rPr sz="1800" b="0" i="0">
+                <a:solidFill>
+                  <a:srgbClr val="54595D"/>
+                </a:solidFill>
+                <a:latin typeface="Calibri"/>
+              </a:rPr>
+              <a:t>Which standard covers segregation of data and power cables?</a:t>
+            </a:r>
+          </a:p>
+          <a:p>
+            <a:r>
+              <a:rPr sz="1800" b="1">
+                <a:solidFill>
+                  <a:srgbClr val="03306E"/>
+                </a:solidFill>
+                <a:latin typeface="Calibri"/>
+              </a:rPr>
+              <a:t>BS EN 50174.</a:t>
+            </a:r>
+          </a:p>
+        </p:txBody>
+      </p:sp>
+      <p:sp>
+        <p:nvSpPr>
+          <p:cNvPr id="8" name="Oval 7"/>
+          <p:cNvSpPr/>
+          <p:nvPr/>
+        </p:nvSpPr>
+        <p:spPr>
+          <a:xfrm>
+            <a:off x="548640" y="2814066"/>
+            <a:ext cx="411480" cy="411480"/>
+          </a:xfrm>
+          <a:prstGeom prst="ellipse">
+            <a:avLst/>
+          </a:prstGeom>
+          <a:solidFill>
+            <a:srgbClr val="F2B705"/>
+          </a:solidFill>
+          <a:ln>
+            <a:noFill/>
+          </a:ln>
+          <a:effectLst/>
+        </p:spPr>
+        <p:style>
+          <a:lnRef idx="1">
+            <a:schemeClr val="accent1"/>
+          </a:lnRef>
+          <a:fillRef idx="3">
+            <a:schemeClr val="accent1"/>
+          </a:fillRef>
+          <a:effectRef idx="2">
+            <a:schemeClr val="accent1"/>
+          </a:effectRef>
+          <a:fontRef idx="minor">
+            <a:schemeClr val="lt1"/>
+          </a:fontRef>
+        </p:style>
+        <p:txBody>
+          <a:bodyPr rtlCol="0" anchor="ctr" lIns="0" rIns="0" tIns="0" bIns="0"/>
+          <a:lstStyle/>
+          <a:p>
+            <a:pPr algn="ctr"/>
+            <a:r>
+              <a:rPr sz="1400" b="1">
+                <a:solidFill>
+                  <a:srgbClr val="202122"/>
+                </a:solidFill>
+                <a:latin typeface="Calibri"/>
+              </a:rPr>
+              <a:t>2</a:t>
+            </a:r>
+          </a:p>
+        </p:txBody>
+      </p:sp>
+      <p:sp>
+        <p:nvSpPr>
+          <p:cNvPr id="9" name="TextBox 8"/>
+          <p:cNvSpPr txBox="1"/>
+          <p:nvPr/>
+        </p:nvSpPr>
+        <p:spPr>
+          <a:xfrm>
+            <a:off x="1234440" y="2795778"/>
+            <a:ext cx="10408615" cy="1030986"/>
+          </a:xfrm>
+          <a:prstGeom prst="rect">
+            <a:avLst/>
+          </a:prstGeom>
+          <a:noFill/>
+        </p:spPr>
+        <p:txBody>
+          <a:bodyPr wrap="square" anchor="t" lIns="0" rIns="0" tIns="0" bIns="0"/>
+          <a:lstStyle/>
+          <a:p>
+            <a:pPr algn="l"/>
+            <a:r>
+              <a:rPr sz="1800" b="0" i="0">
+                <a:solidFill>
+                  <a:srgbClr val="54595D"/>
+                </a:solidFill>
+                <a:latin typeface="Calibri"/>
+              </a:rPr>
+              <a:t>What is the first thing to do if you suspect asbestos?</a:t>
+            </a:r>
+          </a:p>
+          <a:p>
+            <a:r>
+              <a:rPr sz="1800" b="1">
+                <a:solidFill>
+                  <a:srgbClr val="03306E"/>
+                </a:solidFill>
+                <a:latin typeface="Calibri"/>
+              </a:rPr>
+              <a:t>Stop work immediately.</a:t>
+            </a:r>
+          </a:p>
+        </p:txBody>
+      </p:sp>
+      <p:sp>
+        <p:nvSpPr>
+          <p:cNvPr id="10" name="Oval 9"/>
+          <p:cNvSpPr/>
+          <p:nvPr/>
+        </p:nvSpPr>
+        <p:spPr>
+          <a:xfrm>
+            <a:off x="548640" y="4009644"/>
+            <a:ext cx="411480" cy="411480"/>
+          </a:xfrm>
+          <a:prstGeom prst="ellipse">
+            <a:avLst/>
+          </a:prstGeom>
+          <a:solidFill>
+            <a:srgbClr val="F2B705"/>
+          </a:solidFill>
+          <a:ln>
+            <a:noFill/>
+          </a:ln>
+          <a:effectLst/>
+        </p:spPr>
+        <p:style>
+          <a:lnRef idx="1">
+            <a:schemeClr val="accent1"/>
+          </a:lnRef>
+          <a:fillRef idx="3">
+            <a:schemeClr val="accent1"/>
+          </a:fillRef>
+          <a:effectRef idx="2">
+            <a:schemeClr val="accent1"/>
+          </a:effectRef>
+          <a:fontRef idx="minor">
+            <a:schemeClr val="lt1"/>
+          </a:fontRef>
+        </p:style>
+        <p:txBody>
+          <a:bodyPr rtlCol="0" anchor="ctr" lIns="0" rIns="0" tIns="0" bIns="0"/>
+          <a:lstStyle/>
+          <a:p>
+            <a:pPr algn="ctr"/>
+            <a:r>
+              <a:rPr sz="1400" b="1">
+                <a:solidFill>
+                  <a:srgbClr val="202122"/>
+                </a:solidFill>
+                <a:latin typeface="Calibri"/>
+              </a:rPr>
+              <a:t>3</a:t>
+            </a:r>
+          </a:p>
+        </p:txBody>
+      </p:sp>
+      <p:sp>
+        <p:nvSpPr>
+          <p:cNvPr id="11" name="TextBox 10"/>
+          <p:cNvSpPr txBox="1"/>
+          <p:nvPr/>
+        </p:nvSpPr>
+        <p:spPr>
+          <a:xfrm>
+            <a:off x="1234440" y="3991356"/>
+            <a:ext cx="10408615" cy="1030986"/>
+          </a:xfrm>
+          <a:prstGeom prst="rect">
+            <a:avLst/>
+          </a:prstGeom>
+          <a:noFill/>
+        </p:spPr>
+        <p:txBody>
+          <a:bodyPr wrap="square" anchor="t" lIns="0" rIns="0" tIns="0" bIns="0"/>
+          <a:lstStyle/>
+          <a:p>
+            <a:pPr algn="l"/>
+            <a:r>
+              <a:rPr sz="1800" b="0" i="0">
+                <a:solidFill>
+                  <a:srgbClr val="54595D"/>
+                </a:solidFill>
+                <a:latin typeface="Calibri"/>
+              </a:rPr>
+              <a:t>Which regulations cover work in ceiling voids and ducts?</a:t>
+            </a:r>
+          </a:p>
+          <a:p>
+            <a:r>
+              <a:rPr sz="1800" b="1">
+                <a:solidFill>
+                  <a:srgbClr val="03306E"/>
+                </a:solidFill>
+                <a:latin typeface="Calibri"/>
+              </a:rPr>
+              <a:t>Confined Spaces Regulations 1997.</a:t>
+            </a:r>
+          </a:p>
+        </p:txBody>
+      </p:sp>
+      <p:sp>
+        <p:nvSpPr>
+          <p:cNvPr id="12" name="Oval 11"/>
+          <p:cNvSpPr/>
+          <p:nvPr/>
+        </p:nvSpPr>
+        <p:spPr>
+          <a:xfrm>
+            <a:off x="548640" y="5205221"/>
+            <a:ext cx="411480" cy="411480"/>
+          </a:xfrm>
+          <a:prstGeom prst="ellipse">
+            <a:avLst/>
+          </a:prstGeom>
+          <a:solidFill>
+            <a:srgbClr val="F2B705"/>
+          </a:solidFill>
+          <a:ln>
+            <a:noFill/>
+          </a:ln>
+          <a:effectLst/>
+        </p:spPr>
+        <p:style>
+          <a:lnRef idx="1">
+            <a:schemeClr val="accent1"/>
+          </a:lnRef>
+          <a:fillRef idx="3">
+            <a:schemeClr val="accent1"/>
+          </a:fillRef>
+          <a:effectRef idx="2">
+            <a:schemeClr val="accent1"/>
+          </a:effectRef>
+          <a:fontRef idx="minor">
+            <a:schemeClr val="lt1"/>
+          </a:fontRef>
+        </p:style>
+        <p:txBody>
+          <a:bodyPr rtlCol="0" anchor="ctr" lIns="0" rIns="0" tIns="0" bIns="0"/>
+          <a:lstStyle/>
+          <a:p>
+            <a:pPr algn="ctr"/>
+            <a:r>
+              <a:rPr sz="1400" b="1">
+                <a:solidFill>
+                  <a:srgbClr val="202122"/>
+                </a:solidFill>
+                <a:latin typeface="Calibri"/>
+              </a:rPr>
+              <a:t>4</a:t>
+            </a:r>
+          </a:p>
+        </p:txBody>
+      </p:sp>
+      <p:sp>
+        <p:nvSpPr>
+          <p:cNvPr id="13" name="TextBox 12"/>
+          <p:cNvSpPr txBox="1"/>
+          <p:nvPr/>
+        </p:nvSpPr>
+        <p:spPr>
+          <a:xfrm>
+            <a:off x="1234440" y="5186933"/>
+            <a:ext cx="10408615" cy="1030986"/>
+          </a:xfrm>
+          <a:prstGeom prst="rect">
+            <a:avLst/>
+          </a:prstGeom>
+          <a:noFill/>
+        </p:spPr>
+        <p:txBody>
+          <a:bodyPr wrap="square" anchor="t" lIns="0" rIns="0" tIns="0" bIns="0"/>
+          <a:lstStyle/>
+          <a:p>
+            <a:pPr algn="l"/>
+            <a:r>
+              <a:rPr sz="1800" b="0" i="0">
+                <a:solidFill>
+                  <a:srgbClr val="54595D"/>
+                </a:solidFill>
+                <a:latin typeface="Calibri"/>
+              </a:rPr>
+              <a:t>Which standard covers optical fibre safety?</a:t>
+            </a:r>
+          </a:p>
+          <a:p>
+            <a:r>
+              <a:rPr sz="1800" b="1">
+                <a:solidFill>
+                  <a:srgbClr val="03306E"/>
+                </a:solidFill>
+                <a:latin typeface="Calibri"/>
+              </a:rPr>
+              <a:t>BS EN 60825.</a:t>
+            </a:r>
+          </a:p>
+        </p:txBody>
+      </p:sp>
+    </p:spTree>
+  </p:cSld>
+  <p:clrMapOvr>
+    <a:masterClrMapping/>
+  </p:clrMapOvr>
+</p:sld>
+</file>
+
+<file path=ppt/slides/slide16.xml><?xml version="1.0" encoding="utf-8"?>
+<p:sld xmlns:a="http://schemas.openxmlformats.org/drawingml/2006/main" xmlns:p="http://schemas.openxmlformats.org/presentationml/2006/main" xmlns:r="http://schemas.openxmlformats.org/officeDocument/2006/relationships">
+  <p:cSld>
+    <p:bg>
+      <p:bgPr>
+        <a:solidFill>
+          <a:srgbClr val="FFFFFF"/>
+        </a:solidFill>
+        <a:effectLst/>
+      </p:bgPr>
+    </p:bg>
+    <p:spTree>
+      <p:nvGrpSpPr>
+        <p:cNvPr id="1" name=""/>
+        <p:cNvGrpSpPr/>
+        <p:nvPr/>
+      </p:nvGrpSpPr>
+      <p:grpSpPr/>
+      <p:sp>
+        <p:nvSpPr>
+          <p:cNvPr id="2" name="TextBox 1"/>
+          <p:cNvSpPr txBox="1"/>
+          <p:nvPr/>
+        </p:nvSpPr>
+        <p:spPr>
+          <a:xfrm>
+            <a:off x="548640" y="320040"/>
+            <a:ext cx="11094415" cy="274320"/>
+          </a:xfrm>
+          <a:prstGeom prst="rect">
+            <a:avLst/>
+          </a:prstGeom>
+          <a:noFill/>
+        </p:spPr>
+        <p:txBody>
+          <a:bodyPr wrap="square" anchor="t" lIns="0" rIns="0" tIns="0" bIns="0"/>
+          <a:lstStyle/>
+          <a:p>
+            <a:pPr algn="l"/>
+            <a:r>
+              <a:rPr sz="1100" b="1" i="0">
+                <a:solidFill>
+                  <a:srgbClr val="54595D"/>
+                </a:solidFill>
+                <a:latin typeface="Calibri"/>
+              </a:rPr>
+              <a:t>NETWORK CABLING  ·  Network Cabling Content Area 2</a:t>
+            </a:r>
+          </a:p>
+        </p:txBody>
+      </p:sp>
+      <p:sp>
+        <p:nvSpPr>
+          <p:cNvPr id="3" name="TextBox 2"/>
+          <p:cNvSpPr txBox="1"/>
+          <p:nvPr/>
+        </p:nvSpPr>
+        <p:spPr>
+          <a:xfrm>
+            <a:off x="548640" y="566928"/>
+            <a:ext cx="11094415" cy="822960"/>
+          </a:xfrm>
+          <a:prstGeom prst="rect">
+            <a:avLst/>
+          </a:prstGeom>
+          <a:noFill/>
+        </p:spPr>
+        <p:txBody>
+          <a:bodyPr wrap="square" anchor="ctr" lIns="0" rIns="0" tIns="0" bIns="0"/>
+          <a:lstStyle/>
+          <a:p>
+            <a:pPr algn="l"/>
+            <a:r>
+              <a:rPr sz="3200" b="1" i="0">
+                <a:solidFill>
+                  <a:srgbClr val="03306E"/>
+                </a:solidFill>
+                <a:latin typeface="Cambria"/>
+              </a:rPr>
+              <a:t>Activity: Method statement</a:t>
+            </a:r>
+          </a:p>
+        </p:txBody>
+      </p:sp>
+      <p:sp>
+        <p:nvSpPr>
+          <p:cNvPr id="4" name="TextBox 3"/>
+          <p:cNvSpPr txBox="1"/>
+          <p:nvPr/>
+        </p:nvSpPr>
+        <p:spPr>
+          <a:xfrm>
+            <a:off x="548640" y="6446520"/>
+            <a:ext cx="8229600" cy="274320"/>
+          </a:xfrm>
+          <a:prstGeom prst="rect">
+            <a:avLst/>
+          </a:prstGeom>
+          <a:noFill/>
+        </p:spPr>
+        <p:txBody>
+          <a:bodyPr wrap="square" anchor="t" lIns="0" rIns="0" tIns="0" bIns="0"/>
+          <a:lstStyle/>
+          <a:p>
+            <a:pPr algn="l"/>
+            <a:r>
+              <a:rPr sz="1000" b="0" i="0">
+                <a:solidFill>
+                  <a:srgbClr val="54595D"/>
+                </a:solidFill>
+                <a:latin typeface="Calibri"/>
+              </a:rPr>
+              <a:t>Digital Support and Security T Level  ·  Health, Safety and Compliance for Cabling</a:t>
+            </a:r>
+          </a:p>
+        </p:txBody>
+      </p:sp>
+      <p:sp>
+        <p:nvSpPr>
+          <p:cNvPr id="5" name="TextBox 4"/>
+          <p:cNvSpPr txBox="1"/>
+          <p:nvPr/>
+        </p:nvSpPr>
+        <p:spPr>
+          <a:xfrm>
+            <a:off x="10728655" y="6446520"/>
+            <a:ext cx="914400" cy="274320"/>
+          </a:xfrm>
+          <a:prstGeom prst="rect">
+            <a:avLst/>
+          </a:prstGeom>
+          <a:noFill/>
+        </p:spPr>
+        <p:txBody>
+          <a:bodyPr wrap="square" anchor="t" lIns="0" rIns="0" tIns="0" bIns="0"/>
+          <a:lstStyle/>
+          <a:p>
+            <a:pPr algn="r"/>
+            <a:r>
+              <a:rPr sz="1000" b="0" i="0">
+                <a:solidFill>
+                  <a:srgbClr val="54595D"/>
+                </a:solidFill>
+                <a:latin typeface="Calibri"/>
+              </a:rPr>
+              <a:t>16</a:t>
             </a:r>
           </a:p>
         </p:txBody>
@@ -4752,7 +7965,7 @@
 </p:sld>
 </file>
 
-<file path=ppt/slides/slide11.xml><?xml version="1.0" encoding="utf-8"?>
+<file path=ppt/slides/slide17.xml><?xml version="1.0" encoding="utf-8"?>
 <p:sld xmlns:a="http://schemas.openxmlformats.org/drawingml/2006/main" xmlns:p="http://schemas.openxmlformats.org/presentationml/2006/main" xmlns:r="http://schemas.openxmlformats.org/officeDocument/2006/relationships">
   <p:cSld>
     <p:bg>
@@ -6081,8 +9294,8 @@
         </p:nvSpPr>
         <p:spPr>
           <a:xfrm>
-            <a:off x="548640" y="1600200"/>
-            <a:ext cx="6675120" cy="4572000"/>
+            <a:off x="548640" y="1554480"/>
+            <a:ext cx="6720840" cy="4617720"/>
           </a:xfrm>
           <a:prstGeom prst="rect">
             <a:avLst/>
@@ -6095,117 +9308,51 @@
           </a:bodyPr>
           <a:lstStyle/>
           <a:p>
-            <a:pPr marL="274320" indent="-274320">
+            <a:pPr>
               <a:spcAft>
-                <a:spcPts val="1080"/>
+                <a:spcPts val="1320"/>
               </a:spcAft>
-              <a:buClr>
-                <a:srgbClr val="0645AD"/>
-              </a:buClr>
-              <a:buFont typeface="Arial"/>
-              <a:buChar char="•"/>
             </a:pPr>
             <a:r>
-              <a:rPr sz="2400" b="1">
+              <a:rPr sz="2200" b="0">
                 <a:solidFill>
                   <a:srgbClr val="202122"/>
                 </a:solidFill>
                 <a:latin typeface="Calibri"/>
               </a:rPr>
-              <a:t>Supporting media:</a:t>
-            </a:r>
-            <a:r>
-              <a:rPr sz="2400" b="0">
+              <a:t>Cabling jobs often happen around other services: telecoms, CCTV and security systems, alarms, AV, wireless access points and IoT devices.</a:t>
+            </a:r>
+          </a:p>
+          <a:p>
+            <a:pPr>
+              <a:spcAft>
+                <a:spcPts val="1320"/>
+              </a:spcAft>
+            </a:pPr>
+            <a:r>
+              <a:rPr sz="2200" b="0">
                 <a:solidFill>
                   <a:srgbClr val="202122"/>
                 </a:solidFill>
                 <a:latin typeface="Calibri"/>
               </a:rPr>
-              <a:t> telecoms, CCTV, alarms, AV, wireless access points, IoT devices.</a:t>
-            </a:r>
-          </a:p>
-          <a:p>
-            <a:pPr marL="274320" indent="-274320">
+              <a:t>Protect them by checking local records before starting, labelling service cables, avoiding shared containment routes where possible and following change management so nothing is disconnected by surprise.</a:t>
+            </a:r>
+          </a:p>
+          <a:p>
+            <a:pPr>
               <a:spcAft>
-                <a:spcPts val="1080"/>
+                <a:spcPts val="1320"/>
               </a:spcAft>
-              <a:buClr>
-                <a:srgbClr val="0645AD"/>
-              </a:buClr>
-              <a:buFont typeface="Arial"/>
-              <a:buChar char="•"/>
             </a:pPr>
             <a:r>
-              <a:rPr sz="2400" b="0">
+              <a:rPr sz="2200" b="0">
                 <a:solidFill>
                   <a:srgbClr val="202122"/>
                 </a:solidFill>
                 <a:latin typeface="Calibri"/>
               </a:rPr>
-              <a:t>Avoid sharing containment routes with other services.</a:t>
-            </a:r>
-          </a:p>
-          <a:p>
-            <a:pPr marL="274320" indent="-274320">
-              <a:spcAft>
-                <a:spcPts val="1080"/>
-              </a:spcAft>
-              <a:buClr>
-                <a:srgbClr val="0645AD"/>
-              </a:buClr>
-              <a:buFont typeface="Arial"/>
-              <a:buChar char="•"/>
-            </a:pPr>
-            <a:r>
-              <a:rPr sz="2400" b="0">
-                <a:solidFill>
-                  <a:srgbClr val="202122"/>
-                </a:solidFill>
-                <a:latin typeface="Calibri"/>
-              </a:rPr>
-              <a:t>Label service cables.</a:t>
-            </a:r>
-          </a:p>
-          <a:p>
-            <a:pPr marL="274320" indent="-274320">
-              <a:spcAft>
-                <a:spcPts val="1080"/>
-              </a:spcAft>
-              <a:buClr>
-                <a:srgbClr val="0645AD"/>
-              </a:buClr>
-              <a:buFont typeface="Arial"/>
-              <a:buChar char="•"/>
-            </a:pPr>
-            <a:r>
-              <a:rPr sz="2400" b="0">
-                <a:solidFill>
-                  <a:srgbClr val="202122"/>
-                </a:solidFill>
-                <a:latin typeface="Calibri"/>
-              </a:rPr>
-              <a:t>Check local records before starting.</a:t>
-            </a:r>
-          </a:p>
-          <a:p>
-            <a:pPr marL="274320" indent="-274320">
-              <a:spcAft>
-                <a:spcPts val="1080"/>
-              </a:spcAft>
-              <a:buClr>
-                <a:srgbClr val="0645AD"/>
-              </a:buClr>
-              <a:buFont typeface="Arial"/>
-              <a:buChar char="•"/>
-            </a:pPr>
-            <a:r>
-              <a:rPr sz="2400" b="0">
-                <a:solidFill>
-                  <a:srgbClr val="202122"/>
-                </a:solidFill>
-                <a:latin typeface="Calibri"/>
-              </a:rPr>
-              <a:t>Apply change management.</a:t>
+              <a:t>Data cables must be segregated from electrical cables, following BS EN 50174, to prevent interference and for safety.</a:t>
             </a:r>
           </a:p>
         </p:txBody>
@@ -6218,8 +9365,8 @@
         </p:nvSpPr>
         <p:spPr>
           <a:xfrm>
-            <a:off x="7772400" y="1600200"/>
-            <a:ext cx="3867912" cy="4434840"/>
+            <a:off x="7772400" y="1554480"/>
+            <a:ext cx="3867912" cy="4526280"/>
           </a:xfrm>
           <a:prstGeom prst="roundRect">
             <a:avLst>
@@ -6262,7 +9409,7 @@
         </p:nvSpPr>
         <p:spPr>
           <a:xfrm>
-            <a:off x="8046720" y="1874519"/>
+            <a:off x="8046720" y="1828800"/>
             <a:ext cx="548640" cy="548640"/>
           </a:xfrm>
           <a:prstGeom prst="ellipse">
@@ -6296,13 +9443,13 @@
           <a:p>
             <a:pPr algn="ctr"/>
             <a:r>
-              <a:rPr sz="2000" b="1">
+              <a:rPr sz="1300" b="1">
                 <a:solidFill>
                   <a:srgbClr val="202122"/>
                 </a:solidFill>
                 <a:latin typeface="Calibri"/>
               </a:rPr>
-              <a:t>!</a:t>
+              <a:t>e.g.</a:t>
             </a:r>
           </a:p>
         </p:txBody>
@@ -6315,7 +9462,7 @@
         </p:nvSpPr>
         <p:spPr>
           <a:xfrm>
-            <a:off x="8046720" y="2606040"/>
+            <a:off x="8046720" y="2560320"/>
             <a:ext cx="3291840" cy="365760"/>
           </a:xfrm>
           <a:prstGeom prst="rect">
@@ -6335,7 +9482,7 @@
                 </a:solidFill>
                 <a:latin typeface="Calibri"/>
               </a:rPr>
-              <a:t>KEY IDEA</a:t>
+              <a:t>EXAMPLE</a:t>
             </a:r>
           </a:p>
         </p:txBody>
@@ -6348,8 +9495,8 @@
         </p:nvSpPr>
         <p:spPr>
           <a:xfrm>
-            <a:off x="8046720" y="3017520"/>
-            <a:ext cx="3291840" cy="2926080"/>
+            <a:off x="8046720" y="2971800"/>
+            <a:ext cx="3291840" cy="2971800"/>
           </a:xfrm>
           <a:prstGeom prst="rect">
             <a:avLst/>
@@ -6362,13 +9509,13 @@
           <a:p>
             <a:pPr algn="l"/>
             <a:r>
-              <a:rPr sz="2200" b="0" i="0">
+              <a:rPr sz="1900" b="0" i="0">
                 <a:solidFill>
                   <a:srgbClr val="FFFFFF"/>
                 </a:solidFill>
                 <a:latin typeface="Cambria"/>
               </a:rPr>
-              <a:t>Segregate data cables from electrical cables in line with BS EN 50174.</a:t>
+              <a:t>An installer cuts what looks like a spare cable in a ceiling void: it's the fire alarm. Checking records and labels first would have prevented it.</a:t>
             </a:r>
           </a:p>
         </p:txBody>
@@ -6460,7 +9607,7 @@
                 </a:solidFill>
                 <a:latin typeface="Cambria"/>
               </a:rPr>
-              <a:t>Key cabling standards</a:t>
+              <a:t>Protecting supporting media</a:t>
             </a:r>
           </a:p>
         </p:txBody>
@@ -6527,6 +9674,913 @@
                 <a:latin typeface="Calibri"/>
               </a:rPr>
               <a:t>4</a:t>
+            </a:r>
+          </a:p>
+        </p:txBody>
+      </p:sp>
+      <p:sp>
+        <p:nvSpPr>
+          <p:cNvPr id="6" name="TextBox 5"/>
+          <p:cNvSpPr txBox="1"/>
+          <p:nvPr/>
+        </p:nvSpPr>
+        <p:spPr>
+          <a:xfrm>
+            <a:off x="548640" y="1600200"/>
+            <a:ext cx="6675120" cy="4572000"/>
+          </a:xfrm>
+          <a:prstGeom prst="rect">
+            <a:avLst/>
+          </a:prstGeom>
+          <a:noFill/>
+        </p:spPr>
+        <p:txBody>
+          <a:bodyPr wrap="square" lIns="0" rIns="0" tIns="0" bIns="0">
+            <a:spAutoFit/>
+          </a:bodyPr>
+          <a:lstStyle/>
+          <a:p>
+            <a:pPr marL="274320" indent="-274320">
+              <a:spcAft>
+                <a:spcPts val="1080"/>
+              </a:spcAft>
+              <a:buClr>
+                <a:srgbClr val="0645AD"/>
+              </a:buClr>
+              <a:buFont typeface="Arial"/>
+              <a:buChar char="•"/>
+            </a:pPr>
+            <a:r>
+              <a:rPr sz="2400" b="1">
+                <a:solidFill>
+                  <a:srgbClr val="202122"/>
+                </a:solidFill>
+                <a:latin typeface="Calibri"/>
+              </a:rPr>
+              <a:t>Supporting media:</a:t>
+            </a:r>
+            <a:r>
+              <a:rPr sz="2400" b="0">
+                <a:solidFill>
+                  <a:srgbClr val="202122"/>
+                </a:solidFill>
+                <a:latin typeface="Calibri"/>
+              </a:rPr>
+              <a:t> telecoms, CCTV, alarms, AV, wireless access points, IoT devices.</a:t>
+            </a:r>
+          </a:p>
+          <a:p>
+            <a:pPr marL="274320" indent="-274320">
+              <a:spcAft>
+                <a:spcPts val="1080"/>
+              </a:spcAft>
+              <a:buClr>
+                <a:srgbClr val="0645AD"/>
+              </a:buClr>
+              <a:buFont typeface="Arial"/>
+              <a:buChar char="•"/>
+            </a:pPr>
+            <a:r>
+              <a:rPr sz="2400" b="0">
+                <a:solidFill>
+                  <a:srgbClr val="202122"/>
+                </a:solidFill>
+                <a:latin typeface="Calibri"/>
+              </a:rPr>
+              <a:t>Avoid sharing containment routes with other services.</a:t>
+            </a:r>
+          </a:p>
+          <a:p>
+            <a:pPr marL="274320" indent="-274320">
+              <a:spcAft>
+                <a:spcPts val="1080"/>
+              </a:spcAft>
+              <a:buClr>
+                <a:srgbClr val="0645AD"/>
+              </a:buClr>
+              <a:buFont typeface="Arial"/>
+              <a:buChar char="•"/>
+            </a:pPr>
+            <a:r>
+              <a:rPr sz="2400" b="0">
+                <a:solidFill>
+                  <a:srgbClr val="202122"/>
+                </a:solidFill>
+                <a:latin typeface="Calibri"/>
+              </a:rPr>
+              <a:t>Label service cables.</a:t>
+            </a:r>
+          </a:p>
+          <a:p>
+            <a:pPr marL="274320" indent="-274320">
+              <a:spcAft>
+                <a:spcPts val="1080"/>
+              </a:spcAft>
+              <a:buClr>
+                <a:srgbClr val="0645AD"/>
+              </a:buClr>
+              <a:buFont typeface="Arial"/>
+              <a:buChar char="•"/>
+            </a:pPr>
+            <a:r>
+              <a:rPr sz="2400" b="0">
+                <a:solidFill>
+                  <a:srgbClr val="202122"/>
+                </a:solidFill>
+                <a:latin typeface="Calibri"/>
+              </a:rPr>
+              <a:t>Check local records before starting.</a:t>
+            </a:r>
+          </a:p>
+          <a:p>
+            <a:pPr marL="274320" indent="-274320">
+              <a:spcAft>
+                <a:spcPts val="1080"/>
+              </a:spcAft>
+              <a:buClr>
+                <a:srgbClr val="0645AD"/>
+              </a:buClr>
+              <a:buFont typeface="Arial"/>
+              <a:buChar char="•"/>
+            </a:pPr>
+            <a:r>
+              <a:rPr sz="2400" b="0">
+                <a:solidFill>
+                  <a:srgbClr val="202122"/>
+                </a:solidFill>
+                <a:latin typeface="Calibri"/>
+              </a:rPr>
+              <a:t>Apply change management.</a:t>
+            </a:r>
+          </a:p>
+        </p:txBody>
+      </p:sp>
+      <p:sp>
+        <p:nvSpPr>
+          <p:cNvPr id="7" name="Rounded Rectangle 6"/>
+          <p:cNvSpPr/>
+          <p:nvPr/>
+        </p:nvSpPr>
+        <p:spPr>
+          <a:xfrm>
+            <a:off x="7772400" y="1600200"/>
+            <a:ext cx="3867912" cy="4434840"/>
+          </a:xfrm>
+          <a:prstGeom prst="roundRect">
+            <a:avLst>
+              <a:gd name="adj" fmla="val 8000"/>
+            </a:avLst>
+          </a:prstGeom>
+          <a:solidFill>
+            <a:srgbClr val="03306E"/>
+          </a:solidFill>
+          <a:ln>
+            <a:noFill/>
+          </a:ln>
+          <a:effectLst/>
+        </p:spPr>
+        <p:style>
+          <a:lnRef idx="1">
+            <a:schemeClr val="accent1"/>
+          </a:lnRef>
+          <a:fillRef idx="3">
+            <a:schemeClr val="accent1"/>
+          </a:fillRef>
+          <a:effectRef idx="2">
+            <a:schemeClr val="accent1"/>
+          </a:effectRef>
+          <a:fontRef idx="minor">
+            <a:schemeClr val="lt1"/>
+          </a:fontRef>
+        </p:style>
+        <p:txBody>
+          <a:bodyPr rtlCol="0" anchor="ctr"/>
+          <a:lstStyle/>
+          <a:p/>
+        </p:txBody>
+      </p:sp>
+      <p:sp>
+        <p:nvSpPr>
+          <p:cNvPr id="8" name="Oval 7"/>
+          <p:cNvSpPr/>
+          <p:nvPr/>
+        </p:nvSpPr>
+        <p:spPr>
+          <a:xfrm>
+            <a:off x="8046720" y="1874519"/>
+            <a:ext cx="548640" cy="548640"/>
+          </a:xfrm>
+          <a:prstGeom prst="ellipse">
+            <a:avLst/>
+          </a:prstGeom>
+          <a:solidFill>
+            <a:srgbClr val="F2B705"/>
+          </a:solidFill>
+          <a:ln>
+            <a:noFill/>
+          </a:ln>
+          <a:effectLst/>
+        </p:spPr>
+        <p:style>
+          <a:lnRef idx="1">
+            <a:schemeClr val="accent1"/>
+          </a:lnRef>
+          <a:fillRef idx="3">
+            <a:schemeClr val="accent1"/>
+          </a:fillRef>
+          <a:effectRef idx="2">
+            <a:schemeClr val="accent1"/>
+          </a:effectRef>
+          <a:fontRef idx="minor">
+            <a:schemeClr val="lt1"/>
+          </a:fontRef>
+        </p:style>
+        <p:txBody>
+          <a:bodyPr rtlCol="0" anchor="ctr" lIns="0" rIns="0" tIns="0" bIns="0"/>
+          <a:lstStyle/>
+          <a:p>
+            <a:pPr algn="ctr"/>
+            <a:r>
+              <a:rPr sz="2000" b="1">
+                <a:solidFill>
+                  <a:srgbClr val="202122"/>
+                </a:solidFill>
+                <a:latin typeface="Calibri"/>
+              </a:rPr>
+              <a:t>!</a:t>
+            </a:r>
+          </a:p>
+        </p:txBody>
+      </p:sp>
+      <p:sp>
+        <p:nvSpPr>
+          <p:cNvPr id="9" name="TextBox 8"/>
+          <p:cNvSpPr txBox="1"/>
+          <p:nvPr/>
+        </p:nvSpPr>
+        <p:spPr>
+          <a:xfrm>
+            <a:off x="8046720" y="2606040"/>
+            <a:ext cx="3291840" cy="365760"/>
+          </a:xfrm>
+          <a:prstGeom prst="rect">
+            <a:avLst/>
+          </a:prstGeom>
+          <a:noFill/>
+        </p:spPr>
+        <p:txBody>
+          <a:bodyPr wrap="square" anchor="t" lIns="0" rIns="0" tIns="0" bIns="0"/>
+          <a:lstStyle/>
+          <a:p>
+            <a:pPr algn="l"/>
+            <a:r>
+              <a:rPr sz="1300" b="1" i="0">
+                <a:solidFill>
+                  <a:srgbClr val="A9C8F0"/>
+                </a:solidFill>
+                <a:latin typeface="Calibri"/>
+              </a:rPr>
+              <a:t>KEY IDEA</a:t>
+            </a:r>
+          </a:p>
+        </p:txBody>
+      </p:sp>
+      <p:sp>
+        <p:nvSpPr>
+          <p:cNvPr id="10" name="TextBox 9"/>
+          <p:cNvSpPr txBox="1"/>
+          <p:nvPr/>
+        </p:nvSpPr>
+        <p:spPr>
+          <a:xfrm>
+            <a:off x="8046720" y="3017520"/>
+            <a:ext cx="3291840" cy="2926080"/>
+          </a:xfrm>
+          <a:prstGeom prst="rect">
+            <a:avLst/>
+          </a:prstGeom>
+          <a:noFill/>
+        </p:spPr>
+        <p:txBody>
+          <a:bodyPr wrap="square" anchor="t" lIns="0" rIns="0" tIns="0" bIns="0"/>
+          <a:lstStyle/>
+          <a:p>
+            <a:pPr algn="l"/>
+            <a:r>
+              <a:rPr sz="2200" b="0" i="0">
+                <a:solidFill>
+                  <a:srgbClr val="FFFFFF"/>
+                </a:solidFill>
+                <a:latin typeface="Cambria"/>
+              </a:rPr>
+              <a:t>Segregate data cables from electrical cables in line with BS EN 50174.</a:t>
+            </a:r>
+          </a:p>
+        </p:txBody>
+      </p:sp>
+    </p:spTree>
+  </p:cSld>
+  <p:clrMapOvr>
+    <a:masterClrMapping/>
+  </p:clrMapOvr>
+</p:sld>
+</file>
+
+<file path=ppt/slides/slide5.xml><?xml version="1.0" encoding="utf-8"?>
+<p:sld xmlns:a="http://schemas.openxmlformats.org/drawingml/2006/main" xmlns:p="http://schemas.openxmlformats.org/presentationml/2006/main" xmlns:r="http://schemas.openxmlformats.org/officeDocument/2006/relationships">
+  <p:cSld>
+    <p:bg>
+      <p:bgPr>
+        <a:solidFill>
+          <a:srgbClr val="FFFFFF"/>
+        </a:solidFill>
+        <a:effectLst/>
+      </p:bgPr>
+    </p:bg>
+    <p:spTree>
+      <p:nvGrpSpPr>
+        <p:cNvPr id="1" name=""/>
+        <p:cNvGrpSpPr/>
+        <p:nvPr/>
+      </p:nvGrpSpPr>
+      <p:grpSpPr/>
+      <p:sp>
+        <p:nvSpPr>
+          <p:cNvPr id="2" name="TextBox 1"/>
+          <p:cNvSpPr txBox="1"/>
+          <p:nvPr/>
+        </p:nvSpPr>
+        <p:spPr>
+          <a:xfrm>
+            <a:off x="548640" y="320040"/>
+            <a:ext cx="11094415" cy="274320"/>
+          </a:xfrm>
+          <a:prstGeom prst="rect">
+            <a:avLst/>
+          </a:prstGeom>
+          <a:noFill/>
+        </p:spPr>
+        <p:txBody>
+          <a:bodyPr wrap="square" anchor="t" lIns="0" rIns="0" tIns="0" bIns="0"/>
+          <a:lstStyle/>
+          <a:p>
+            <a:pPr algn="l"/>
+            <a:r>
+              <a:rPr sz="1100" b="1" i="0">
+                <a:solidFill>
+                  <a:srgbClr val="54595D"/>
+                </a:solidFill>
+                <a:latin typeface="Calibri"/>
+              </a:rPr>
+              <a:t>NETWORK CABLING  ·  Network Cabling Content Area 2</a:t>
+            </a:r>
+          </a:p>
+        </p:txBody>
+      </p:sp>
+      <p:sp>
+        <p:nvSpPr>
+          <p:cNvPr id="3" name="TextBox 2"/>
+          <p:cNvSpPr txBox="1"/>
+          <p:nvPr/>
+        </p:nvSpPr>
+        <p:spPr>
+          <a:xfrm>
+            <a:off x="548640" y="566928"/>
+            <a:ext cx="11094415" cy="822960"/>
+          </a:xfrm>
+          <a:prstGeom prst="rect">
+            <a:avLst/>
+          </a:prstGeom>
+          <a:noFill/>
+        </p:spPr>
+        <p:txBody>
+          <a:bodyPr wrap="square" anchor="ctr" lIns="0" rIns="0" tIns="0" bIns="0"/>
+          <a:lstStyle/>
+          <a:p>
+            <a:pPr algn="l"/>
+            <a:r>
+              <a:rPr sz="3200" b="1" i="0">
+                <a:solidFill>
+                  <a:srgbClr val="03306E"/>
+                </a:solidFill>
+                <a:latin typeface="Cambria"/>
+              </a:rPr>
+              <a:t>Quick check: Protecting supporting media</a:t>
+            </a:r>
+          </a:p>
+        </p:txBody>
+      </p:sp>
+      <p:sp>
+        <p:nvSpPr>
+          <p:cNvPr id="4" name="TextBox 3"/>
+          <p:cNvSpPr txBox="1"/>
+          <p:nvPr/>
+        </p:nvSpPr>
+        <p:spPr>
+          <a:xfrm>
+            <a:off x="548640" y="6446520"/>
+            <a:ext cx="8229600" cy="274320"/>
+          </a:xfrm>
+          <a:prstGeom prst="rect">
+            <a:avLst/>
+          </a:prstGeom>
+          <a:noFill/>
+        </p:spPr>
+        <p:txBody>
+          <a:bodyPr wrap="square" anchor="t" lIns="0" rIns="0" tIns="0" bIns="0"/>
+          <a:lstStyle/>
+          <a:p>
+            <a:pPr algn="l"/>
+            <a:r>
+              <a:rPr sz="1000" b="0" i="0">
+                <a:solidFill>
+                  <a:srgbClr val="54595D"/>
+                </a:solidFill>
+                <a:latin typeface="Calibri"/>
+              </a:rPr>
+              <a:t>Digital Support and Security T Level  ·  Health, Safety and Compliance for Cabling</a:t>
+            </a:r>
+          </a:p>
+        </p:txBody>
+      </p:sp>
+      <p:sp>
+        <p:nvSpPr>
+          <p:cNvPr id="5" name="TextBox 4"/>
+          <p:cNvSpPr txBox="1"/>
+          <p:nvPr/>
+        </p:nvSpPr>
+        <p:spPr>
+          <a:xfrm>
+            <a:off x="10728655" y="6446520"/>
+            <a:ext cx="914400" cy="274320"/>
+          </a:xfrm>
+          <a:prstGeom prst="rect">
+            <a:avLst/>
+          </a:prstGeom>
+          <a:noFill/>
+        </p:spPr>
+        <p:txBody>
+          <a:bodyPr wrap="square" anchor="t" lIns="0" rIns="0" tIns="0" bIns="0"/>
+          <a:lstStyle/>
+          <a:p>
+            <a:pPr algn="r"/>
+            <a:r>
+              <a:rPr sz="1000" b="0" i="0">
+                <a:solidFill>
+                  <a:srgbClr val="54595D"/>
+                </a:solidFill>
+                <a:latin typeface="Calibri"/>
+              </a:rPr>
+              <a:t>5</a:t>
+            </a:r>
+          </a:p>
+        </p:txBody>
+      </p:sp>
+      <p:sp>
+        <p:nvSpPr>
+          <p:cNvPr id="6" name="Oval 5"/>
+          <p:cNvSpPr/>
+          <p:nvPr/>
+        </p:nvSpPr>
+        <p:spPr>
+          <a:xfrm>
+            <a:off x="548640" y="1691640"/>
+            <a:ext cx="502920" cy="502920"/>
+          </a:xfrm>
+          <a:prstGeom prst="ellipse">
+            <a:avLst/>
+          </a:prstGeom>
+          <a:solidFill>
+            <a:srgbClr val="F2B705"/>
+          </a:solidFill>
+          <a:ln>
+            <a:noFill/>
+          </a:ln>
+          <a:effectLst/>
+        </p:spPr>
+        <p:style>
+          <a:lnRef idx="1">
+            <a:schemeClr val="accent1"/>
+          </a:lnRef>
+          <a:fillRef idx="3">
+            <a:schemeClr val="accent1"/>
+          </a:fillRef>
+          <a:effectRef idx="2">
+            <a:schemeClr val="accent1"/>
+          </a:effectRef>
+          <a:fontRef idx="minor">
+            <a:schemeClr val="lt1"/>
+          </a:fontRef>
+        </p:style>
+        <p:txBody>
+          <a:bodyPr rtlCol="0" anchor="ctr" lIns="0" rIns="0" tIns="0" bIns="0"/>
+          <a:lstStyle/>
+          <a:p>
+            <a:pPr algn="ctr"/>
+            <a:r>
+              <a:rPr sz="1600" b="1">
+                <a:solidFill>
+                  <a:srgbClr val="202122"/>
+                </a:solidFill>
+                <a:latin typeface="Calibri"/>
+              </a:rPr>
+              <a:t>1</a:t>
+            </a:r>
+          </a:p>
+        </p:txBody>
+      </p:sp>
+      <p:sp>
+        <p:nvSpPr>
+          <p:cNvPr id="7" name="TextBox 6"/>
+          <p:cNvSpPr txBox="1"/>
+          <p:nvPr/>
+        </p:nvSpPr>
+        <p:spPr>
+          <a:xfrm>
+            <a:off x="1371600" y="1645920"/>
+            <a:ext cx="10271455" cy="1188720"/>
+          </a:xfrm>
+          <a:prstGeom prst="rect">
+            <a:avLst/>
+          </a:prstGeom>
+          <a:noFill/>
+        </p:spPr>
+        <p:txBody>
+          <a:bodyPr wrap="square" anchor="t" lIns="0" rIns="0" tIns="0" bIns="0"/>
+          <a:lstStyle/>
+          <a:p>
+            <a:pPr algn="l"/>
+            <a:r>
+              <a:rPr sz="2400" b="0" i="0">
+                <a:solidFill>
+                  <a:srgbClr val="202122"/>
+                </a:solidFill>
+                <a:latin typeface="Calibri"/>
+              </a:rPr>
+              <a:t>Why check local records before starting?</a:t>
+            </a:r>
+          </a:p>
+        </p:txBody>
+      </p:sp>
+      <p:sp>
+        <p:nvSpPr>
+          <p:cNvPr id="8" name="Oval 7"/>
+          <p:cNvSpPr/>
+          <p:nvPr/>
+        </p:nvSpPr>
+        <p:spPr>
+          <a:xfrm>
+            <a:off x="548640" y="3108960"/>
+            <a:ext cx="502920" cy="502920"/>
+          </a:xfrm>
+          <a:prstGeom prst="ellipse">
+            <a:avLst/>
+          </a:prstGeom>
+          <a:solidFill>
+            <a:srgbClr val="F2B705"/>
+          </a:solidFill>
+          <a:ln>
+            <a:noFill/>
+          </a:ln>
+          <a:effectLst/>
+        </p:spPr>
+        <p:style>
+          <a:lnRef idx="1">
+            <a:schemeClr val="accent1"/>
+          </a:lnRef>
+          <a:fillRef idx="3">
+            <a:schemeClr val="accent1"/>
+          </a:fillRef>
+          <a:effectRef idx="2">
+            <a:schemeClr val="accent1"/>
+          </a:effectRef>
+          <a:fontRef idx="minor">
+            <a:schemeClr val="lt1"/>
+          </a:fontRef>
+        </p:style>
+        <p:txBody>
+          <a:bodyPr rtlCol="0" anchor="ctr" lIns="0" rIns="0" tIns="0" bIns="0"/>
+          <a:lstStyle/>
+          <a:p>
+            <a:pPr algn="ctr"/>
+            <a:r>
+              <a:rPr sz="1600" b="1">
+                <a:solidFill>
+                  <a:srgbClr val="202122"/>
+                </a:solidFill>
+                <a:latin typeface="Calibri"/>
+              </a:rPr>
+              <a:t>2</a:t>
+            </a:r>
+          </a:p>
+        </p:txBody>
+      </p:sp>
+      <p:sp>
+        <p:nvSpPr>
+          <p:cNvPr id="9" name="TextBox 8"/>
+          <p:cNvSpPr txBox="1"/>
+          <p:nvPr/>
+        </p:nvSpPr>
+        <p:spPr>
+          <a:xfrm>
+            <a:off x="1371600" y="3063240"/>
+            <a:ext cx="10271455" cy="1188720"/>
+          </a:xfrm>
+          <a:prstGeom prst="rect">
+            <a:avLst/>
+          </a:prstGeom>
+          <a:noFill/>
+        </p:spPr>
+        <p:txBody>
+          <a:bodyPr wrap="square" anchor="t" lIns="0" rIns="0" tIns="0" bIns="0"/>
+          <a:lstStyle/>
+          <a:p>
+            <a:pPr algn="l"/>
+            <a:r>
+              <a:rPr sz="2400" b="0" i="0">
+                <a:solidFill>
+                  <a:srgbClr val="202122"/>
+                </a:solidFill>
+                <a:latin typeface="Calibri"/>
+              </a:rPr>
+              <a:t>Which standard covers segregating data and power cables?</a:t>
+            </a:r>
+          </a:p>
+        </p:txBody>
+      </p:sp>
+      <p:sp>
+        <p:nvSpPr>
+          <p:cNvPr id="10" name="Oval 9"/>
+          <p:cNvSpPr/>
+          <p:nvPr/>
+        </p:nvSpPr>
+        <p:spPr>
+          <a:xfrm>
+            <a:off x="548640" y="4526280"/>
+            <a:ext cx="502920" cy="502920"/>
+          </a:xfrm>
+          <a:prstGeom prst="ellipse">
+            <a:avLst/>
+          </a:prstGeom>
+          <a:solidFill>
+            <a:srgbClr val="F2B705"/>
+          </a:solidFill>
+          <a:ln>
+            <a:noFill/>
+          </a:ln>
+          <a:effectLst/>
+        </p:spPr>
+        <p:style>
+          <a:lnRef idx="1">
+            <a:schemeClr val="accent1"/>
+          </a:lnRef>
+          <a:fillRef idx="3">
+            <a:schemeClr val="accent1"/>
+          </a:fillRef>
+          <a:effectRef idx="2">
+            <a:schemeClr val="accent1"/>
+          </a:effectRef>
+          <a:fontRef idx="minor">
+            <a:schemeClr val="lt1"/>
+          </a:fontRef>
+        </p:style>
+        <p:txBody>
+          <a:bodyPr rtlCol="0" anchor="ctr" lIns="0" rIns="0" tIns="0" bIns="0"/>
+          <a:lstStyle/>
+          <a:p>
+            <a:pPr algn="ctr"/>
+            <a:r>
+              <a:rPr sz="1600" b="1">
+                <a:solidFill>
+                  <a:srgbClr val="202122"/>
+                </a:solidFill>
+                <a:latin typeface="Calibri"/>
+              </a:rPr>
+              <a:t>3</a:t>
+            </a:r>
+          </a:p>
+        </p:txBody>
+      </p:sp>
+      <p:sp>
+        <p:nvSpPr>
+          <p:cNvPr id="11" name="TextBox 10"/>
+          <p:cNvSpPr txBox="1"/>
+          <p:nvPr/>
+        </p:nvSpPr>
+        <p:spPr>
+          <a:xfrm>
+            <a:off x="1371600" y="4480560"/>
+            <a:ext cx="10271455" cy="1188720"/>
+          </a:xfrm>
+          <a:prstGeom prst="rect">
+            <a:avLst/>
+          </a:prstGeom>
+          <a:noFill/>
+        </p:spPr>
+        <p:txBody>
+          <a:bodyPr wrap="square" anchor="t" lIns="0" rIns="0" tIns="0" bIns="0"/>
+          <a:lstStyle/>
+          <a:p>
+            <a:pPr algn="l"/>
+            <a:r>
+              <a:rPr sz="2400" b="0" i="0">
+                <a:solidFill>
+                  <a:srgbClr val="202122"/>
+                </a:solidFill>
+                <a:latin typeface="Calibri"/>
+              </a:rPr>
+              <a:t>Give two examples of supporting media.</a:t>
+            </a:r>
+          </a:p>
+        </p:txBody>
+      </p:sp>
+      <p:sp>
+        <p:nvSpPr>
+          <p:cNvPr id="12" name="TextBox 11"/>
+          <p:cNvSpPr txBox="1"/>
+          <p:nvPr/>
+        </p:nvSpPr>
+        <p:spPr>
+          <a:xfrm>
+            <a:off x="548640" y="5852160"/>
+            <a:ext cx="11094415" cy="365760"/>
+          </a:xfrm>
+          <a:prstGeom prst="rect">
+            <a:avLst/>
+          </a:prstGeom>
+          <a:noFill/>
+        </p:spPr>
+        <p:txBody>
+          <a:bodyPr wrap="square" anchor="t" lIns="0" rIns="0" tIns="0" bIns="0"/>
+          <a:lstStyle/>
+          <a:p>
+            <a:pPr algn="l"/>
+            <a:r>
+              <a:rPr sz="1300" b="0" i="1">
+                <a:solidFill>
+                  <a:srgbClr val="54595D"/>
+                </a:solidFill>
+                <a:latin typeface="Calibri"/>
+              </a:rPr>
+              <a:t>Answer on mini whiteboards or in your book. Answers are in the speaker notes.</a:t>
+            </a:r>
+          </a:p>
+        </p:txBody>
+      </p:sp>
+    </p:spTree>
+  </p:cSld>
+  <p:clrMapOvr>
+    <a:masterClrMapping/>
+  </p:clrMapOvr>
+</p:sld>
+</file>
+
+<file path=ppt/slides/slide6.xml><?xml version="1.0" encoding="utf-8"?>
+<p:sld xmlns:a="http://schemas.openxmlformats.org/drawingml/2006/main" xmlns:p="http://schemas.openxmlformats.org/presentationml/2006/main" xmlns:r="http://schemas.openxmlformats.org/officeDocument/2006/relationships">
+  <p:cSld>
+    <p:bg>
+      <p:bgPr>
+        <a:solidFill>
+          <a:srgbClr val="FFFFFF"/>
+        </a:solidFill>
+        <a:effectLst/>
+      </p:bgPr>
+    </p:bg>
+    <p:spTree>
+      <p:nvGrpSpPr>
+        <p:cNvPr id="1" name=""/>
+        <p:cNvGrpSpPr/>
+        <p:nvPr/>
+      </p:nvGrpSpPr>
+      <p:grpSpPr/>
+      <p:sp>
+        <p:nvSpPr>
+          <p:cNvPr id="2" name="TextBox 1"/>
+          <p:cNvSpPr txBox="1"/>
+          <p:nvPr/>
+        </p:nvSpPr>
+        <p:spPr>
+          <a:xfrm>
+            <a:off x="548640" y="320040"/>
+            <a:ext cx="11094415" cy="274320"/>
+          </a:xfrm>
+          <a:prstGeom prst="rect">
+            <a:avLst/>
+          </a:prstGeom>
+          <a:noFill/>
+        </p:spPr>
+        <p:txBody>
+          <a:bodyPr wrap="square" anchor="t" lIns="0" rIns="0" tIns="0" bIns="0"/>
+          <a:lstStyle/>
+          <a:p>
+            <a:pPr algn="l"/>
+            <a:r>
+              <a:rPr sz="1100" b="1" i="0">
+                <a:solidFill>
+                  <a:srgbClr val="54595D"/>
+                </a:solidFill>
+                <a:latin typeface="Calibri"/>
+              </a:rPr>
+              <a:t>NETWORK CABLING  ·  Network Cabling Content Area 2</a:t>
+            </a:r>
+          </a:p>
+        </p:txBody>
+      </p:sp>
+      <p:sp>
+        <p:nvSpPr>
+          <p:cNvPr id="3" name="TextBox 2"/>
+          <p:cNvSpPr txBox="1"/>
+          <p:nvPr/>
+        </p:nvSpPr>
+        <p:spPr>
+          <a:xfrm>
+            <a:off x="548640" y="566928"/>
+            <a:ext cx="11094415" cy="822960"/>
+          </a:xfrm>
+          <a:prstGeom prst="rect">
+            <a:avLst/>
+          </a:prstGeom>
+          <a:noFill/>
+        </p:spPr>
+        <p:txBody>
+          <a:bodyPr wrap="square" anchor="ctr" lIns="0" rIns="0" tIns="0" bIns="0"/>
+          <a:lstStyle/>
+          <a:p>
+            <a:pPr algn="l"/>
+            <a:r>
+              <a:rPr sz="3200" b="1" i="0">
+                <a:solidFill>
+                  <a:srgbClr val="03306E"/>
+                </a:solidFill>
+                <a:latin typeface="Cambria"/>
+              </a:rPr>
+              <a:t>Key cabling standards</a:t>
+            </a:r>
+          </a:p>
+        </p:txBody>
+      </p:sp>
+      <p:sp>
+        <p:nvSpPr>
+          <p:cNvPr id="4" name="TextBox 3"/>
+          <p:cNvSpPr txBox="1"/>
+          <p:nvPr/>
+        </p:nvSpPr>
+        <p:spPr>
+          <a:xfrm>
+            <a:off x="548640" y="6446520"/>
+            <a:ext cx="8229600" cy="274320"/>
+          </a:xfrm>
+          <a:prstGeom prst="rect">
+            <a:avLst/>
+          </a:prstGeom>
+          <a:noFill/>
+        </p:spPr>
+        <p:txBody>
+          <a:bodyPr wrap="square" anchor="t" lIns="0" rIns="0" tIns="0" bIns="0"/>
+          <a:lstStyle/>
+          <a:p>
+            <a:pPr algn="l"/>
+            <a:r>
+              <a:rPr sz="1000" b="0" i="0">
+                <a:solidFill>
+                  <a:srgbClr val="54595D"/>
+                </a:solidFill>
+                <a:latin typeface="Calibri"/>
+              </a:rPr>
+              <a:t>Digital Support and Security T Level  ·  Health, Safety and Compliance for Cabling</a:t>
+            </a:r>
+          </a:p>
+        </p:txBody>
+      </p:sp>
+      <p:sp>
+        <p:nvSpPr>
+          <p:cNvPr id="5" name="TextBox 4"/>
+          <p:cNvSpPr txBox="1"/>
+          <p:nvPr/>
+        </p:nvSpPr>
+        <p:spPr>
+          <a:xfrm>
+            <a:off x="10728655" y="6446520"/>
+            <a:ext cx="914400" cy="274320"/>
+          </a:xfrm>
+          <a:prstGeom prst="rect">
+            <a:avLst/>
+          </a:prstGeom>
+          <a:noFill/>
+        </p:spPr>
+        <p:txBody>
+          <a:bodyPr wrap="square" anchor="t" lIns="0" rIns="0" tIns="0" bIns="0"/>
+          <a:lstStyle/>
+          <a:p>
+            <a:pPr algn="r"/>
+            <a:r>
+              <a:rPr sz="1000" b="0" i="0">
+                <a:solidFill>
+                  <a:srgbClr val="54595D"/>
+                </a:solidFill>
+                <a:latin typeface="Calibri"/>
+              </a:rPr>
+              <a:t>6</a:t>
             </a:r>
           </a:p>
         </p:txBody>
@@ -6933,2157 +10987,6 @@
 </p:sld>
 </file>
 
-<file path=ppt/slides/slide5.xml><?xml version="1.0" encoding="utf-8"?>
-<p:sld xmlns:a="http://schemas.openxmlformats.org/drawingml/2006/main" xmlns:p="http://schemas.openxmlformats.org/presentationml/2006/main" xmlns:r="http://schemas.openxmlformats.org/officeDocument/2006/relationships">
-  <p:cSld>
-    <p:bg>
-      <p:bgPr>
-        <a:solidFill>
-          <a:srgbClr val="FFFFFF"/>
-        </a:solidFill>
-        <a:effectLst/>
-      </p:bgPr>
-    </p:bg>
-    <p:spTree>
-      <p:nvGrpSpPr>
-        <p:cNvPr id="1" name=""/>
-        <p:cNvGrpSpPr/>
-        <p:nvPr/>
-      </p:nvGrpSpPr>
-      <p:grpSpPr/>
-      <p:sp>
-        <p:nvSpPr>
-          <p:cNvPr id="2" name="TextBox 1"/>
-          <p:cNvSpPr txBox="1"/>
-          <p:nvPr/>
-        </p:nvSpPr>
-        <p:spPr>
-          <a:xfrm>
-            <a:off x="548640" y="320040"/>
-            <a:ext cx="11094415" cy="274320"/>
-          </a:xfrm>
-          <a:prstGeom prst="rect">
-            <a:avLst/>
-          </a:prstGeom>
-          <a:noFill/>
-        </p:spPr>
-        <p:txBody>
-          <a:bodyPr wrap="square" anchor="t" lIns="0" rIns="0" tIns="0" bIns="0"/>
-          <a:lstStyle/>
-          <a:p>
-            <a:pPr algn="l"/>
-            <a:r>
-              <a:rPr sz="1100" b="1" i="0">
-                <a:solidFill>
-                  <a:srgbClr val="54595D"/>
-                </a:solidFill>
-                <a:latin typeface="Calibri"/>
-              </a:rPr>
-              <a:t>NETWORK CABLING  ·  Network Cabling Content Area 2</a:t>
-            </a:r>
-          </a:p>
-        </p:txBody>
-      </p:sp>
-      <p:sp>
-        <p:nvSpPr>
-          <p:cNvPr id="3" name="TextBox 2"/>
-          <p:cNvSpPr txBox="1"/>
-          <p:nvPr/>
-        </p:nvSpPr>
-        <p:spPr>
-          <a:xfrm>
-            <a:off x="548640" y="566928"/>
-            <a:ext cx="11094415" cy="822960"/>
-          </a:xfrm>
-          <a:prstGeom prst="rect">
-            <a:avLst/>
-          </a:prstGeom>
-          <a:noFill/>
-        </p:spPr>
-        <p:txBody>
-          <a:bodyPr wrap="square" anchor="ctr" lIns="0" rIns="0" tIns="0" bIns="0"/>
-          <a:lstStyle/>
-          <a:p>
-            <a:pPr algn="l"/>
-            <a:r>
-              <a:rPr sz="3200" b="1" i="0">
-                <a:solidFill>
-                  <a:srgbClr val="03306E"/>
-                </a:solidFill>
-                <a:latin typeface="Cambria"/>
-              </a:rPr>
-              <a:t>Legislation</a:t>
-            </a:r>
-          </a:p>
-        </p:txBody>
-      </p:sp>
-      <p:sp>
-        <p:nvSpPr>
-          <p:cNvPr id="4" name="TextBox 3"/>
-          <p:cNvSpPr txBox="1"/>
-          <p:nvPr/>
-        </p:nvSpPr>
-        <p:spPr>
-          <a:xfrm>
-            <a:off x="548640" y="6446520"/>
-            <a:ext cx="8229600" cy="274320"/>
-          </a:xfrm>
-          <a:prstGeom prst="rect">
-            <a:avLst/>
-          </a:prstGeom>
-          <a:noFill/>
-        </p:spPr>
-        <p:txBody>
-          <a:bodyPr wrap="square" anchor="t" lIns="0" rIns="0" tIns="0" bIns="0"/>
-          <a:lstStyle/>
-          <a:p>
-            <a:pPr algn="l"/>
-            <a:r>
-              <a:rPr sz="1000" b="0" i="0">
-                <a:solidFill>
-                  <a:srgbClr val="54595D"/>
-                </a:solidFill>
-                <a:latin typeface="Calibri"/>
-              </a:rPr>
-              <a:t>Digital Support and Security T Level  ·  Health, Safety and Compliance for Cabling</a:t>
-            </a:r>
-          </a:p>
-        </p:txBody>
-      </p:sp>
-      <p:sp>
-        <p:nvSpPr>
-          <p:cNvPr id="5" name="TextBox 4"/>
-          <p:cNvSpPr txBox="1"/>
-          <p:nvPr/>
-        </p:nvSpPr>
-        <p:spPr>
-          <a:xfrm>
-            <a:off x="10728655" y="6446520"/>
-            <a:ext cx="914400" cy="274320"/>
-          </a:xfrm>
-          <a:prstGeom prst="rect">
-            <a:avLst/>
-          </a:prstGeom>
-          <a:noFill/>
-        </p:spPr>
-        <p:txBody>
-          <a:bodyPr wrap="square" anchor="t" lIns="0" rIns="0" tIns="0" bIns="0"/>
-          <a:lstStyle/>
-          <a:p>
-            <a:pPr algn="r"/>
-            <a:r>
-              <a:rPr sz="1000" b="0" i="0">
-                <a:solidFill>
-                  <a:srgbClr val="54595D"/>
-                </a:solidFill>
-                <a:latin typeface="Calibri"/>
-              </a:rPr>
-              <a:t>5</a:t>
-            </a:r>
-          </a:p>
-        </p:txBody>
-      </p:sp>
-      <p:sp>
-        <p:nvSpPr>
-          <p:cNvPr id="6" name="Rounded Rectangle 5"/>
-          <p:cNvSpPr/>
-          <p:nvPr/>
-        </p:nvSpPr>
-        <p:spPr>
-          <a:xfrm>
-            <a:off x="548640" y="1600200"/>
-            <a:ext cx="3515258" cy="2148840"/>
-          </a:xfrm>
-          <a:prstGeom prst="roundRect">
-            <a:avLst>
-              <a:gd name="adj" fmla="val 6000"/>
-            </a:avLst>
-          </a:prstGeom>
-          <a:solidFill>
-            <a:srgbClr val="EAF3FF"/>
-          </a:solidFill>
-          <a:ln>
-            <a:noFill/>
-          </a:ln>
-          <a:effectLst/>
-        </p:spPr>
-        <p:style>
-          <a:lnRef idx="1">
-            <a:schemeClr val="accent1"/>
-          </a:lnRef>
-          <a:fillRef idx="3">
-            <a:schemeClr val="accent1"/>
-          </a:fillRef>
-          <a:effectRef idx="2">
-            <a:schemeClr val="accent1"/>
-          </a:effectRef>
-          <a:fontRef idx="minor">
-            <a:schemeClr val="lt1"/>
-          </a:fontRef>
-        </p:style>
-        <p:txBody>
-          <a:bodyPr rtlCol="0" anchor="ctr"/>
-          <a:lstStyle/>
-          <a:p/>
-        </p:txBody>
-      </p:sp>
-      <p:sp>
-        <p:nvSpPr>
-          <p:cNvPr id="7" name="Oval 6"/>
-          <p:cNvSpPr/>
-          <p:nvPr/>
-        </p:nvSpPr>
-        <p:spPr>
-          <a:xfrm>
-            <a:off x="777240" y="1828800"/>
-            <a:ext cx="457200" cy="457200"/>
-          </a:xfrm>
-          <a:prstGeom prst="ellipse">
-            <a:avLst/>
-          </a:prstGeom>
-          <a:solidFill>
-            <a:srgbClr val="F2B705"/>
-          </a:solidFill>
-          <a:ln>
-            <a:noFill/>
-          </a:ln>
-          <a:effectLst/>
-        </p:spPr>
-        <p:style>
-          <a:lnRef idx="1">
-            <a:schemeClr val="accent1"/>
-          </a:lnRef>
-          <a:fillRef idx="3">
-            <a:schemeClr val="accent1"/>
-          </a:fillRef>
-          <a:effectRef idx="2">
-            <a:schemeClr val="accent1"/>
-          </a:effectRef>
-          <a:fontRef idx="minor">
-            <a:schemeClr val="lt1"/>
-          </a:fontRef>
-        </p:style>
-        <p:txBody>
-          <a:bodyPr rtlCol="0" anchor="ctr" lIns="0" rIns="0" tIns="0" bIns="0"/>
-          <a:lstStyle/>
-          <a:p>
-            <a:pPr algn="ctr"/>
-            <a:r>
-              <a:rPr sz="1500" b="1">
-                <a:solidFill>
-                  <a:srgbClr val="202122"/>
-                </a:solidFill>
-                <a:latin typeface="Calibri"/>
-              </a:rPr>
-              <a:t>1</a:t>
-            </a:r>
-          </a:p>
-        </p:txBody>
-      </p:sp>
-      <p:sp>
-        <p:nvSpPr>
-          <p:cNvPr id="8" name="TextBox 7"/>
-          <p:cNvSpPr txBox="1"/>
-          <p:nvPr/>
-        </p:nvSpPr>
-        <p:spPr>
-          <a:xfrm>
-            <a:off x="1371600" y="1801368"/>
-            <a:ext cx="2509418" cy="512064"/>
-          </a:xfrm>
-          <a:prstGeom prst="rect">
-            <a:avLst/>
-          </a:prstGeom>
-          <a:noFill/>
-        </p:spPr>
-        <p:txBody>
-          <a:bodyPr wrap="square" anchor="ctr" lIns="0" rIns="0" tIns="0" bIns="0"/>
-          <a:lstStyle/>
-          <a:p>
-            <a:pPr algn="l"/>
-            <a:r>
-              <a:rPr sz="1900" b="1" i="0">
-                <a:solidFill>
-                  <a:srgbClr val="03306E"/>
-                </a:solidFill>
-                <a:latin typeface="Calibri"/>
-              </a:rPr>
-              <a:t>HSWA 1974</a:t>
-            </a:r>
-          </a:p>
-        </p:txBody>
-      </p:sp>
-      <p:sp>
-        <p:nvSpPr>
-          <p:cNvPr id="9" name="TextBox 8"/>
-          <p:cNvSpPr txBox="1"/>
-          <p:nvPr/>
-        </p:nvSpPr>
-        <p:spPr>
-          <a:xfrm>
-            <a:off x="777240" y="2468880"/>
-            <a:ext cx="3058058" cy="1143000"/>
-          </a:xfrm>
-          <a:prstGeom prst="rect">
-            <a:avLst/>
-          </a:prstGeom>
-          <a:noFill/>
-        </p:spPr>
-        <p:txBody>
-          <a:bodyPr wrap="square" anchor="t" lIns="0" rIns="0" tIns="0" bIns="0"/>
-          <a:lstStyle/>
-          <a:p>
-            <a:pPr algn="l"/>
-            <a:r>
-              <a:rPr sz="2000" b="0" i="0">
-                <a:solidFill>
-                  <a:srgbClr val="202122"/>
-                </a:solidFill>
-                <a:latin typeface="Calibri"/>
-              </a:rPr>
-              <a:t>The general duty of care.</a:t>
-            </a:r>
-          </a:p>
-        </p:txBody>
-      </p:sp>
-      <p:sp>
-        <p:nvSpPr>
-          <p:cNvPr id="10" name="Rounded Rectangle 9"/>
-          <p:cNvSpPr/>
-          <p:nvPr/>
-        </p:nvSpPr>
-        <p:spPr>
-          <a:xfrm>
-            <a:off x="4338218" y="1600200"/>
-            <a:ext cx="3515258" cy="2148840"/>
-          </a:xfrm>
-          <a:prstGeom prst="roundRect">
-            <a:avLst>
-              <a:gd name="adj" fmla="val 6000"/>
-            </a:avLst>
-          </a:prstGeom>
-          <a:solidFill>
-            <a:srgbClr val="EAF3FF"/>
-          </a:solidFill>
-          <a:ln>
-            <a:noFill/>
-          </a:ln>
-          <a:effectLst/>
-        </p:spPr>
-        <p:style>
-          <a:lnRef idx="1">
-            <a:schemeClr val="accent1"/>
-          </a:lnRef>
-          <a:fillRef idx="3">
-            <a:schemeClr val="accent1"/>
-          </a:fillRef>
-          <a:effectRef idx="2">
-            <a:schemeClr val="accent1"/>
-          </a:effectRef>
-          <a:fontRef idx="minor">
-            <a:schemeClr val="lt1"/>
-          </a:fontRef>
-        </p:style>
-        <p:txBody>
-          <a:bodyPr rtlCol="0" anchor="ctr"/>
-          <a:lstStyle/>
-          <a:p/>
-        </p:txBody>
-      </p:sp>
-      <p:sp>
-        <p:nvSpPr>
-          <p:cNvPr id="11" name="Oval 10"/>
-          <p:cNvSpPr/>
-          <p:nvPr/>
-        </p:nvSpPr>
-        <p:spPr>
-          <a:xfrm>
-            <a:off x="4566818" y="1828800"/>
-            <a:ext cx="457200" cy="457200"/>
-          </a:xfrm>
-          <a:prstGeom prst="ellipse">
-            <a:avLst/>
-          </a:prstGeom>
-          <a:solidFill>
-            <a:srgbClr val="F2B705"/>
-          </a:solidFill>
-          <a:ln>
-            <a:noFill/>
-          </a:ln>
-          <a:effectLst/>
-        </p:spPr>
-        <p:style>
-          <a:lnRef idx="1">
-            <a:schemeClr val="accent1"/>
-          </a:lnRef>
-          <a:fillRef idx="3">
-            <a:schemeClr val="accent1"/>
-          </a:fillRef>
-          <a:effectRef idx="2">
-            <a:schemeClr val="accent1"/>
-          </a:effectRef>
-          <a:fontRef idx="minor">
-            <a:schemeClr val="lt1"/>
-          </a:fontRef>
-        </p:style>
-        <p:txBody>
-          <a:bodyPr rtlCol="0" anchor="ctr" lIns="0" rIns="0" tIns="0" bIns="0"/>
-          <a:lstStyle/>
-          <a:p>
-            <a:pPr algn="ctr"/>
-            <a:r>
-              <a:rPr sz="1500" b="1">
-                <a:solidFill>
-                  <a:srgbClr val="202122"/>
-                </a:solidFill>
-                <a:latin typeface="Calibri"/>
-              </a:rPr>
-              <a:t>2</a:t>
-            </a:r>
-          </a:p>
-        </p:txBody>
-      </p:sp>
-      <p:sp>
-        <p:nvSpPr>
-          <p:cNvPr id="12" name="TextBox 11"/>
-          <p:cNvSpPr txBox="1"/>
-          <p:nvPr/>
-        </p:nvSpPr>
-        <p:spPr>
-          <a:xfrm>
-            <a:off x="5161178" y="1801368"/>
-            <a:ext cx="2509418" cy="512064"/>
-          </a:xfrm>
-          <a:prstGeom prst="rect">
-            <a:avLst/>
-          </a:prstGeom>
-          <a:noFill/>
-        </p:spPr>
-        <p:txBody>
-          <a:bodyPr wrap="square" anchor="ctr" lIns="0" rIns="0" tIns="0" bIns="0"/>
-          <a:lstStyle/>
-          <a:p>
-            <a:pPr algn="l"/>
-            <a:r>
-              <a:rPr sz="1600" b="1" i="0">
-                <a:solidFill>
-                  <a:srgbClr val="03306E"/>
-                </a:solidFill>
-                <a:latin typeface="Calibri"/>
-              </a:rPr>
-              <a:t>Electricity at Work 1989</a:t>
-            </a:r>
-          </a:p>
-        </p:txBody>
-      </p:sp>
-      <p:sp>
-        <p:nvSpPr>
-          <p:cNvPr id="13" name="TextBox 12"/>
-          <p:cNvSpPr txBox="1"/>
-          <p:nvPr/>
-        </p:nvSpPr>
-        <p:spPr>
-          <a:xfrm>
-            <a:off x="4566818" y="2468880"/>
-            <a:ext cx="3058058" cy="1143000"/>
-          </a:xfrm>
-          <a:prstGeom prst="rect">
-            <a:avLst/>
-          </a:prstGeom>
-          <a:noFill/>
-        </p:spPr>
-        <p:txBody>
-          <a:bodyPr wrap="square" anchor="t" lIns="0" rIns="0" tIns="0" bIns="0"/>
-          <a:lstStyle/>
-          <a:p>
-            <a:pPr algn="l"/>
-            <a:r>
-              <a:rPr sz="2000" b="0" i="0">
-                <a:solidFill>
-                  <a:srgbClr val="202122"/>
-                </a:solidFill>
-                <a:latin typeface="Calibri"/>
-              </a:rPr>
-              <a:t>Safe work near electrical systems.</a:t>
-            </a:r>
-          </a:p>
-        </p:txBody>
-      </p:sp>
-      <p:sp>
-        <p:nvSpPr>
-          <p:cNvPr id="14" name="Rounded Rectangle 13"/>
-          <p:cNvSpPr/>
-          <p:nvPr/>
-        </p:nvSpPr>
-        <p:spPr>
-          <a:xfrm>
-            <a:off x="8127796" y="1600200"/>
-            <a:ext cx="3515258" cy="2148840"/>
-          </a:xfrm>
-          <a:prstGeom prst="roundRect">
-            <a:avLst>
-              <a:gd name="adj" fmla="val 6000"/>
-            </a:avLst>
-          </a:prstGeom>
-          <a:solidFill>
-            <a:srgbClr val="EAF3FF"/>
-          </a:solidFill>
-          <a:ln>
-            <a:noFill/>
-          </a:ln>
-          <a:effectLst/>
-        </p:spPr>
-        <p:style>
-          <a:lnRef idx="1">
-            <a:schemeClr val="accent1"/>
-          </a:lnRef>
-          <a:fillRef idx="3">
-            <a:schemeClr val="accent1"/>
-          </a:fillRef>
-          <a:effectRef idx="2">
-            <a:schemeClr val="accent1"/>
-          </a:effectRef>
-          <a:fontRef idx="minor">
-            <a:schemeClr val="lt1"/>
-          </a:fontRef>
-        </p:style>
-        <p:txBody>
-          <a:bodyPr rtlCol="0" anchor="ctr"/>
-          <a:lstStyle/>
-          <a:p/>
-        </p:txBody>
-      </p:sp>
-      <p:sp>
-        <p:nvSpPr>
-          <p:cNvPr id="15" name="Oval 14"/>
-          <p:cNvSpPr/>
-          <p:nvPr/>
-        </p:nvSpPr>
-        <p:spPr>
-          <a:xfrm>
-            <a:off x="8356396" y="1828800"/>
-            <a:ext cx="457200" cy="457200"/>
-          </a:xfrm>
-          <a:prstGeom prst="ellipse">
-            <a:avLst/>
-          </a:prstGeom>
-          <a:solidFill>
-            <a:srgbClr val="F2B705"/>
-          </a:solidFill>
-          <a:ln>
-            <a:noFill/>
-          </a:ln>
-          <a:effectLst/>
-        </p:spPr>
-        <p:style>
-          <a:lnRef idx="1">
-            <a:schemeClr val="accent1"/>
-          </a:lnRef>
-          <a:fillRef idx="3">
-            <a:schemeClr val="accent1"/>
-          </a:fillRef>
-          <a:effectRef idx="2">
-            <a:schemeClr val="accent1"/>
-          </a:effectRef>
-          <a:fontRef idx="minor">
-            <a:schemeClr val="lt1"/>
-          </a:fontRef>
-        </p:style>
-        <p:txBody>
-          <a:bodyPr rtlCol="0" anchor="ctr" lIns="0" rIns="0" tIns="0" bIns="0"/>
-          <a:lstStyle/>
-          <a:p>
-            <a:pPr algn="ctr"/>
-            <a:r>
-              <a:rPr sz="1500" b="1">
-                <a:solidFill>
-                  <a:srgbClr val="202122"/>
-                </a:solidFill>
-                <a:latin typeface="Calibri"/>
-              </a:rPr>
-              <a:t>3</a:t>
-            </a:r>
-          </a:p>
-        </p:txBody>
-      </p:sp>
-      <p:sp>
-        <p:nvSpPr>
-          <p:cNvPr id="16" name="TextBox 15"/>
-          <p:cNvSpPr txBox="1"/>
-          <p:nvPr/>
-        </p:nvSpPr>
-        <p:spPr>
-          <a:xfrm>
-            <a:off x="8950756" y="1801368"/>
-            <a:ext cx="2509418" cy="512064"/>
-          </a:xfrm>
-          <a:prstGeom prst="rect">
-            <a:avLst/>
-          </a:prstGeom>
-          <a:noFill/>
-        </p:spPr>
-        <p:txBody>
-          <a:bodyPr wrap="square" anchor="ctr" lIns="0" rIns="0" tIns="0" bIns="0"/>
-          <a:lstStyle/>
-          <a:p>
-            <a:pPr algn="l"/>
-            <a:r>
-              <a:rPr sz="1900" b="1" i="0">
-                <a:solidFill>
-                  <a:srgbClr val="03306E"/>
-                </a:solidFill>
-                <a:latin typeface="Calibri"/>
-              </a:rPr>
-              <a:t>Work at Height 2005</a:t>
-            </a:r>
-          </a:p>
-        </p:txBody>
-      </p:sp>
-      <p:sp>
-        <p:nvSpPr>
-          <p:cNvPr id="17" name="TextBox 16"/>
-          <p:cNvSpPr txBox="1"/>
-          <p:nvPr/>
-        </p:nvSpPr>
-        <p:spPr>
-          <a:xfrm>
-            <a:off x="8356396" y="2468880"/>
-            <a:ext cx="3058058" cy="1143000"/>
-          </a:xfrm>
-          <a:prstGeom prst="rect">
-            <a:avLst/>
-          </a:prstGeom>
-          <a:noFill/>
-        </p:spPr>
-        <p:txBody>
-          <a:bodyPr wrap="square" anchor="t" lIns="0" rIns="0" tIns="0" bIns="0"/>
-          <a:lstStyle/>
-          <a:p>
-            <a:pPr algn="l"/>
-            <a:r>
-              <a:rPr sz="2000" b="0" i="0">
-                <a:solidFill>
-                  <a:srgbClr val="202122"/>
-                </a:solidFill>
-                <a:latin typeface="Calibri"/>
-              </a:rPr>
-              <a:t>Planning and equipment for work at height.</a:t>
-            </a:r>
-          </a:p>
-        </p:txBody>
-      </p:sp>
-      <p:sp>
-        <p:nvSpPr>
-          <p:cNvPr id="18" name="Rounded Rectangle 17"/>
-          <p:cNvSpPr/>
-          <p:nvPr/>
-        </p:nvSpPr>
-        <p:spPr>
-          <a:xfrm>
-            <a:off x="548640" y="4023360"/>
-            <a:ext cx="3515258" cy="2148840"/>
-          </a:xfrm>
-          <a:prstGeom prst="roundRect">
-            <a:avLst>
-              <a:gd name="adj" fmla="val 6000"/>
-            </a:avLst>
-          </a:prstGeom>
-          <a:solidFill>
-            <a:srgbClr val="EAF3FF"/>
-          </a:solidFill>
-          <a:ln>
-            <a:noFill/>
-          </a:ln>
-          <a:effectLst/>
-        </p:spPr>
-        <p:style>
-          <a:lnRef idx="1">
-            <a:schemeClr val="accent1"/>
-          </a:lnRef>
-          <a:fillRef idx="3">
-            <a:schemeClr val="accent1"/>
-          </a:fillRef>
-          <a:effectRef idx="2">
-            <a:schemeClr val="accent1"/>
-          </a:effectRef>
-          <a:fontRef idx="minor">
-            <a:schemeClr val="lt1"/>
-          </a:fontRef>
-        </p:style>
-        <p:txBody>
-          <a:bodyPr rtlCol="0" anchor="ctr"/>
-          <a:lstStyle/>
-          <a:p/>
-        </p:txBody>
-      </p:sp>
-      <p:sp>
-        <p:nvSpPr>
-          <p:cNvPr id="19" name="Oval 18"/>
-          <p:cNvSpPr/>
-          <p:nvPr/>
-        </p:nvSpPr>
-        <p:spPr>
-          <a:xfrm>
-            <a:off x="777240" y="4251960"/>
-            <a:ext cx="457200" cy="457200"/>
-          </a:xfrm>
-          <a:prstGeom prst="ellipse">
-            <a:avLst/>
-          </a:prstGeom>
-          <a:solidFill>
-            <a:srgbClr val="F2B705"/>
-          </a:solidFill>
-          <a:ln>
-            <a:noFill/>
-          </a:ln>
-          <a:effectLst/>
-        </p:spPr>
-        <p:style>
-          <a:lnRef idx="1">
-            <a:schemeClr val="accent1"/>
-          </a:lnRef>
-          <a:fillRef idx="3">
-            <a:schemeClr val="accent1"/>
-          </a:fillRef>
-          <a:effectRef idx="2">
-            <a:schemeClr val="accent1"/>
-          </a:effectRef>
-          <a:fontRef idx="minor">
-            <a:schemeClr val="lt1"/>
-          </a:fontRef>
-        </p:style>
-        <p:txBody>
-          <a:bodyPr rtlCol="0" anchor="ctr" lIns="0" rIns="0" tIns="0" bIns="0"/>
-          <a:lstStyle/>
-          <a:p>
-            <a:pPr algn="ctr"/>
-            <a:r>
-              <a:rPr sz="1500" b="1">
-                <a:solidFill>
-                  <a:srgbClr val="202122"/>
-                </a:solidFill>
-                <a:latin typeface="Calibri"/>
-              </a:rPr>
-              <a:t>4</a:t>
-            </a:r>
-          </a:p>
-        </p:txBody>
-      </p:sp>
-      <p:sp>
-        <p:nvSpPr>
-          <p:cNvPr id="20" name="TextBox 19"/>
-          <p:cNvSpPr txBox="1"/>
-          <p:nvPr/>
-        </p:nvSpPr>
-        <p:spPr>
-          <a:xfrm>
-            <a:off x="1371600" y="4224528"/>
-            <a:ext cx="2509418" cy="512064"/>
-          </a:xfrm>
-          <a:prstGeom prst="rect">
-            <a:avLst/>
-          </a:prstGeom>
-          <a:noFill/>
-        </p:spPr>
-        <p:txBody>
-          <a:bodyPr wrap="square" anchor="ctr" lIns="0" rIns="0" tIns="0" bIns="0"/>
-          <a:lstStyle/>
-          <a:p>
-            <a:pPr algn="l"/>
-            <a:r>
-              <a:rPr sz="1900" b="1" i="0">
-                <a:solidFill>
-                  <a:srgbClr val="03306E"/>
-                </a:solidFill>
-                <a:latin typeface="Calibri"/>
-              </a:rPr>
-              <a:t>COSHH 2002</a:t>
-            </a:r>
-          </a:p>
-        </p:txBody>
-      </p:sp>
-      <p:sp>
-        <p:nvSpPr>
-          <p:cNvPr id="21" name="TextBox 20"/>
-          <p:cNvSpPr txBox="1"/>
-          <p:nvPr/>
-        </p:nvSpPr>
-        <p:spPr>
-          <a:xfrm>
-            <a:off x="777240" y="4892040"/>
-            <a:ext cx="3058058" cy="1143000"/>
-          </a:xfrm>
-          <a:prstGeom prst="rect">
-            <a:avLst/>
-          </a:prstGeom>
-          <a:noFill/>
-        </p:spPr>
-        <p:txBody>
-          <a:bodyPr wrap="square" anchor="t" lIns="0" rIns="0" tIns="0" bIns="0"/>
-          <a:lstStyle/>
-          <a:p>
-            <a:pPr algn="l"/>
-            <a:r>
-              <a:rPr sz="2000" b="0" i="0">
-                <a:solidFill>
-                  <a:srgbClr val="202122"/>
-                </a:solidFill>
-                <a:latin typeface="Calibri"/>
-              </a:rPr>
-              <a:t>Hazardous substances.</a:t>
-            </a:r>
-          </a:p>
-        </p:txBody>
-      </p:sp>
-      <p:sp>
-        <p:nvSpPr>
-          <p:cNvPr id="22" name="Rounded Rectangle 21"/>
-          <p:cNvSpPr/>
-          <p:nvPr/>
-        </p:nvSpPr>
-        <p:spPr>
-          <a:xfrm>
-            <a:off x="4338218" y="4023360"/>
-            <a:ext cx="3515258" cy="2148840"/>
-          </a:xfrm>
-          <a:prstGeom prst="roundRect">
-            <a:avLst>
-              <a:gd name="adj" fmla="val 6000"/>
-            </a:avLst>
-          </a:prstGeom>
-          <a:solidFill>
-            <a:srgbClr val="EAF3FF"/>
-          </a:solidFill>
-          <a:ln>
-            <a:noFill/>
-          </a:ln>
-          <a:effectLst/>
-        </p:spPr>
-        <p:style>
-          <a:lnRef idx="1">
-            <a:schemeClr val="accent1"/>
-          </a:lnRef>
-          <a:fillRef idx="3">
-            <a:schemeClr val="accent1"/>
-          </a:fillRef>
-          <a:effectRef idx="2">
-            <a:schemeClr val="accent1"/>
-          </a:effectRef>
-          <a:fontRef idx="minor">
-            <a:schemeClr val="lt1"/>
-          </a:fontRef>
-        </p:style>
-        <p:txBody>
-          <a:bodyPr rtlCol="0" anchor="ctr"/>
-          <a:lstStyle/>
-          <a:p/>
-        </p:txBody>
-      </p:sp>
-      <p:sp>
-        <p:nvSpPr>
-          <p:cNvPr id="23" name="Oval 22"/>
-          <p:cNvSpPr/>
-          <p:nvPr/>
-        </p:nvSpPr>
-        <p:spPr>
-          <a:xfrm>
-            <a:off x="4566818" y="4251960"/>
-            <a:ext cx="457200" cy="457200"/>
-          </a:xfrm>
-          <a:prstGeom prst="ellipse">
-            <a:avLst/>
-          </a:prstGeom>
-          <a:solidFill>
-            <a:srgbClr val="F2B705"/>
-          </a:solidFill>
-          <a:ln>
-            <a:noFill/>
-          </a:ln>
-          <a:effectLst/>
-        </p:spPr>
-        <p:style>
-          <a:lnRef idx="1">
-            <a:schemeClr val="accent1"/>
-          </a:lnRef>
-          <a:fillRef idx="3">
-            <a:schemeClr val="accent1"/>
-          </a:fillRef>
-          <a:effectRef idx="2">
-            <a:schemeClr val="accent1"/>
-          </a:effectRef>
-          <a:fontRef idx="minor">
-            <a:schemeClr val="lt1"/>
-          </a:fontRef>
-        </p:style>
-        <p:txBody>
-          <a:bodyPr rtlCol="0" anchor="ctr" lIns="0" rIns="0" tIns="0" bIns="0"/>
-          <a:lstStyle/>
-          <a:p>
-            <a:pPr algn="ctr"/>
-            <a:r>
-              <a:rPr sz="1500" b="1">
-                <a:solidFill>
-                  <a:srgbClr val="202122"/>
-                </a:solidFill>
-                <a:latin typeface="Calibri"/>
-              </a:rPr>
-              <a:t>5</a:t>
-            </a:r>
-          </a:p>
-        </p:txBody>
-      </p:sp>
-      <p:sp>
-        <p:nvSpPr>
-          <p:cNvPr id="24" name="TextBox 23"/>
-          <p:cNvSpPr txBox="1"/>
-          <p:nvPr/>
-        </p:nvSpPr>
-        <p:spPr>
-          <a:xfrm>
-            <a:off x="5161178" y="4224528"/>
-            <a:ext cx="2509418" cy="512064"/>
-          </a:xfrm>
-          <a:prstGeom prst="rect">
-            <a:avLst/>
-          </a:prstGeom>
-          <a:noFill/>
-        </p:spPr>
-        <p:txBody>
-          <a:bodyPr wrap="square" anchor="ctr" lIns="0" rIns="0" tIns="0" bIns="0"/>
-          <a:lstStyle/>
-          <a:p>
-            <a:pPr algn="l"/>
-            <a:r>
-              <a:rPr sz="1800" b="1" i="0">
-                <a:solidFill>
-                  <a:srgbClr val="03306E"/>
-                </a:solidFill>
-                <a:latin typeface="Calibri"/>
-              </a:rPr>
-              <a:t>Confined Spaces 1997</a:t>
-            </a:r>
-          </a:p>
-        </p:txBody>
-      </p:sp>
-      <p:sp>
-        <p:nvSpPr>
-          <p:cNvPr id="25" name="TextBox 24"/>
-          <p:cNvSpPr txBox="1"/>
-          <p:nvPr/>
-        </p:nvSpPr>
-        <p:spPr>
-          <a:xfrm>
-            <a:off x="4566818" y="4892040"/>
-            <a:ext cx="3058058" cy="1143000"/>
-          </a:xfrm>
-          <a:prstGeom prst="rect">
-            <a:avLst/>
-          </a:prstGeom>
-          <a:noFill/>
-        </p:spPr>
-        <p:txBody>
-          <a:bodyPr wrap="square" anchor="t" lIns="0" rIns="0" tIns="0" bIns="0"/>
-          <a:lstStyle/>
-          <a:p>
-            <a:pPr algn="l"/>
-            <a:r>
-              <a:rPr sz="2000" b="0" i="0">
-                <a:solidFill>
-                  <a:srgbClr val="202122"/>
-                </a:solidFill>
-                <a:latin typeface="Calibri"/>
-              </a:rPr>
-              <a:t>Safe entry and rescue plans.</a:t>
-            </a:r>
-          </a:p>
-        </p:txBody>
-      </p:sp>
-      <p:sp>
-        <p:nvSpPr>
-          <p:cNvPr id="26" name="Rounded Rectangle 25"/>
-          <p:cNvSpPr/>
-          <p:nvPr/>
-        </p:nvSpPr>
-        <p:spPr>
-          <a:xfrm>
-            <a:off x="8127796" y="4023360"/>
-            <a:ext cx="3515258" cy="2148840"/>
-          </a:xfrm>
-          <a:prstGeom prst="roundRect">
-            <a:avLst>
-              <a:gd name="adj" fmla="val 6000"/>
-            </a:avLst>
-          </a:prstGeom>
-          <a:solidFill>
-            <a:srgbClr val="EAF3FF"/>
-          </a:solidFill>
-          <a:ln>
-            <a:noFill/>
-          </a:ln>
-          <a:effectLst/>
-        </p:spPr>
-        <p:style>
-          <a:lnRef idx="1">
-            <a:schemeClr val="accent1"/>
-          </a:lnRef>
-          <a:fillRef idx="3">
-            <a:schemeClr val="accent1"/>
-          </a:fillRef>
-          <a:effectRef idx="2">
-            <a:schemeClr val="accent1"/>
-          </a:effectRef>
-          <a:fontRef idx="minor">
-            <a:schemeClr val="lt1"/>
-          </a:fontRef>
-        </p:style>
-        <p:txBody>
-          <a:bodyPr rtlCol="0" anchor="ctr"/>
-          <a:lstStyle/>
-          <a:p/>
-        </p:txBody>
-      </p:sp>
-      <p:sp>
-        <p:nvSpPr>
-          <p:cNvPr id="27" name="Oval 26"/>
-          <p:cNvSpPr/>
-          <p:nvPr/>
-        </p:nvSpPr>
-        <p:spPr>
-          <a:xfrm>
-            <a:off x="8356396" y="4251960"/>
-            <a:ext cx="457200" cy="457200"/>
-          </a:xfrm>
-          <a:prstGeom prst="ellipse">
-            <a:avLst/>
-          </a:prstGeom>
-          <a:solidFill>
-            <a:srgbClr val="F2B705"/>
-          </a:solidFill>
-          <a:ln>
-            <a:noFill/>
-          </a:ln>
-          <a:effectLst/>
-        </p:spPr>
-        <p:style>
-          <a:lnRef idx="1">
-            <a:schemeClr val="accent1"/>
-          </a:lnRef>
-          <a:fillRef idx="3">
-            <a:schemeClr val="accent1"/>
-          </a:fillRef>
-          <a:effectRef idx="2">
-            <a:schemeClr val="accent1"/>
-          </a:effectRef>
-          <a:fontRef idx="minor">
-            <a:schemeClr val="lt1"/>
-          </a:fontRef>
-        </p:style>
-        <p:txBody>
-          <a:bodyPr rtlCol="0" anchor="ctr" lIns="0" rIns="0" tIns="0" bIns="0"/>
-          <a:lstStyle/>
-          <a:p>
-            <a:pPr algn="ctr"/>
-            <a:r>
-              <a:rPr sz="1500" b="1">
-                <a:solidFill>
-                  <a:srgbClr val="202122"/>
-                </a:solidFill>
-                <a:latin typeface="Calibri"/>
-              </a:rPr>
-              <a:t>6</a:t>
-            </a:r>
-          </a:p>
-        </p:txBody>
-      </p:sp>
-      <p:sp>
-        <p:nvSpPr>
-          <p:cNvPr id="28" name="TextBox 27"/>
-          <p:cNvSpPr txBox="1"/>
-          <p:nvPr/>
-        </p:nvSpPr>
-        <p:spPr>
-          <a:xfrm>
-            <a:off x="8950756" y="4224528"/>
-            <a:ext cx="2509418" cy="512064"/>
-          </a:xfrm>
-          <a:prstGeom prst="rect">
-            <a:avLst/>
-          </a:prstGeom>
-          <a:noFill/>
-        </p:spPr>
-        <p:txBody>
-          <a:bodyPr wrap="square" anchor="ctr" lIns="0" rIns="0" tIns="0" bIns="0"/>
-          <a:lstStyle/>
-          <a:p>
-            <a:pPr algn="l"/>
-            <a:r>
-              <a:rPr sz="1600" b="1" i="0">
-                <a:solidFill>
-                  <a:srgbClr val="03306E"/>
-                </a:solidFill>
-                <a:latin typeface="Calibri"/>
-              </a:rPr>
-              <a:t>PPE 2018 and Asbestos 2012</a:t>
-            </a:r>
-          </a:p>
-        </p:txBody>
-      </p:sp>
-      <p:sp>
-        <p:nvSpPr>
-          <p:cNvPr id="29" name="TextBox 28"/>
-          <p:cNvSpPr txBox="1"/>
-          <p:nvPr/>
-        </p:nvSpPr>
-        <p:spPr>
-          <a:xfrm>
-            <a:off x="8356396" y="4892040"/>
-            <a:ext cx="3058058" cy="1143000"/>
-          </a:xfrm>
-          <a:prstGeom prst="rect">
-            <a:avLst/>
-          </a:prstGeom>
-          <a:noFill/>
-        </p:spPr>
-        <p:txBody>
-          <a:bodyPr wrap="square" anchor="t" lIns="0" rIns="0" tIns="0" bIns="0"/>
-          <a:lstStyle/>
-          <a:p>
-            <a:pPr algn="l"/>
-            <a:r>
-              <a:rPr sz="2000" b="0" i="0">
-                <a:solidFill>
-                  <a:srgbClr val="202122"/>
-                </a:solidFill>
-                <a:latin typeface="Calibri"/>
-              </a:rPr>
-              <a:t>Protective equipment; control of asbestos.</a:t>
-            </a:r>
-          </a:p>
-        </p:txBody>
-      </p:sp>
-    </p:spTree>
-  </p:cSld>
-  <p:clrMapOvr>
-    <a:masterClrMapping/>
-  </p:clrMapOvr>
-</p:sld>
-</file>
-
-<file path=ppt/slides/slide6.xml><?xml version="1.0" encoding="utf-8"?>
-<p:sld xmlns:a="http://schemas.openxmlformats.org/drawingml/2006/main" xmlns:p="http://schemas.openxmlformats.org/presentationml/2006/main" xmlns:r="http://schemas.openxmlformats.org/officeDocument/2006/relationships">
-  <p:cSld>
-    <p:bg>
-      <p:bgPr>
-        <a:solidFill>
-          <a:srgbClr val="FFFFFF"/>
-        </a:solidFill>
-        <a:effectLst/>
-      </p:bgPr>
-    </p:bg>
-    <p:spTree>
-      <p:nvGrpSpPr>
-        <p:cNvPr id="1" name=""/>
-        <p:cNvGrpSpPr/>
-        <p:nvPr/>
-      </p:nvGrpSpPr>
-      <p:grpSpPr/>
-      <p:sp>
-        <p:nvSpPr>
-          <p:cNvPr id="2" name="TextBox 1"/>
-          <p:cNvSpPr txBox="1"/>
-          <p:nvPr/>
-        </p:nvSpPr>
-        <p:spPr>
-          <a:xfrm>
-            <a:off x="548640" y="320040"/>
-            <a:ext cx="11094415" cy="274320"/>
-          </a:xfrm>
-          <a:prstGeom prst="rect">
-            <a:avLst/>
-          </a:prstGeom>
-          <a:noFill/>
-        </p:spPr>
-        <p:txBody>
-          <a:bodyPr wrap="square" anchor="t" lIns="0" rIns="0" tIns="0" bIns="0"/>
-          <a:lstStyle/>
-          <a:p>
-            <a:pPr algn="l"/>
-            <a:r>
-              <a:rPr sz="1100" b="1" i="0">
-                <a:solidFill>
-                  <a:srgbClr val="54595D"/>
-                </a:solidFill>
-                <a:latin typeface="Calibri"/>
-              </a:rPr>
-              <a:t>NETWORK CABLING  ·  Network Cabling Content Area 2</a:t>
-            </a:r>
-          </a:p>
-        </p:txBody>
-      </p:sp>
-      <p:sp>
-        <p:nvSpPr>
-          <p:cNvPr id="3" name="TextBox 2"/>
-          <p:cNvSpPr txBox="1"/>
-          <p:nvPr/>
-        </p:nvSpPr>
-        <p:spPr>
-          <a:xfrm>
-            <a:off x="548640" y="566928"/>
-            <a:ext cx="11094415" cy="822960"/>
-          </a:xfrm>
-          <a:prstGeom prst="rect">
-            <a:avLst/>
-          </a:prstGeom>
-          <a:noFill/>
-        </p:spPr>
-        <p:txBody>
-          <a:bodyPr wrap="square" anchor="ctr" lIns="0" rIns="0" tIns="0" bIns="0"/>
-          <a:lstStyle/>
-          <a:p>
-            <a:pPr algn="l"/>
-            <a:r>
-              <a:rPr sz="3200" b="1" i="0">
-                <a:solidFill>
-                  <a:srgbClr val="03306E"/>
-                </a:solidFill>
-                <a:latin typeface="Cambria"/>
-              </a:rPr>
-              <a:t>If you suspect asbestos</a:t>
-            </a:r>
-          </a:p>
-        </p:txBody>
-      </p:sp>
-      <p:sp>
-        <p:nvSpPr>
-          <p:cNvPr id="4" name="TextBox 3"/>
-          <p:cNvSpPr txBox="1"/>
-          <p:nvPr/>
-        </p:nvSpPr>
-        <p:spPr>
-          <a:xfrm>
-            <a:off x="548640" y="6446520"/>
-            <a:ext cx="8229600" cy="274320"/>
-          </a:xfrm>
-          <a:prstGeom prst="rect">
-            <a:avLst/>
-          </a:prstGeom>
-          <a:noFill/>
-        </p:spPr>
-        <p:txBody>
-          <a:bodyPr wrap="square" anchor="t" lIns="0" rIns="0" tIns="0" bIns="0"/>
-          <a:lstStyle/>
-          <a:p>
-            <a:pPr algn="l"/>
-            <a:r>
-              <a:rPr sz="1000" b="0" i="0">
-                <a:solidFill>
-                  <a:srgbClr val="54595D"/>
-                </a:solidFill>
-                <a:latin typeface="Calibri"/>
-              </a:rPr>
-              <a:t>Digital Support and Security T Level  ·  Health, Safety and Compliance for Cabling</a:t>
-            </a:r>
-          </a:p>
-        </p:txBody>
-      </p:sp>
-      <p:sp>
-        <p:nvSpPr>
-          <p:cNvPr id="5" name="TextBox 4"/>
-          <p:cNvSpPr txBox="1"/>
-          <p:nvPr/>
-        </p:nvSpPr>
-        <p:spPr>
-          <a:xfrm>
-            <a:off x="10728655" y="6446520"/>
-            <a:ext cx="914400" cy="274320"/>
-          </a:xfrm>
-          <a:prstGeom prst="rect">
-            <a:avLst/>
-          </a:prstGeom>
-          <a:noFill/>
-        </p:spPr>
-        <p:txBody>
-          <a:bodyPr wrap="square" anchor="t" lIns="0" rIns="0" tIns="0" bIns="0"/>
-          <a:lstStyle/>
-          <a:p>
-            <a:pPr algn="r"/>
-            <a:r>
-              <a:rPr sz="1000" b="0" i="0">
-                <a:solidFill>
-                  <a:srgbClr val="54595D"/>
-                </a:solidFill>
-                <a:latin typeface="Calibri"/>
-              </a:rPr>
-              <a:t>6</a:t>
-            </a:r>
-          </a:p>
-        </p:txBody>
-      </p:sp>
-      <p:sp>
-        <p:nvSpPr>
-          <p:cNvPr id="6" name="Rectangle 5"/>
-          <p:cNvSpPr/>
-          <p:nvPr/>
-        </p:nvSpPr>
-        <p:spPr>
-          <a:xfrm>
-            <a:off x="1603217" y="2793492"/>
-            <a:ext cx="8985260" cy="36576"/>
-          </a:xfrm>
-          <a:prstGeom prst="rect">
-            <a:avLst/>
-          </a:prstGeom>
-          <a:solidFill>
-            <a:srgbClr val="A9C8F0"/>
-          </a:solidFill>
-          <a:ln>
-            <a:noFill/>
-          </a:ln>
-          <a:effectLst/>
-        </p:spPr>
-        <p:style>
-          <a:lnRef idx="1">
-            <a:schemeClr val="accent1"/>
-          </a:lnRef>
-          <a:fillRef idx="3">
-            <a:schemeClr val="accent1"/>
-          </a:fillRef>
-          <a:effectRef idx="2">
-            <a:schemeClr val="accent1"/>
-          </a:effectRef>
-          <a:fontRef idx="minor">
-            <a:schemeClr val="lt1"/>
-          </a:fontRef>
-        </p:style>
-        <p:txBody>
-          <a:bodyPr rtlCol="0" anchor="ctr"/>
-          <a:lstStyle/>
-          <a:p/>
-        </p:txBody>
-      </p:sp>
-      <p:sp>
-        <p:nvSpPr>
-          <p:cNvPr id="7" name="Oval 6"/>
-          <p:cNvSpPr/>
-          <p:nvPr/>
-        </p:nvSpPr>
-        <p:spPr>
-          <a:xfrm>
-            <a:off x="1283177" y="2491740"/>
-            <a:ext cx="640080" cy="640080"/>
-          </a:xfrm>
-          <a:prstGeom prst="ellipse">
-            <a:avLst/>
-          </a:prstGeom>
-          <a:solidFill>
-            <a:srgbClr val="F2B705"/>
-          </a:solidFill>
-          <a:ln>
-            <a:noFill/>
-          </a:ln>
-          <a:effectLst/>
-        </p:spPr>
-        <p:style>
-          <a:lnRef idx="1">
-            <a:schemeClr val="accent1"/>
-          </a:lnRef>
-          <a:fillRef idx="3">
-            <a:schemeClr val="accent1"/>
-          </a:fillRef>
-          <a:effectRef idx="2">
-            <a:schemeClr val="accent1"/>
-          </a:effectRef>
-          <a:fontRef idx="minor">
-            <a:schemeClr val="lt1"/>
-          </a:fontRef>
-        </p:style>
-        <p:txBody>
-          <a:bodyPr rtlCol="0" anchor="ctr" lIns="0" rIns="0" tIns="0" bIns="0"/>
-          <a:lstStyle/>
-          <a:p>
-            <a:pPr algn="ctr"/>
-            <a:r>
-              <a:rPr sz="2000" b="1">
-                <a:solidFill>
-                  <a:srgbClr val="202122"/>
-                </a:solidFill>
-                <a:latin typeface="Calibri"/>
-              </a:rPr>
-              <a:t>1</a:t>
-            </a:r>
-          </a:p>
-        </p:txBody>
-      </p:sp>
-      <p:sp>
-        <p:nvSpPr>
-          <p:cNvPr id="8" name="TextBox 7"/>
-          <p:cNvSpPr txBox="1"/>
-          <p:nvPr/>
-        </p:nvSpPr>
-        <p:spPr>
-          <a:xfrm>
-            <a:off x="548640" y="3268979"/>
-            <a:ext cx="2109155" cy="731520"/>
-          </a:xfrm>
-          <a:prstGeom prst="rect">
-            <a:avLst/>
-          </a:prstGeom>
-          <a:noFill/>
-        </p:spPr>
-        <p:txBody>
-          <a:bodyPr wrap="square" anchor="t" lIns="0" rIns="0" tIns="0" bIns="0"/>
-          <a:lstStyle/>
-          <a:p>
-            <a:pPr algn="ctr"/>
-            <a:r>
-              <a:rPr sz="1700" b="1" i="0">
-                <a:solidFill>
-                  <a:srgbClr val="03306E"/>
-                </a:solidFill>
-                <a:latin typeface="Calibri"/>
-              </a:rPr>
-              <a:t>Stop</a:t>
-            </a:r>
-          </a:p>
-        </p:txBody>
-      </p:sp>
-      <p:sp>
-        <p:nvSpPr>
-          <p:cNvPr id="9" name="Rounded Rectangle 8"/>
-          <p:cNvSpPr/>
-          <p:nvPr/>
-        </p:nvSpPr>
-        <p:spPr>
-          <a:xfrm>
-            <a:off x="548640" y="4046220"/>
-            <a:ext cx="2109155" cy="1234439"/>
-          </a:xfrm>
-          <a:prstGeom prst="roundRect">
-            <a:avLst>
-              <a:gd name="adj" fmla="val 6000"/>
-            </a:avLst>
-          </a:prstGeom>
-          <a:solidFill>
-            <a:srgbClr val="EAF3FF"/>
-          </a:solidFill>
-          <a:ln>
-            <a:noFill/>
-          </a:ln>
-          <a:effectLst/>
-        </p:spPr>
-        <p:style>
-          <a:lnRef idx="1">
-            <a:schemeClr val="accent1"/>
-          </a:lnRef>
-          <a:fillRef idx="3">
-            <a:schemeClr val="accent1"/>
-          </a:fillRef>
-          <a:effectRef idx="2">
-            <a:schemeClr val="accent1"/>
-          </a:effectRef>
-          <a:fontRef idx="minor">
-            <a:schemeClr val="lt1"/>
-          </a:fontRef>
-        </p:style>
-        <p:txBody>
-          <a:bodyPr rtlCol="0" anchor="ctr"/>
-          <a:lstStyle/>
-          <a:p/>
-        </p:txBody>
-      </p:sp>
-      <p:sp>
-        <p:nvSpPr>
-          <p:cNvPr id="10" name="TextBox 9"/>
-          <p:cNvSpPr txBox="1"/>
-          <p:nvPr/>
-        </p:nvSpPr>
-        <p:spPr>
-          <a:xfrm>
-            <a:off x="685800" y="4183380"/>
-            <a:ext cx="1834835" cy="960119"/>
-          </a:xfrm>
-          <a:prstGeom prst="rect">
-            <a:avLst/>
-          </a:prstGeom>
-          <a:noFill/>
-        </p:spPr>
-        <p:txBody>
-          <a:bodyPr wrap="square" anchor="t" lIns="0" rIns="0" tIns="0" bIns="0"/>
-          <a:lstStyle/>
-          <a:p>
-            <a:pPr algn="l"/>
-            <a:r>
-              <a:rPr sz="1800" b="0" i="0">
-                <a:solidFill>
-                  <a:srgbClr val="202122"/>
-                </a:solidFill>
-                <a:latin typeface="Calibri"/>
-              </a:rPr>
-              <a:t>Stop work immediately.</a:t>
-            </a:r>
-          </a:p>
-        </p:txBody>
-      </p:sp>
-      <p:sp>
-        <p:nvSpPr>
-          <p:cNvPr id="11" name="Oval 10"/>
-          <p:cNvSpPr/>
-          <p:nvPr/>
-        </p:nvSpPr>
-        <p:spPr>
-          <a:xfrm>
-            <a:off x="3529492" y="2491740"/>
-            <a:ext cx="640080" cy="640080"/>
-          </a:xfrm>
-          <a:prstGeom prst="ellipse">
-            <a:avLst/>
-          </a:prstGeom>
-          <a:solidFill>
-            <a:srgbClr val="F2B705"/>
-          </a:solidFill>
-          <a:ln>
-            <a:noFill/>
-          </a:ln>
-          <a:effectLst/>
-        </p:spPr>
-        <p:style>
-          <a:lnRef idx="1">
-            <a:schemeClr val="accent1"/>
-          </a:lnRef>
-          <a:fillRef idx="3">
-            <a:schemeClr val="accent1"/>
-          </a:fillRef>
-          <a:effectRef idx="2">
-            <a:schemeClr val="accent1"/>
-          </a:effectRef>
-          <a:fontRef idx="minor">
-            <a:schemeClr val="lt1"/>
-          </a:fontRef>
-        </p:style>
-        <p:txBody>
-          <a:bodyPr rtlCol="0" anchor="ctr" lIns="0" rIns="0" tIns="0" bIns="0"/>
-          <a:lstStyle/>
-          <a:p>
-            <a:pPr algn="ctr"/>
-            <a:r>
-              <a:rPr sz="2000" b="1">
-                <a:solidFill>
-                  <a:srgbClr val="202122"/>
-                </a:solidFill>
-                <a:latin typeface="Calibri"/>
-              </a:rPr>
-              <a:t>2</a:t>
-            </a:r>
-          </a:p>
-        </p:txBody>
-      </p:sp>
-      <p:sp>
-        <p:nvSpPr>
-          <p:cNvPr id="12" name="TextBox 11"/>
-          <p:cNvSpPr txBox="1"/>
-          <p:nvPr/>
-        </p:nvSpPr>
-        <p:spPr>
-          <a:xfrm>
-            <a:off x="2794955" y="3268979"/>
-            <a:ext cx="2109155" cy="731520"/>
-          </a:xfrm>
-          <a:prstGeom prst="rect">
-            <a:avLst/>
-          </a:prstGeom>
-          <a:noFill/>
-        </p:spPr>
-        <p:txBody>
-          <a:bodyPr wrap="square" anchor="t" lIns="0" rIns="0" tIns="0" bIns="0"/>
-          <a:lstStyle/>
-          <a:p>
-            <a:pPr algn="ctr"/>
-            <a:r>
-              <a:rPr sz="1700" b="1" i="0">
-                <a:solidFill>
-                  <a:srgbClr val="03306E"/>
-                </a:solidFill>
-                <a:latin typeface="Calibri"/>
-              </a:rPr>
-              <a:t>Inform</a:t>
-            </a:r>
-          </a:p>
-        </p:txBody>
-      </p:sp>
-      <p:sp>
-        <p:nvSpPr>
-          <p:cNvPr id="13" name="Rounded Rectangle 12"/>
-          <p:cNvSpPr/>
-          <p:nvPr/>
-        </p:nvSpPr>
-        <p:spPr>
-          <a:xfrm>
-            <a:off x="2794955" y="4046220"/>
-            <a:ext cx="2109155" cy="1234439"/>
-          </a:xfrm>
-          <a:prstGeom prst="roundRect">
-            <a:avLst>
-              <a:gd name="adj" fmla="val 6000"/>
-            </a:avLst>
-          </a:prstGeom>
-          <a:solidFill>
-            <a:srgbClr val="EAF3FF"/>
-          </a:solidFill>
-          <a:ln>
-            <a:noFill/>
-          </a:ln>
-          <a:effectLst/>
-        </p:spPr>
-        <p:style>
-          <a:lnRef idx="1">
-            <a:schemeClr val="accent1"/>
-          </a:lnRef>
-          <a:fillRef idx="3">
-            <a:schemeClr val="accent1"/>
-          </a:fillRef>
-          <a:effectRef idx="2">
-            <a:schemeClr val="accent1"/>
-          </a:effectRef>
-          <a:fontRef idx="minor">
-            <a:schemeClr val="lt1"/>
-          </a:fontRef>
-        </p:style>
-        <p:txBody>
-          <a:bodyPr rtlCol="0" anchor="ctr"/>
-          <a:lstStyle/>
-          <a:p/>
-        </p:txBody>
-      </p:sp>
-      <p:sp>
-        <p:nvSpPr>
-          <p:cNvPr id="14" name="TextBox 13"/>
-          <p:cNvSpPr txBox="1"/>
-          <p:nvPr/>
-        </p:nvSpPr>
-        <p:spPr>
-          <a:xfrm>
-            <a:off x="2932115" y="4183380"/>
-            <a:ext cx="1834835" cy="960119"/>
-          </a:xfrm>
-          <a:prstGeom prst="rect">
-            <a:avLst/>
-          </a:prstGeom>
-          <a:noFill/>
-        </p:spPr>
-        <p:txBody>
-          <a:bodyPr wrap="square" anchor="t" lIns="0" rIns="0" tIns="0" bIns="0"/>
-          <a:lstStyle/>
-          <a:p>
-            <a:pPr algn="l"/>
-            <a:r>
-              <a:rPr sz="1800" b="0" i="0">
-                <a:solidFill>
-                  <a:srgbClr val="202122"/>
-                </a:solidFill>
-                <a:latin typeface="Calibri"/>
-              </a:rPr>
-              <a:t>Tell the relevant people.</a:t>
-            </a:r>
-          </a:p>
-        </p:txBody>
-      </p:sp>
-      <p:sp>
-        <p:nvSpPr>
-          <p:cNvPr id="15" name="Oval 14"/>
-          <p:cNvSpPr/>
-          <p:nvPr/>
-        </p:nvSpPr>
-        <p:spPr>
-          <a:xfrm>
-            <a:off x="5775807" y="2491740"/>
-            <a:ext cx="640080" cy="640080"/>
-          </a:xfrm>
-          <a:prstGeom prst="ellipse">
-            <a:avLst/>
-          </a:prstGeom>
-          <a:solidFill>
-            <a:srgbClr val="F2B705"/>
-          </a:solidFill>
-          <a:ln>
-            <a:noFill/>
-          </a:ln>
-          <a:effectLst/>
-        </p:spPr>
-        <p:style>
-          <a:lnRef idx="1">
-            <a:schemeClr val="accent1"/>
-          </a:lnRef>
-          <a:fillRef idx="3">
-            <a:schemeClr val="accent1"/>
-          </a:fillRef>
-          <a:effectRef idx="2">
-            <a:schemeClr val="accent1"/>
-          </a:effectRef>
-          <a:fontRef idx="minor">
-            <a:schemeClr val="lt1"/>
-          </a:fontRef>
-        </p:style>
-        <p:txBody>
-          <a:bodyPr rtlCol="0" anchor="ctr" lIns="0" rIns="0" tIns="0" bIns="0"/>
-          <a:lstStyle/>
-          <a:p>
-            <a:pPr algn="ctr"/>
-            <a:r>
-              <a:rPr sz="2000" b="1">
-                <a:solidFill>
-                  <a:srgbClr val="202122"/>
-                </a:solidFill>
-                <a:latin typeface="Calibri"/>
-              </a:rPr>
-              <a:t>3</a:t>
-            </a:r>
-          </a:p>
-        </p:txBody>
-      </p:sp>
-      <p:sp>
-        <p:nvSpPr>
-          <p:cNvPr id="16" name="TextBox 15"/>
-          <p:cNvSpPr txBox="1"/>
-          <p:nvPr/>
-        </p:nvSpPr>
-        <p:spPr>
-          <a:xfrm>
-            <a:off x="5041270" y="3268979"/>
-            <a:ext cx="2109155" cy="731520"/>
-          </a:xfrm>
-          <a:prstGeom prst="rect">
-            <a:avLst/>
-          </a:prstGeom>
-          <a:noFill/>
-        </p:spPr>
-        <p:txBody>
-          <a:bodyPr wrap="square" anchor="t" lIns="0" rIns="0" tIns="0" bIns="0"/>
-          <a:lstStyle/>
-          <a:p>
-            <a:pPr algn="ctr"/>
-            <a:r>
-              <a:rPr sz="1700" b="1" i="0">
-                <a:solidFill>
-                  <a:srgbClr val="03306E"/>
-                </a:solidFill>
-                <a:latin typeface="Calibri"/>
-              </a:rPr>
-              <a:t>Isolate</a:t>
-            </a:r>
-          </a:p>
-        </p:txBody>
-      </p:sp>
-      <p:sp>
-        <p:nvSpPr>
-          <p:cNvPr id="17" name="Rounded Rectangle 16"/>
-          <p:cNvSpPr/>
-          <p:nvPr/>
-        </p:nvSpPr>
-        <p:spPr>
-          <a:xfrm>
-            <a:off x="5041270" y="4046220"/>
-            <a:ext cx="2109155" cy="1234439"/>
-          </a:xfrm>
-          <a:prstGeom prst="roundRect">
-            <a:avLst>
-              <a:gd name="adj" fmla="val 6000"/>
-            </a:avLst>
-          </a:prstGeom>
-          <a:solidFill>
-            <a:srgbClr val="EAF3FF"/>
-          </a:solidFill>
-          <a:ln>
-            <a:noFill/>
-          </a:ln>
-          <a:effectLst/>
-        </p:spPr>
-        <p:style>
-          <a:lnRef idx="1">
-            <a:schemeClr val="accent1"/>
-          </a:lnRef>
-          <a:fillRef idx="3">
-            <a:schemeClr val="accent1"/>
-          </a:fillRef>
-          <a:effectRef idx="2">
-            <a:schemeClr val="accent1"/>
-          </a:effectRef>
-          <a:fontRef idx="minor">
-            <a:schemeClr val="lt1"/>
-          </a:fontRef>
-        </p:style>
-        <p:txBody>
-          <a:bodyPr rtlCol="0" anchor="ctr"/>
-          <a:lstStyle/>
-          <a:p/>
-        </p:txBody>
-      </p:sp>
-      <p:sp>
-        <p:nvSpPr>
-          <p:cNvPr id="18" name="TextBox 17"/>
-          <p:cNvSpPr txBox="1"/>
-          <p:nvPr/>
-        </p:nvSpPr>
-        <p:spPr>
-          <a:xfrm>
-            <a:off x="5178430" y="4183380"/>
-            <a:ext cx="1834835" cy="960119"/>
-          </a:xfrm>
-          <a:prstGeom prst="rect">
-            <a:avLst/>
-          </a:prstGeom>
-          <a:noFill/>
-        </p:spPr>
-        <p:txBody>
-          <a:bodyPr wrap="square" anchor="t" lIns="0" rIns="0" tIns="0" bIns="0"/>
-          <a:lstStyle/>
-          <a:p>
-            <a:pPr algn="l"/>
-            <a:r>
-              <a:rPr sz="1800" b="0" i="0">
-                <a:solidFill>
-                  <a:srgbClr val="202122"/>
-                </a:solidFill>
-                <a:latin typeface="Calibri"/>
-              </a:rPr>
-              <a:t>Restrict access to the area.</a:t>
-            </a:r>
-          </a:p>
-        </p:txBody>
-      </p:sp>
-      <p:sp>
-        <p:nvSpPr>
-          <p:cNvPr id="19" name="Oval 18"/>
-          <p:cNvSpPr/>
-          <p:nvPr/>
-        </p:nvSpPr>
-        <p:spPr>
-          <a:xfrm>
-            <a:off x="8022122" y="2491740"/>
-            <a:ext cx="640080" cy="640080"/>
-          </a:xfrm>
-          <a:prstGeom prst="ellipse">
-            <a:avLst/>
-          </a:prstGeom>
-          <a:solidFill>
-            <a:srgbClr val="F2B705"/>
-          </a:solidFill>
-          <a:ln>
-            <a:noFill/>
-          </a:ln>
-          <a:effectLst/>
-        </p:spPr>
-        <p:style>
-          <a:lnRef idx="1">
-            <a:schemeClr val="accent1"/>
-          </a:lnRef>
-          <a:fillRef idx="3">
-            <a:schemeClr val="accent1"/>
-          </a:fillRef>
-          <a:effectRef idx="2">
-            <a:schemeClr val="accent1"/>
-          </a:effectRef>
-          <a:fontRef idx="minor">
-            <a:schemeClr val="lt1"/>
-          </a:fontRef>
-        </p:style>
-        <p:txBody>
-          <a:bodyPr rtlCol="0" anchor="ctr" lIns="0" rIns="0" tIns="0" bIns="0"/>
-          <a:lstStyle/>
-          <a:p>
-            <a:pPr algn="ctr"/>
-            <a:r>
-              <a:rPr sz="2000" b="1">
-                <a:solidFill>
-                  <a:srgbClr val="202122"/>
-                </a:solidFill>
-                <a:latin typeface="Calibri"/>
-              </a:rPr>
-              <a:t>4</a:t>
-            </a:r>
-          </a:p>
-        </p:txBody>
-      </p:sp>
-      <p:sp>
-        <p:nvSpPr>
-          <p:cNvPr id="20" name="TextBox 19"/>
-          <p:cNvSpPr txBox="1"/>
-          <p:nvPr/>
-        </p:nvSpPr>
-        <p:spPr>
-          <a:xfrm>
-            <a:off x="7287585" y="3268979"/>
-            <a:ext cx="2109155" cy="731520"/>
-          </a:xfrm>
-          <a:prstGeom prst="rect">
-            <a:avLst/>
-          </a:prstGeom>
-          <a:noFill/>
-        </p:spPr>
-        <p:txBody>
-          <a:bodyPr wrap="square" anchor="t" lIns="0" rIns="0" tIns="0" bIns="0"/>
-          <a:lstStyle/>
-          <a:p>
-            <a:pPr algn="ctr"/>
-            <a:r>
-              <a:rPr sz="1700" b="1" i="0">
-                <a:solidFill>
-                  <a:srgbClr val="03306E"/>
-                </a:solidFill>
-                <a:latin typeface="Calibri"/>
-              </a:rPr>
-              <a:t>Investigate</a:t>
-            </a:r>
-          </a:p>
-        </p:txBody>
-      </p:sp>
-      <p:sp>
-        <p:nvSpPr>
-          <p:cNvPr id="21" name="Rounded Rectangle 20"/>
-          <p:cNvSpPr/>
-          <p:nvPr/>
-        </p:nvSpPr>
-        <p:spPr>
-          <a:xfrm>
-            <a:off x="7287585" y="4046220"/>
-            <a:ext cx="2109155" cy="1234439"/>
-          </a:xfrm>
-          <a:prstGeom prst="roundRect">
-            <a:avLst>
-              <a:gd name="adj" fmla="val 6000"/>
-            </a:avLst>
-          </a:prstGeom>
-          <a:solidFill>
-            <a:srgbClr val="EAF3FF"/>
-          </a:solidFill>
-          <a:ln>
-            <a:noFill/>
-          </a:ln>
-          <a:effectLst/>
-        </p:spPr>
-        <p:style>
-          <a:lnRef idx="1">
-            <a:schemeClr val="accent1"/>
-          </a:lnRef>
-          <a:fillRef idx="3">
-            <a:schemeClr val="accent1"/>
-          </a:fillRef>
-          <a:effectRef idx="2">
-            <a:schemeClr val="accent1"/>
-          </a:effectRef>
-          <a:fontRef idx="minor">
-            <a:schemeClr val="lt1"/>
-          </a:fontRef>
-        </p:style>
-        <p:txBody>
-          <a:bodyPr rtlCol="0" anchor="ctr"/>
-          <a:lstStyle/>
-          <a:p/>
-        </p:txBody>
-      </p:sp>
-      <p:sp>
-        <p:nvSpPr>
-          <p:cNvPr id="22" name="TextBox 21"/>
-          <p:cNvSpPr txBox="1"/>
-          <p:nvPr/>
-        </p:nvSpPr>
-        <p:spPr>
-          <a:xfrm>
-            <a:off x="7424745" y="4183380"/>
-            <a:ext cx="1834835" cy="960119"/>
-          </a:xfrm>
-          <a:prstGeom prst="rect">
-            <a:avLst/>
-          </a:prstGeom>
-          <a:noFill/>
-        </p:spPr>
-        <p:txBody>
-          <a:bodyPr wrap="square" anchor="t" lIns="0" rIns="0" tIns="0" bIns="0"/>
-          <a:lstStyle/>
-          <a:p>
-            <a:pPr algn="l"/>
-            <a:r>
-              <a:rPr sz="1800" b="0" i="0">
-                <a:solidFill>
-                  <a:srgbClr val="202122"/>
-                </a:solidFill>
-                <a:latin typeface="Calibri"/>
-              </a:rPr>
-              <a:t>Use an asbestos-registered professional.</a:t>
-            </a:r>
-          </a:p>
-        </p:txBody>
-      </p:sp>
-      <p:sp>
-        <p:nvSpPr>
-          <p:cNvPr id="23" name="Oval 22"/>
-          <p:cNvSpPr/>
-          <p:nvPr/>
-        </p:nvSpPr>
-        <p:spPr>
-          <a:xfrm>
-            <a:off x="10268437" y="2491740"/>
-            <a:ext cx="640080" cy="640080"/>
-          </a:xfrm>
-          <a:prstGeom prst="ellipse">
-            <a:avLst/>
-          </a:prstGeom>
-          <a:solidFill>
-            <a:srgbClr val="F2B705"/>
-          </a:solidFill>
-          <a:ln>
-            <a:noFill/>
-          </a:ln>
-          <a:effectLst/>
-        </p:spPr>
-        <p:style>
-          <a:lnRef idx="1">
-            <a:schemeClr val="accent1"/>
-          </a:lnRef>
-          <a:fillRef idx="3">
-            <a:schemeClr val="accent1"/>
-          </a:fillRef>
-          <a:effectRef idx="2">
-            <a:schemeClr val="accent1"/>
-          </a:effectRef>
-          <a:fontRef idx="minor">
-            <a:schemeClr val="lt1"/>
-          </a:fontRef>
-        </p:style>
-        <p:txBody>
-          <a:bodyPr rtlCol="0" anchor="ctr" lIns="0" rIns="0" tIns="0" bIns="0"/>
-          <a:lstStyle/>
-          <a:p>
-            <a:pPr algn="ctr"/>
-            <a:r>
-              <a:rPr sz="2000" b="1">
-                <a:solidFill>
-                  <a:srgbClr val="202122"/>
-                </a:solidFill>
-                <a:latin typeface="Calibri"/>
-              </a:rPr>
-              <a:t>5</a:t>
-            </a:r>
-          </a:p>
-        </p:txBody>
-      </p:sp>
-      <p:sp>
-        <p:nvSpPr>
-          <p:cNvPr id="24" name="TextBox 23"/>
-          <p:cNvSpPr txBox="1"/>
-          <p:nvPr/>
-        </p:nvSpPr>
-        <p:spPr>
-          <a:xfrm>
-            <a:off x="9533900" y="3268979"/>
-            <a:ext cx="2109155" cy="731520"/>
-          </a:xfrm>
-          <a:prstGeom prst="rect">
-            <a:avLst/>
-          </a:prstGeom>
-          <a:noFill/>
-        </p:spPr>
-        <p:txBody>
-          <a:bodyPr wrap="square" anchor="t" lIns="0" rIns="0" tIns="0" bIns="0"/>
-          <a:lstStyle/>
-          <a:p>
-            <a:pPr algn="ctr"/>
-            <a:r>
-              <a:rPr sz="1700" b="1" i="0">
-                <a:solidFill>
-                  <a:srgbClr val="03306E"/>
-                </a:solidFill>
-                <a:latin typeface="Calibri"/>
-              </a:rPr>
-              <a:t>Act</a:t>
-            </a:r>
-          </a:p>
-        </p:txBody>
-      </p:sp>
-      <p:sp>
-        <p:nvSpPr>
-          <p:cNvPr id="25" name="Rounded Rectangle 24"/>
-          <p:cNvSpPr/>
-          <p:nvPr/>
-        </p:nvSpPr>
-        <p:spPr>
-          <a:xfrm>
-            <a:off x="9533900" y="4046220"/>
-            <a:ext cx="2109155" cy="1234439"/>
-          </a:xfrm>
-          <a:prstGeom prst="roundRect">
-            <a:avLst>
-              <a:gd name="adj" fmla="val 6000"/>
-            </a:avLst>
-          </a:prstGeom>
-          <a:solidFill>
-            <a:srgbClr val="EAF3FF"/>
-          </a:solidFill>
-          <a:ln>
-            <a:noFill/>
-          </a:ln>
-          <a:effectLst/>
-        </p:spPr>
-        <p:style>
-          <a:lnRef idx="1">
-            <a:schemeClr val="accent1"/>
-          </a:lnRef>
-          <a:fillRef idx="3">
-            <a:schemeClr val="accent1"/>
-          </a:fillRef>
-          <a:effectRef idx="2">
-            <a:schemeClr val="accent1"/>
-          </a:effectRef>
-          <a:fontRef idx="minor">
-            <a:schemeClr val="lt1"/>
-          </a:fontRef>
-        </p:style>
-        <p:txBody>
-          <a:bodyPr rtlCol="0" anchor="ctr"/>
-          <a:lstStyle/>
-          <a:p/>
-        </p:txBody>
-      </p:sp>
-      <p:sp>
-        <p:nvSpPr>
-          <p:cNvPr id="26" name="TextBox 25"/>
-          <p:cNvSpPr txBox="1"/>
-          <p:nvPr/>
-        </p:nvSpPr>
-        <p:spPr>
-          <a:xfrm>
-            <a:off x="9671060" y="4183380"/>
-            <a:ext cx="1834835" cy="960119"/>
-          </a:xfrm>
-          <a:prstGeom prst="rect">
-            <a:avLst/>
-          </a:prstGeom>
-          <a:noFill/>
-        </p:spPr>
-        <p:txBody>
-          <a:bodyPr wrap="square" anchor="t" lIns="0" rIns="0" tIns="0" bIns="0"/>
-          <a:lstStyle/>
-          <a:p>
-            <a:pPr algn="l"/>
-            <a:r>
-              <a:rPr sz="1800" b="0" i="0">
-                <a:solidFill>
-                  <a:srgbClr val="202122"/>
-                </a:solidFill>
-                <a:latin typeface="Calibri"/>
-              </a:rPr>
-              <a:t>Removal, sealing or air-quality checks.</a:t>
-            </a:r>
-          </a:p>
-        </p:txBody>
-      </p:sp>
-    </p:spTree>
-  </p:cSld>
-  <p:clrMapOvr>
-    <a:masterClrMapping/>
-  </p:clrMapOvr>
-</p:sld>
-</file>
-
 <file path=ppt/slides/slide7.xml><?xml version="1.0" encoding="utf-8"?>
 <p:sld xmlns:a="http://schemas.openxmlformats.org/drawingml/2006/main" xmlns:p="http://schemas.openxmlformats.org/presentationml/2006/main" xmlns:r="http://schemas.openxmlformats.org/officeDocument/2006/relationships">
   <p:cSld>
@@ -9163,7 +11066,7 @@
                 </a:solidFill>
                 <a:latin typeface="Cambria"/>
               </a:rPr>
-              <a:t>Working at height and in confined spaces</a:t>
+              <a:t>Legislation</a:t>
             </a:r>
           </a:p>
         </p:txBody>
@@ -9243,88 +11146,11 @@
         <p:spPr>
           <a:xfrm>
             <a:off x="548640" y="1600200"/>
-            <a:ext cx="5364327" cy="640080"/>
+            <a:ext cx="3515258" cy="2148840"/>
           </a:xfrm>
           <a:prstGeom prst="roundRect">
             <a:avLst>
-              <a:gd name="adj" fmla="val 15000"/>
-            </a:avLst>
-          </a:prstGeom>
-          <a:solidFill>
-            <a:srgbClr val="03306E"/>
-          </a:solidFill>
-          <a:ln>
-            <a:noFill/>
-          </a:ln>
-          <a:effectLst/>
-        </p:spPr>
-        <p:style>
-          <a:lnRef idx="1">
-            <a:schemeClr val="accent1"/>
-          </a:lnRef>
-          <a:fillRef idx="3">
-            <a:schemeClr val="accent1"/>
-          </a:fillRef>
-          <a:effectRef idx="2">
-            <a:schemeClr val="accent1"/>
-          </a:effectRef>
-          <a:fontRef idx="minor">
-            <a:schemeClr val="lt1"/>
-          </a:fontRef>
-        </p:style>
-        <p:txBody>
-          <a:bodyPr rtlCol="0" anchor="ctr"/>
-          <a:lstStyle/>
-          <a:p/>
-        </p:txBody>
-      </p:sp>
-      <p:sp>
-        <p:nvSpPr>
-          <p:cNvPr id="7" name="TextBox 6"/>
-          <p:cNvSpPr txBox="1"/>
-          <p:nvPr/>
-        </p:nvSpPr>
-        <p:spPr>
-          <a:xfrm>
-            <a:off x="777240" y="1600200"/>
-            <a:ext cx="4907127" cy="640080"/>
-          </a:xfrm>
-          <a:prstGeom prst="rect">
-            <a:avLst/>
-          </a:prstGeom>
-          <a:noFill/>
-        </p:spPr>
-        <p:txBody>
-          <a:bodyPr wrap="square" anchor="ctr" lIns="0" rIns="0" tIns="0" bIns="0"/>
-          <a:lstStyle/>
-          <a:p>
-            <a:pPr algn="l"/>
-            <a:r>
-              <a:rPr sz="2000" b="1" i="0">
-                <a:solidFill>
-                  <a:srgbClr val="FFFFFF"/>
-                </a:solidFill>
-                <a:latin typeface="Calibri"/>
-              </a:rPr>
-              <a:t>At height</a:t>
-            </a:r>
-          </a:p>
-        </p:txBody>
-      </p:sp>
-      <p:sp>
-        <p:nvSpPr>
-          <p:cNvPr id="8" name="Rounded Rectangle 7"/>
-          <p:cNvSpPr/>
-          <p:nvPr/>
-        </p:nvSpPr>
-        <p:spPr>
-          <a:xfrm>
-            <a:off x="548640" y="2377440"/>
-            <a:ext cx="5364327" cy="3794760"/>
-          </a:xfrm>
-          <a:prstGeom prst="roundRect">
-            <a:avLst>
-              <a:gd name="adj" fmla="val 4000"/>
+              <a:gd name="adj" fmla="val 6000"/>
             </a:avLst>
           </a:prstGeom>
           <a:solidFill>
@@ -9357,129 +11183,20 @@
       </p:sp>
       <p:sp>
         <p:nvSpPr>
-          <p:cNvPr id="9" name="TextBox 8"/>
-          <p:cNvSpPr txBox="1"/>
-          <p:nvPr/>
-        </p:nvSpPr>
-        <p:spPr>
-          <a:xfrm>
-            <a:off x="822959" y="2606040"/>
-            <a:ext cx="4815687" cy="3337560"/>
-          </a:xfrm>
-          <a:prstGeom prst="rect">
-            <a:avLst/>
-          </a:prstGeom>
-          <a:noFill/>
-        </p:spPr>
-        <p:txBody>
-          <a:bodyPr wrap="square" lIns="0" rIns="0" tIns="0" bIns="0">
-            <a:spAutoFit/>
-          </a:bodyPr>
-          <a:lstStyle/>
-          <a:p>
-            <a:pPr marL="274320" indent="-274320">
-              <a:spcAft>
-                <a:spcPts val="990"/>
-              </a:spcAft>
-              <a:buClr>
-                <a:srgbClr val="0645AD"/>
-              </a:buClr>
-              <a:buFont typeface="Arial"/>
-              <a:buChar char="•"/>
-            </a:pPr>
-            <a:r>
-              <a:rPr sz="2200" b="0">
-                <a:solidFill>
-                  <a:srgbClr val="202122"/>
-                </a:solidFill>
-                <a:latin typeface="Calibri"/>
-              </a:rPr>
-              <a:t>Risk assess before starting</a:t>
-            </a:r>
-          </a:p>
-          <a:p>
-            <a:pPr marL="274320" indent="-274320">
-              <a:spcAft>
-                <a:spcPts val="990"/>
-              </a:spcAft>
-              <a:buClr>
-                <a:srgbClr val="0645AD"/>
-              </a:buClr>
-              <a:buFont typeface="Arial"/>
-              <a:buChar char="•"/>
-            </a:pPr>
-            <a:r>
-              <a:rPr sz="2200" b="0">
-                <a:solidFill>
-                  <a:srgbClr val="202122"/>
-                </a:solidFill>
-                <a:latin typeface="Calibri"/>
-              </a:rPr>
-              <a:t>Use MEWPs safely</a:t>
-            </a:r>
-          </a:p>
-          <a:p>
-            <a:pPr marL="274320" indent="-274320">
-              <a:spcAft>
-                <a:spcPts val="990"/>
-              </a:spcAft>
-              <a:buClr>
-                <a:srgbClr val="0645AD"/>
-              </a:buClr>
-              <a:buFont typeface="Arial"/>
-              <a:buChar char="•"/>
-            </a:pPr>
-            <a:r>
-              <a:rPr sz="2200" b="0">
-                <a:solidFill>
-                  <a:srgbClr val="202122"/>
-                </a:solidFill>
-                <a:latin typeface="Calibri"/>
-              </a:rPr>
-              <a:t>Assemble, inspect and dismantle towers per the manufacturer</a:t>
-            </a:r>
-          </a:p>
-          <a:p>
-            <a:pPr marL="274320" indent="-274320">
-              <a:spcAft>
-                <a:spcPts val="990"/>
-              </a:spcAft>
-              <a:buClr>
-                <a:srgbClr val="0645AD"/>
-              </a:buClr>
-              <a:buFont typeface="Arial"/>
-              <a:buChar char="•"/>
-            </a:pPr>
-            <a:r>
-              <a:rPr sz="2200" b="0">
-                <a:solidFill>
-                  <a:srgbClr val="202122"/>
-                </a:solidFill>
-                <a:latin typeface="Calibri"/>
-              </a:rPr>
-              <a:t>Record findings</a:t>
-            </a:r>
-          </a:p>
-        </p:txBody>
-      </p:sp>
-      <p:sp>
-        <p:nvSpPr>
-          <p:cNvPr id="10" name="Rounded Rectangle 9"/>
+          <p:cNvPr id="7" name="Oval 6"/>
           <p:cNvSpPr/>
           <p:nvPr/>
         </p:nvSpPr>
         <p:spPr>
           <a:xfrm>
-            <a:off x="6278727" y="1600200"/>
-            <a:ext cx="5364327" cy="640080"/>
-          </a:xfrm>
-          <a:prstGeom prst="roundRect">
-            <a:avLst>
-              <a:gd name="adj" fmla="val 15000"/>
-            </a:avLst>
+            <a:off x="777240" y="1828800"/>
+            <a:ext cx="457200" cy="457200"/>
+          </a:xfrm>
+          <a:prstGeom prst="ellipse">
+            <a:avLst/>
           </a:prstGeom>
           <a:solidFill>
-            <a:srgbClr val="0645AD"/>
+            <a:srgbClr val="F2B705"/>
           </a:solidFill>
           <a:ln>
             <a:noFill/>
@@ -9501,21 +11218,32 @@
           </a:fontRef>
         </p:style>
         <p:txBody>
-          <a:bodyPr rtlCol="0" anchor="ctr"/>
-          <a:lstStyle/>
-          <a:p/>
-        </p:txBody>
-      </p:sp>
-      <p:sp>
-        <p:nvSpPr>
-          <p:cNvPr id="11" name="TextBox 10"/>
-          <p:cNvSpPr txBox="1"/>
-          <p:nvPr/>
-        </p:nvSpPr>
-        <p:spPr>
-          <a:xfrm>
-            <a:off x="6507327" y="1600200"/>
-            <a:ext cx="4907127" cy="640080"/>
+          <a:bodyPr rtlCol="0" anchor="ctr" lIns="0" rIns="0" tIns="0" bIns="0"/>
+          <a:lstStyle/>
+          <a:p>
+            <a:pPr algn="ctr"/>
+            <a:r>
+              <a:rPr sz="1500" b="1">
+                <a:solidFill>
+                  <a:srgbClr val="202122"/>
+                </a:solidFill>
+                <a:latin typeface="Calibri"/>
+              </a:rPr>
+              <a:t>1</a:t>
+            </a:r>
+          </a:p>
+        </p:txBody>
+      </p:sp>
+      <p:sp>
+        <p:nvSpPr>
+          <p:cNvPr id="8" name="TextBox 7"/>
+          <p:cNvSpPr txBox="1"/>
+          <p:nvPr/>
+        </p:nvSpPr>
+        <p:spPr>
+          <a:xfrm>
+            <a:off x="1371600" y="1801368"/>
+            <a:ext cx="2509418" cy="512064"/>
           </a:xfrm>
           <a:prstGeom prst="rect">
             <a:avLst/>
@@ -9528,31 +11256,64 @@
           <a:p>
             <a:pPr algn="l"/>
             <a:r>
-              <a:rPr sz="2000" b="1" i="0">
-                <a:solidFill>
-                  <a:srgbClr val="FFFFFF"/>
-                </a:solidFill>
-                <a:latin typeface="Calibri"/>
-              </a:rPr>
-              <a:t>Confined spaces</a:t>
-            </a:r>
-          </a:p>
-        </p:txBody>
-      </p:sp>
-      <p:sp>
-        <p:nvSpPr>
-          <p:cNvPr id="12" name="Rounded Rectangle 11"/>
+              <a:rPr sz="1900" b="1" i="0">
+                <a:solidFill>
+                  <a:srgbClr val="03306E"/>
+                </a:solidFill>
+                <a:latin typeface="Calibri"/>
+              </a:rPr>
+              <a:t>HSWA 1974</a:t>
+            </a:r>
+          </a:p>
+        </p:txBody>
+      </p:sp>
+      <p:sp>
+        <p:nvSpPr>
+          <p:cNvPr id="9" name="TextBox 8"/>
+          <p:cNvSpPr txBox="1"/>
+          <p:nvPr/>
+        </p:nvSpPr>
+        <p:spPr>
+          <a:xfrm>
+            <a:off x="777240" y="2468880"/>
+            <a:ext cx="3058058" cy="1143000"/>
+          </a:xfrm>
+          <a:prstGeom prst="rect">
+            <a:avLst/>
+          </a:prstGeom>
+          <a:noFill/>
+        </p:spPr>
+        <p:txBody>
+          <a:bodyPr wrap="square" anchor="t" lIns="0" rIns="0" tIns="0" bIns="0"/>
+          <a:lstStyle/>
+          <a:p>
+            <a:pPr algn="l"/>
+            <a:r>
+              <a:rPr sz="2000" b="0" i="0">
+                <a:solidFill>
+                  <a:srgbClr val="202122"/>
+                </a:solidFill>
+                <a:latin typeface="Calibri"/>
+              </a:rPr>
+              <a:t>The general duty of care.</a:t>
+            </a:r>
+          </a:p>
+        </p:txBody>
+      </p:sp>
+      <p:sp>
+        <p:nvSpPr>
+          <p:cNvPr id="10" name="Rounded Rectangle 9"/>
           <p:cNvSpPr/>
           <p:nvPr/>
         </p:nvSpPr>
         <p:spPr>
           <a:xfrm>
-            <a:off x="6278727" y="2377440"/>
-            <a:ext cx="5364327" cy="3794760"/>
+            <a:off x="4338218" y="1600200"/>
+            <a:ext cx="3515258" cy="2148840"/>
           </a:xfrm>
           <a:prstGeom prst="roundRect">
             <a:avLst>
-              <a:gd name="adj" fmla="val 4000"/>
+              <a:gd name="adj" fmla="val 6000"/>
             </a:avLst>
           </a:prstGeom>
           <a:solidFill>
@@ -9585,107 +11346,771 @@
       </p:sp>
       <p:sp>
         <p:nvSpPr>
+          <p:cNvPr id="11" name="Oval 10"/>
+          <p:cNvSpPr/>
+          <p:nvPr/>
+        </p:nvSpPr>
+        <p:spPr>
+          <a:xfrm>
+            <a:off x="4566818" y="1828800"/>
+            <a:ext cx="457200" cy="457200"/>
+          </a:xfrm>
+          <a:prstGeom prst="ellipse">
+            <a:avLst/>
+          </a:prstGeom>
+          <a:solidFill>
+            <a:srgbClr val="F2B705"/>
+          </a:solidFill>
+          <a:ln>
+            <a:noFill/>
+          </a:ln>
+          <a:effectLst/>
+        </p:spPr>
+        <p:style>
+          <a:lnRef idx="1">
+            <a:schemeClr val="accent1"/>
+          </a:lnRef>
+          <a:fillRef idx="3">
+            <a:schemeClr val="accent1"/>
+          </a:fillRef>
+          <a:effectRef idx="2">
+            <a:schemeClr val="accent1"/>
+          </a:effectRef>
+          <a:fontRef idx="minor">
+            <a:schemeClr val="lt1"/>
+          </a:fontRef>
+        </p:style>
+        <p:txBody>
+          <a:bodyPr rtlCol="0" anchor="ctr" lIns="0" rIns="0" tIns="0" bIns="0"/>
+          <a:lstStyle/>
+          <a:p>
+            <a:pPr algn="ctr"/>
+            <a:r>
+              <a:rPr sz="1500" b="1">
+                <a:solidFill>
+                  <a:srgbClr val="202122"/>
+                </a:solidFill>
+                <a:latin typeface="Calibri"/>
+              </a:rPr>
+              <a:t>2</a:t>
+            </a:r>
+          </a:p>
+        </p:txBody>
+      </p:sp>
+      <p:sp>
+        <p:nvSpPr>
+          <p:cNvPr id="12" name="TextBox 11"/>
+          <p:cNvSpPr txBox="1"/>
+          <p:nvPr/>
+        </p:nvSpPr>
+        <p:spPr>
+          <a:xfrm>
+            <a:off x="5161178" y="1801368"/>
+            <a:ext cx="2509418" cy="512064"/>
+          </a:xfrm>
+          <a:prstGeom prst="rect">
+            <a:avLst/>
+          </a:prstGeom>
+          <a:noFill/>
+        </p:spPr>
+        <p:txBody>
+          <a:bodyPr wrap="square" anchor="ctr" lIns="0" rIns="0" tIns="0" bIns="0"/>
+          <a:lstStyle/>
+          <a:p>
+            <a:pPr algn="l"/>
+            <a:r>
+              <a:rPr sz="1600" b="1" i="0">
+                <a:solidFill>
+                  <a:srgbClr val="03306E"/>
+                </a:solidFill>
+                <a:latin typeface="Calibri"/>
+              </a:rPr>
+              <a:t>Electricity at Work 1989</a:t>
+            </a:r>
+          </a:p>
+        </p:txBody>
+      </p:sp>
+      <p:sp>
+        <p:nvSpPr>
           <p:cNvPr id="13" name="TextBox 12"/>
           <p:cNvSpPr txBox="1"/>
           <p:nvPr/>
         </p:nvSpPr>
         <p:spPr>
           <a:xfrm>
-            <a:off x="6553047" y="2606040"/>
-            <a:ext cx="4815687" cy="3337560"/>
-          </a:xfrm>
-          <a:prstGeom prst="rect">
-            <a:avLst/>
-          </a:prstGeom>
-          <a:noFill/>
-        </p:spPr>
-        <p:txBody>
-          <a:bodyPr wrap="square" lIns="0" rIns="0" tIns="0" bIns="0">
-            <a:spAutoFit/>
-          </a:bodyPr>
-          <a:lstStyle/>
-          <a:p>
-            <a:pPr marL="274320" indent="-274320">
-              <a:spcAft>
-                <a:spcPts val="990"/>
-              </a:spcAft>
-              <a:buClr>
-                <a:srgbClr val="0645AD"/>
-              </a:buClr>
-              <a:buFont typeface="Arial"/>
-              <a:buChar char="•"/>
-            </a:pPr>
-            <a:r>
-              <a:rPr sz="2200" b="0">
+            <a:off x="4566818" y="2468880"/>
+            <a:ext cx="3058058" cy="1143000"/>
+          </a:xfrm>
+          <a:prstGeom prst="rect">
+            <a:avLst/>
+          </a:prstGeom>
+          <a:noFill/>
+        </p:spPr>
+        <p:txBody>
+          <a:bodyPr wrap="square" anchor="t" lIns="0" rIns="0" tIns="0" bIns="0"/>
+          <a:lstStyle/>
+          <a:p>
+            <a:pPr algn="l"/>
+            <a:r>
+              <a:rPr sz="2000" b="0" i="0">
                 <a:solidFill>
                   <a:srgbClr val="202122"/>
                 </a:solidFill>
                 <a:latin typeface="Calibri"/>
               </a:rPr>
-              <a:t>Same risk management process</a:t>
-            </a:r>
-          </a:p>
-          <a:p>
-            <a:pPr marL="274320" indent="-274320">
-              <a:spcAft>
-                <a:spcPts val="990"/>
-              </a:spcAft>
-              <a:buClr>
-                <a:srgbClr val="0645AD"/>
-              </a:buClr>
-              <a:buFont typeface="Arial"/>
-              <a:buChar char="•"/>
-            </a:pPr>
-            <a:r>
-              <a:rPr sz="2200" b="0">
+              <a:t>Safe work near electrical systems.</a:t>
+            </a:r>
+          </a:p>
+        </p:txBody>
+      </p:sp>
+      <p:sp>
+        <p:nvSpPr>
+          <p:cNvPr id="14" name="Rounded Rectangle 13"/>
+          <p:cNvSpPr/>
+          <p:nvPr/>
+        </p:nvSpPr>
+        <p:spPr>
+          <a:xfrm>
+            <a:off x="8127796" y="1600200"/>
+            <a:ext cx="3515258" cy="2148840"/>
+          </a:xfrm>
+          <a:prstGeom prst="roundRect">
+            <a:avLst>
+              <a:gd name="adj" fmla="val 6000"/>
+            </a:avLst>
+          </a:prstGeom>
+          <a:solidFill>
+            <a:srgbClr val="EAF3FF"/>
+          </a:solidFill>
+          <a:ln>
+            <a:noFill/>
+          </a:ln>
+          <a:effectLst/>
+        </p:spPr>
+        <p:style>
+          <a:lnRef idx="1">
+            <a:schemeClr val="accent1"/>
+          </a:lnRef>
+          <a:fillRef idx="3">
+            <a:schemeClr val="accent1"/>
+          </a:fillRef>
+          <a:effectRef idx="2">
+            <a:schemeClr val="accent1"/>
+          </a:effectRef>
+          <a:fontRef idx="minor">
+            <a:schemeClr val="lt1"/>
+          </a:fontRef>
+        </p:style>
+        <p:txBody>
+          <a:bodyPr rtlCol="0" anchor="ctr"/>
+          <a:lstStyle/>
+          <a:p/>
+        </p:txBody>
+      </p:sp>
+      <p:sp>
+        <p:nvSpPr>
+          <p:cNvPr id="15" name="Oval 14"/>
+          <p:cNvSpPr/>
+          <p:nvPr/>
+        </p:nvSpPr>
+        <p:spPr>
+          <a:xfrm>
+            <a:off x="8356396" y="1828800"/>
+            <a:ext cx="457200" cy="457200"/>
+          </a:xfrm>
+          <a:prstGeom prst="ellipse">
+            <a:avLst/>
+          </a:prstGeom>
+          <a:solidFill>
+            <a:srgbClr val="F2B705"/>
+          </a:solidFill>
+          <a:ln>
+            <a:noFill/>
+          </a:ln>
+          <a:effectLst/>
+        </p:spPr>
+        <p:style>
+          <a:lnRef idx="1">
+            <a:schemeClr val="accent1"/>
+          </a:lnRef>
+          <a:fillRef idx="3">
+            <a:schemeClr val="accent1"/>
+          </a:fillRef>
+          <a:effectRef idx="2">
+            <a:schemeClr val="accent1"/>
+          </a:effectRef>
+          <a:fontRef idx="minor">
+            <a:schemeClr val="lt1"/>
+          </a:fontRef>
+        </p:style>
+        <p:txBody>
+          <a:bodyPr rtlCol="0" anchor="ctr" lIns="0" rIns="0" tIns="0" bIns="0"/>
+          <a:lstStyle/>
+          <a:p>
+            <a:pPr algn="ctr"/>
+            <a:r>
+              <a:rPr sz="1500" b="1">
                 <a:solidFill>
                   <a:srgbClr val="202122"/>
                 </a:solidFill>
                 <a:latin typeface="Calibri"/>
               </a:rPr>
-              <a:t>Correct PPE, properly maintained</a:t>
-            </a:r>
-          </a:p>
-          <a:p>
-            <a:pPr marL="274320" indent="-274320">
-              <a:spcAft>
-                <a:spcPts val="990"/>
-              </a:spcAft>
-              <a:buClr>
-                <a:srgbClr val="0645AD"/>
-              </a:buClr>
-              <a:buFont typeface="Arial"/>
-              <a:buChar char="•"/>
-            </a:pPr>
-            <a:r>
-              <a:rPr sz="2200" b="0">
+              <a:t>3</a:t>
+            </a:r>
+          </a:p>
+        </p:txBody>
+      </p:sp>
+      <p:sp>
+        <p:nvSpPr>
+          <p:cNvPr id="16" name="TextBox 15"/>
+          <p:cNvSpPr txBox="1"/>
+          <p:nvPr/>
+        </p:nvSpPr>
+        <p:spPr>
+          <a:xfrm>
+            <a:off x="8950756" y="1801368"/>
+            <a:ext cx="2509418" cy="512064"/>
+          </a:xfrm>
+          <a:prstGeom prst="rect">
+            <a:avLst/>
+          </a:prstGeom>
+          <a:noFill/>
+        </p:spPr>
+        <p:txBody>
+          <a:bodyPr wrap="square" anchor="ctr" lIns="0" rIns="0" tIns="0" bIns="0"/>
+          <a:lstStyle/>
+          <a:p>
+            <a:pPr algn="l"/>
+            <a:r>
+              <a:rPr sz="1900" b="1" i="0">
+                <a:solidFill>
+                  <a:srgbClr val="03306E"/>
+                </a:solidFill>
+                <a:latin typeface="Calibri"/>
+              </a:rPr>
+              <a:t>Work at Height 2005</a:t>
+            </a:r>
+          </a:p>
+        </p:txBody>
+      </p:sp>
+      <p:sp>
+        <p:nvSpPr>
+          <p:cNvPr id="17" name="TextBox 16"/>
+          <p:cNvSpPr txBox="1"/>
+          <p:nvPr/>
+        </p:nvSpPr>
+        <p:spPr>
+          <a:xfrm>
+            <a:off x="8356396" y="2468880"/>
+            <a:ext cx="3058058" cy="1143000"/>
+          </a:xfrm>
+          <a:prstGeom prst="rect">
+            <a:avLst/>
+          </a:prstGeom>
+          <a:noFill/>
+        </p:spPr>
+        <p:txBody>
+          <a:bodyPr wrap="square" anchor="t" lIns="0" rIns="0" tIns="0" bIns="0"/>
+          <a:lstStyle/>
+          <a:p>
+            <a:pPr algn="l"/>
+            <a:r>
+              <a:rPr sz="2000" b="0" i="0">
                 <a:solidFill>
                   <a:srgbClr val="202122"/>
                 </a:solidFill>
                 <a:latin typeface="Calibri"/>
               </a:rPr>
-              <a:t>Plan for rescue</a:t>
-            </a:r>
-          </a:p>
-          <a:p>
-            <a:pPr marL="274320" indent="-274320">
-              <a:spcAft>
-                <a:spcPts val="990"/>
-              </a:spcAft>
-              <a:buClr>
-                <a:srgbClr val="0645AD"/>
-              </a:buClr>
-              <a:buFont typeface="Arial"/>
-              <a:buChar char="•"/>
-            </a:pPr>
-            <a:r>
-              <a:rPr sz="2200" b="0">
+              <a:t>Planning and equipment for work at height.</a:t>
+            </a:r>
+          </a:p>
+        </p:txBody>
+      </p:sp>
+      <p:sp>
+        <p:nvSpPr>
+          <p:cNvPr id="18" name="Rounded Rectangle 17"/>
+          <p:cNvSpPr/>
+          <p:nvPr/>
+        </p:nvSpPr>
+        <p:spPr>
+          <a:xfrm>
+            <a:off x="548640" y="4023360"/>
+            <a:ext cx="3515258" cy="2148840"/>
+          </a:xfrm>
+          <a:prstGeom prst="roundRect">
+            <a:avLst>
+              <a:gd name="adj" fmla="val 6000"/>
+            </a:avLst>
+          </a:prstGeom>
+          <a:solidFill>
+            <a:srgbClr val="EAF3FF"/>
+          </a:solidFill>
+          <a:ln>
+            <a:noFill/>
+          </a:ln>
+          <a:effectLst/>
+        </p:spPr>
+        <p:style>
+          <a:lnRef idx="1">
+            <a:schemeClr val="accent1"/>
+          </a:lnRef>
+          <a:fillRef idx="3">
+            <a:schemeClr val="accent1"/>
+          </a:fillRef>
+          <a:effectRef idx="2">
+            <a:schemeClr val="accent1"/>
+          </a:effectRef>
+          <a:fontRef idx="minor">
+            <a:schemeClr val="lt1"/>
+          </a:fontRef>
+        </p:style>
+        <p:txBody>
+          <a:bodyPr rtlCol="0" anchor="ctr"/>
+          <a:lstStyle/>
+          <a:p/>
+        </p:txBody>
+      </p:sp>
+      <p:sp>
+        <p:nvSpPr>
+          <p:cNvPr id="19" name="Oval 18"/>
+          <p:cNvSpPr/>
+          <p:nvPr/>
+        </p:nvSpPr>
+        <p:spPr>
+          <a:xfrm>
+            <a:off x="777240" y="4251960"/>
+            <a:ext cx="457200" cy="457200"/>
+          </a:xfrm>
+          <a:prstGeom prst="ellipse">
+            <a:avLst/>
+          </a:prstGeom>
+          <a:solidFill>
+            <a:srgbClr val="F2B705"/>
+          </a:solidFill>
+          <a:ln>
+            <a:noFill/>
+          </a:ln>
+          <a:effectLst/>
+        </p:spPr>
+        <p:style>
+          <a:lnRef idx="1">
+            <a:schemeClr val="accent1"/>
+          </a:lnRef>
+          <a:fillRef idx="3">
+            <a:schemeClr val="accent1"/>
+          </a:fillRef>
+          <a:effectRef idx="2">
+            <a:schemeClr val="accent1"/>
+          </a:effectRef>
+          <a:fontRef idx="minor">
+            <a:schemeClr val="lt1"/>
+          </a:fontRef>
+        </p:style>
+        <p:txBody>
+          <a:bodyPr rtlCol="0" anchor="ctr" lIns="0" rIns="0" tIns="0" bIns="0"/>
+          <a:lstStyle/>
+          <a:p>
+            <a:pPr algn="ctr"/>
+            <a:r>
+              <a:rPr sz="1500" b="1">
                 <a:solidFill>
                   <a:srgbClr val="202122"/>
                 </a:solidFill>
                 <a:latin typeface="Calibri"/>
               </a:rPr>
-              <a:t>Record findings clearly</a:t>
+              <a:t>4</a:t>
+            </a:r>
+          </a:p>
+        </p:txBody>
+      </p:sp>
+      <p:sp>
+        <p:nvSpPr>
+          <p:cNvPr id="20" name="TextBox 19"/>
+          <p:cNvSpPr txBox="1"/>
+          <p:nvPr/>
+        </p:nvSpPr>
+        <p:spPr>
+          <a:xfrm>
+            <a:off x="1371600" y="4224528"/>
+            <a:ext cx="2509418" cy="512064"/>
+          </a:xfrm>
+          <a:prstGeom prst="rect">
+            <a:avLst/>
+          </a:prstGeom>
+          <a:noFill/>
+        </p:spPr>
+        <p:txBody>
+          <a:bodyPr wrap="square" anchor="ctr" lIns="0" rIns="0" tIns="0" bIns="0"/>
+          <a:lstStyle/>
+          <a:p>
+            <a:pPr algn="l"/>
+            <a:r>
+              <a:rPr sz="1900" b="1" i="0">
+                <a:solidFill>
+                  <a:srgbClr val="03306E"/>
+                </a:solidFill>
+                <a:latin typeface="Calibri"/>
+              </a:rPr>
+              <a:t>COSHH 2002</a:t>
+            </a:r>
+          </a:p>
+        </p:txBody>
+      </p:sp>
+      <p:sp>
+        <p:nvSpPr>
+          <p:cNvPr id="21" name="TextBox 20"/>
+          <p:cNvSpPr txBox="1"/>
+          <p:nvPr/>
+        </p:nvSpPr>
+        <p:spPr>
+          <a:xfrm>
+            <a:off x="777240" y="4892040"/>
+            <a:ext cx="3058058" cy="1143000"/>
+          </a:xfrm>
+          <a:prstGeom prst="rect">
+            <a:avLst/>
+          </a:prstGeom>
+          <a:noFill/>
+        </p:spPr>
+        <p:txBody>
+          <a:bodyPr wrap="square" anchor="t" lIns="0" rIns="0" tIns="0" bIns="0"/>
+          <a:lstStyle/>
+          <a:p>
+            <a:pPr algn="l"/>
+            <a:r>
+              <a:rPr sz="2000" b="0" i="0">
+                <a:solidFill>
+                  <a:srgbClr val="202122"/>
+                </a:solidFill>
+                <a:latin typeface="Calibri"/>
+              </a:rPr>
+              <a:t>Hazardous substances.</a:t>
+            </a:r>
+          </a:p>
+        </p:txBody>
+      </p:sp>
+      <p:sp>
+        <p:nvSpPr>
+          <p:cNvPr id="22" name="Rounded Rectangle 21"/>
+          <p:cNvSpPr/>
+          <p:nvPr/>
+        </p:nvSpPr>
+        <p:spPr>
+          <a:xfrm>
+            <a:off x="4338218" y="4023360"/>
+            <a:ext cx="3515258" cy="2148840"/>
+          </a:xfrm>
+          <a:prstGeom prst="roundRect">
+            <a:avLst>
+              <a:gd name="adj" fmla="val 6000"/>
+            </a:avLst>
+          </a:prstGeom>
+          <a:solidFill>
+            <a:srgbClr val="EAF3FF"/>
+          </a:solidFill>
+          <a:ln>
+            <a:noFill/>
+          </a:ln>
+          <a:effectLst/>
+        </p:spPr>
+        <p:style>
+          <a:lnRef idx="1">
+            <a:schemeClr val="accent1"/>
+          </a:lnRef>
+          <a:fillRef idx="3">
+            <a:schemeClr val="accent1"/>
+          </a:fillRef>
+          <a:effectRef idx="2">
+            <a:schemeClr val="accent1"/>
+          </a:effectRef>
+          <a:fontRef idx="minor">
+            <a:schemeClr val="lt1"/>
+          </a:fontRef>
+        </p:style>
+        <p:txBody>
+          <a:bodyPr rtlCol="0" anchor="ctr"/>
+          <a:lstStyle/>
+          <a:p/>
+        </p:txBody>
+      </p:sp>
+      <p:sp>
+        <p:nvSpPr>
+          <p:cNvPr id="23" name="Oval 22"/>
+          <p:cNvSpPr/>
+          <p:nvPr/>
+        </p:nvSpPr>
+        <p:spPr>
+          <a:xfrm>
+            <a:off x="4566818" y="4251960"/>
+            <a:ext cx="457200" cy="457200"/>
+          </a:xfrm>
+          <a:prstGeom prst="ellipse">
+            <a:avLst/>
+          </a:prstGeom>
+          <a:solidFill>
+            <a:srgbClr val="F2B705"/>
+          </a:solidFill>
+          <a:ln>
+            <a:noFill/>
+          </a:ln>
+          <a:effectLst/>
+        </p:spPr>
+        <p:style>
+          <a:lnRef idx="1">
+            <a:schemeClr val="accent1"/>
+          </a:lnRef>
+          <a:fillRef idx="3">
+            <a:schemeClr val="accent1"/>
+          </a:fillRef>
+          <a:effectRef idx="2">
+            <a:schemeClr val="accent1"/>
+          </a:effectRef>
+          <a:fontRef idx="minor">
+            <a:schemeClr val="lt1"/>
+          </a:fontRef>
+        </p:style>
+        <p:txBody>
+          <a:bodyPr rtlCol="0" anchor="ctr" lIns="0" rIns="0" tIns="0" bIns="0"/>
+          <a:lstStyle/>
+          <a:p>
+            <a:pPr algn="ctr"/>
+            <a:r>
+              <a:rPr sz="1500" b="1">
+                <a:solidFill>
+                  <a:srgbClr val="202122"/>
+                </a:solidFill>
+                <a:latin typeface="Calibri"/>
+              </a:rPr>
+              <a:t>5</a:t>
+            </a:r>
+          </a:p>
+        </p:txBody>
+      </p:sp>
+      <p:sp>
+        <p:nvSpPr>
+          <p:cNvPr id="24" name="TextBox 23"/>
+          <p:cNvSpPr txBox="1"/>
+          <p:nvPr/>
+        </p:nvSpPr>
+        <p:spPr>
+          <a:xfrm>
+            <a:off x="5161178" y="4224528"/>
+            <a:ext cx="2509418" cy="512064"/>
+          </a:xfrm>
+          <a:prstGeom prst="rect">
+            <a:avLst/>
+          </a:prstGeom>
+          <a:noFill/>
+        </p:spPr>
+        <p:txBody>
+          <a:bodyPr wrap="square" anchor="ctr" lIns="0" rIns="0" tIns="0" bIns="0"/>
+          <a:lstStyle/>
+          <a:p>
+            <a:pPr algn="l"/>
+            <a:r>
+              <a:rPr sz="1800" b="1" i="0">
+                <a:solidFill>
+                  <a:srgbClr val="03306E"/>
+                </a:solidFill>
+                <a:latin typeface="Calibri"/>
+              </a:rPr>
+              <a:t>Confined Spaces 1997</a:t>
+            </a:r>
+          </a:p>
+        </p:txBody>
+      </p:sp>
+      <p:sp>
+        <p:nvSpPr>
+          <p:cNvPr id="25" name="TextBox 24"/>
+          <p:cNvSpPr txBox="1"/>
+          <p:nvPr/>
+        </p:nvSpPr>
+        <p:spPr>
+          <a:xfrm>
+            <a:off x="4566818" y="4892040"/>
+            <a:ext cx="3058058" cy="1143000"/>
+          </a:xfrm>
+          <a:prstGeom prst="rect">
+            <a:avLst/>
+          </a:prstGeom>
+          <a:noFill/>
+        </p:spPr>
+        <p:txBody>
+          <a:bodyPr wrap="square" anchor="t" lIns="0" rIns="0" tIns="0" bIns="0"/>
+          <a:lstStyle/>
+          <a:p>
+            <a:pPr algn="l"/>
+            <a:r>
+              <a:rPr sz="2000" b="0" i="0">
+                <a:solidFill>
+                  <a:srgbClr val="202122"/>
+                </a:solidFill>
+                <a:latin typeface="Calibri"/>
+              </a:rPr>
+              <a:t>Safe entry and rescue plans.</a:t>
+            </a:r>
+          </a:p>
+        </p:txBody>
+      </p:sp>
+      <p:sp>
+        <p:nvSpPr>
+          <p:cNvPr id="26" name="Rounded Rectangle 25"/>
+          <p:cNvSpPr/>
+          <p:nvPr/>
+        </p:nvSpPr>
+        <p:spPr>
+          <a:xfrm>
+            <a:off x="8127796" y="4023360"/>
+            <a:ext cx="3515258" cy="2148840"/>
+          </a:xfrm>
+          <a:prstGeom prst="roundRect">
+            <a:avLst>
+              <a:gd name="adj" fmla="val 6000"/>
+            </a:avLst>
+          </a:prstGeom>
+          <a:solidFill>
+            <a:srgbClr val="EAF3FF"/>
+          </a:solidFill>
+          <a:ln>
+            <a:noFill/>
+          </a:ln>
+          <a:effectLst/>
+        </p:spPr>
+        <p:style>
+          <a:lnRef idx="1">
+            <a:schemeClr val="accent1"/>
+          </a:lnRef>
+          <a:fillRef idx="3">
+            <a:schemeClr val="accent1"/>
+          </a:fillRef>
+          <a:effectRef idx="2">
+            <a:schemeClr val="accent1"/>
+          </a:effectRef>
+          <a:fontRef idx="minor">
+            <a:schemeClr val="lt1"/>
+          </a:fontRef>
+        </p:style>
+        <p:txBody>
+          <a:bodyPr rtlCol="0" anchor="ctr"/>
+          <a:lstStyle/>
+          <a:p/>
+        </p:txBody>
+      </p:sp>
+      <p:sp>
+        <p:nvSpPr>
+          <p:cNvPr id="27" name="Oval 26"/>
+          <p:cNvSpPr/>
+          <p:nvPr/>
+        </p:nvSpPr>
+        <p:spPr>
+          <a:xfrm>
+            <a:off x="8356396" y="4251960"/>
+            <a:ext cx="457200" cy="457200"/>
+          </a:xfrm>
+          <a:prstGeom prst="ellipse">
+            <a:avLst/>
+          </a:prstGeom>
+          <a:solidFill>
+            <a:srgbClr val="F2B705"/>
+          </a:solidFill>
+          <a:ln>
+            <a:noFill/>
+          </a:ln>
+          <a:effectLst/>
+        </p:spPr>
+        <p:style>
+          <a:lnRef idx="1">
+            <a:schemeClr val="accent1"/>
+          </a:lnRef>
+          <a:fillRef idx="3">
+            <a:schemeClr val="accent1"/>
+          </a:fillRef>
+          <a:effectRef idx="2">
+            <a:schemeClr val="accent1"/>
+          </a:effectRef>
+          <a:fontRef idx="minor">
+            <a:schemeClr val="lt1"/>
+          </a:fontRef>
+        </p:style>
+        <p:txBody>
+          <a:bodyPr rtlCol="0" anchor="ctr" lIns="0" rIns="0" tIns="0" bIns="0"/>
+          <a:lstStyle/>
+          <a:p>
+            <a:pPr algn="ctr"/>
+            <a:r>
+              <a:rPr sz="1500" b="1">
+                <a:solidFill>
+                  <a:srgbClr val="202122"/>
+                </a:solidFill>
+                <a:latin typeface="Calibri"/>
+              </a:rPr>
+              <a:t>6</a:t>
+            </a:r>
+          </a:p>
+        </p:txBody>
+      </p:sp>
+      <p:sp>
+        <p:nvSpPr>
+          <p:cNvPr id="28" name="TextBox 27"/>
+          <p:cNvSpPr txBox="1"/>
+          <p:nvPr/>
+        </p:nvSpPr>
+        <p:spPr>
+          <a:xfrm>
+            <a:off x="8950756" y="4224528"/>
+            <a:ext cx="2509418" cy="512064"/>
+          </a:xfrm>
+          <a:prstGeom prst="rect">
+            <a:avLst/>
+          </a:prstGeom>
+          <a:noFill/>
+        </p:spPr>
+        <p:txBody>
+          <a:bodyPr wrap="square" anchor="ctr" lIns="0" rIns="0" tIns="0" bIns="0"/>
+          <a:lstStyle/>
+          <a:p>
+            <a:pPr algn="l"/>
+            <a:r>
+              <a:rPr sz="1600" b="1" i="0">
+                <a:solidFill>
+                  <a:srgbClr val="03306E"/>
+                </a:solidFill>
+                <a:latin typeface="Calibri"/>
+              </a:rPr>
+              <a:t>PPE 2018 and Asbestos 2012</a:t>
+            </a:r>
+          </a:p>
+        </p:txBody>
+      </p:sp>
+      <p:sp>
+        <p:nvSpPr>
+          <p:cNvPr id="29" name="TextBox 28"/>
+          <p:cNvSpPr txBox="1"/>
+          <p:nvPr/>
+        </p:nvSpPr>
+        <p:spPr>
+          <a:xfrm>
+            <a:off x="8356396" y="4892040"/>
+            <a:ext cx="3058058" cy="1143000"/>
+          </a:xfrm>
+          <a:prstGeom prst="rect">
+            <a:avLst/>
+          </a:prstGeom>
+          <a:noFill/>
+        </p:spPr>
+        <p:txBody>
+          <a:bodyPr wrap="square" anchor="t" lIns="0" rIns="0" tIns="0" bIns="0"/>
+          <a:lstStyle/>
+          <a:p>
+            <a:pPr algn="l"/>
+            <a:r>
+              <a:rPr sz="2000" b="0" i="0">
+                <a:solidFill>
+                  <a:srgbClr val="202122"/>
+                </a:solidFill>
+                <a:latin typeface="Calibri"/>
+              </a:rPr>
+              <a:t>Protective equipment; control of asbestos.</a:t>
             </a:r>
           </a:p>
         </p:txBody>
@@ -9777,7 +12202,7 @@
                 </a:solidFill>
                 <a:latin typeface="Cambria"/>
               </a:rPr>
-              <a:t>Check your understanding</a:t>
+              <a:t>If you suspect asbestos</a:t>
             </a:r>
           </a:p>
         </p:txBody>
@@ -9850,14 +12275,129 @@
       </p:sp>
       <p:sp>
         <p:nvSpPr>
-          <p:cNvPr id="6" name="Oval 5"/>
+          <p:cNvPr id="6" name="TextBox 5"/>
+          <p:cNvSpPr txBox="1"/>
+          <p:nvPr/>
+        </p:nvSpPr>
+        <p:spPr>
+          <a:xfrm>
+            <a:off x="548640" y="1554480"/>
+            <a:ext cx="6720840" cy="4617720"/>
+          </a:xfrm>
+          <a:prstGeom prst="rect">
+            <a:avLst/>
+          </a:prstGeom>
+          <a:noFill/>
+        </p:spPr>
+        <p:txBody>
+          <a:bodyPr wrap="square" lIns="0" rIns="0" tIns="0" bIns="0">
+            <a:spAutoFit/>
+          </a:bodyPr>
+          <a:lstStyle/>
+          <a:p>
+            <a:pPr>
+              <a:spcAft>
+                <a:spcPts val="1260"/>
+              </a:spcAft>
+            </a:pPr>
+            <a:r>
+              <a:rPr sz="2100" b="0">
+                <a:solidFill>
+                  <a:srgbClr val="202122"/>
+                </a:solidFill>
+                <a:latin typeface="Calibri"/>
+              </a:rPr>
+              <a:t>Asbestos was widely used in buildings until 1999. Disturbing it releases fibres that can cause fatal lung diseases decades later.</a:t>
+            </a:r>
+          </a:p>
+          <a:p>
+            <a:pPr>
+              <a:spcAft>
+                <a:spcPts val="1260"/>
+              </a:spcAft>
+            </a:pPr>
+            <a:r>
+              <a:rPr sz="2100" b="0">
+                <a:solidFill>
+                  <a:srgbClr val="202122"/>
+                </a:solidFill>
+                <a:latin typeface="Calibri"/>
+              </a:rPr>
+              <a:t>If you suspect asbestos-containing material (ACM), stop work immediately. Tell the relevant people: your supervisor and the site manager. Isolate the area so nobody else enters. Have it investigated by an asbestos-registered professional. Then act on their findings: removal, sealing, or air-quality checks.</a:t>
+            </a:r>
+          </a:p>
+          <a:p>
+            <a:pPr>
+              <a:spcAft>
+                <a:spcPts val="1260"/>
+              </a:spcAft>
+            </a:pPr>
+            <a:r>
+              <a:rPr sz="2100" b="0">
+                <a:solidFill>
+                  <a:srgbClr val="202122"/>
+                </a:solidFill>
+                <a:latin typeface="Calibri"/>
+              </a:rPr>
+              <a:t>Never drill, cut or sweep suspect material to 'check'. The Control of Asbestos Regulations 2012 apply.</a:t>
+            </a:r>
+          </a:p>
+        </p:txBody>
+      </p:sp>
+      <p:sp>
+        <p:nvSpPr>
+          <p:cNvPr id="7" name="Rounded Rectangle 6"/>
           <p:cNvSpPr/>
           <p:nvPr/>
         </p:nvSpPr>
         <p:spPr>
           <a:xfrm>
-            <a:off x="548640" y="1618488"/>
-            <a:ext cx="411480" cy="411480"/>
+            <a:off x="7772400" y="1554480"/>
+            <a:ext cx="3867912" cy="4526280"/>
+          </a:xfrm>
+          <a:prstGeom prst="roundRect">
+            <a:avLst>
+              <a:gd name="adj" fmla="val 8000"/>
+            </a:avLst>
+          </a:prstGeom>
+          <a:solidFill>
+            <a:srgbClr val="03306E"/>
+          </a:solidFill>
+          <a:ln>
+            <a:noFill/>
+          </a:ln>
+          <a:effectLst/>
+        </p:spPr>
+        <p:style>
+          <a:lnRef idx="1">
+            <a:schemeClr val="accent1"/>
+          </a:lnRef>
+          <a:fillRef idx="3">
+            <a:schemeClr val="accent1"/>
+          </a:fillRef>
+          <a:effectRef idx="2">
+            <a:schemeClr val="accent1"/>
+          </a:effectRef>
+          <a:fontRef idx="minor">
+            <a:schemeClr val="lt1"/>
+          </a:fontRef>
+        </p:style>
+        <p:txBody>
+          <a:bodyPr rtlCol="0" anchor="ctr"/>
+          <a:lstStyle/>
+          <a:p/>
+        </p:txBody>
+      </p:sp>
+      <p:sp>
+        <p:nvSpPr>
+          <p:cNvPr id="8" name="Oval 7"/>
+          <p:cNvSpPr/>
+          <p:nvPr/>
+        </p:nvSpPr>
+        <p:spPr>
+          <a:xfrm>
+            <a:off x="8046720" y="1828800"/>
+            <a:ext cx="548640" cy="548640"/>
           </a:xfrm>
           <a:prstGeom prst="ellipse">
             <a:avLst/>
@@ -9890,27 +12430,27 @@
           <a:p>
             <a:pPr algn="ctr"/>
             <a:r>
-              <a:rPr sz="1400" b="1">
+              <a:rPr sz="1300" b="1">
                 <a:solidFill>
                   <a:srgbClr val="202122"/>
                 </a:solidFill>
                 <a:latin typeface="Calibri"/>
               </a:rPr>
-              <a:t>1</a:t>
-            </a:r>
-          </a:p>
-        </p:txBody>
-      </p:sp>
-      <p:sp>
-        <p:nvSpPr>
-          <p:cNvPr id="7" name="TextBox 6"/>
-          <p:cNvSpPr txBox="1"/>
-          <p:nvPr/>
-        </p:nvSpPr>
-        <p:spPr>
-          <a:xfrm>
-            <a:off x="1234440" y="1600200"/>
-            <a:ext cx="10408615" cy="1030986"/>
+              <a:t>e.g.</a:t>
+            </a:r>
+          </a:p>
+        </p:txBody>
+      </p:sp>
+      <p:sp>
+        <p:nvSpPr>
+          <p:cNvPr id="9" name="TextBox 8"/>
+          <p:cNvSpPr txBox="1"/>
+          <p:nvPr/>
+        </p:nvSpPr>
+        <p:spPr>
+          <a:xfrm>
+            <a:off x="8046720" y="2560320"/>
+            <a:ext cx="3291840" cy="365760"/>
           </a:xfrm>
           <a:prstGeom prst="rect">
             <a:avLst/>
@@ -9923,80 +12463,27 @@
           <a:p>
             <a:pPr algn="l"/>
             <a:r>
-              <a:rPr sz="2200" b="0" i="0">
-                <a:solidFill>
-                  <a:srgbClr val="202122"/>
-                </a:solidFill>
-                <a:latin typeface="Calibri"/>
-              </a:rPr>
-              <a:t>Which standard covers segregation of data and power cables?</a:t>
-            </a:r>
-          </a:p>
-        </p:txBody>
-      </p:sp>
-      <p:sp>
-        <p:nvSpPr>
-          <p:cNvPr id="8" name="Oval 7"/>
-          <p:cNvSpPr/>
-          <p:nvPr/>
-        </p:nvSpPr>
-        <p:spPr>
-          <a:xfrm>
-            <a:off x="548640" y="2814066"/>
-            <a:ext cx="411480" cy="411480"/>
-          </a:xfrm>
-          <a:prstGeom prst="ellipse">
-            <a:avLst/>
-          </a:prstGeom>
-          <a:solidFill>
-            <a:srgbClr val="F2B705"/>
-          </a:solidFill>
-          <a:ln>
-            <a:noFill/>
-          </a:ln>
-          <a:effectLst/>
-        </p:spPr>
-        <p:style>
-          <a:lnRef idx="1">
-            <a:schemeClr val="accent1"/>
-          </a:lnRef>
-          <a:fillRef idx="3">
-            <a:schemeClr val="accent1"/>
-          </a:fillRef>
-          <a:effectRef idx="2">
-            <a:schemeClr val="accent1"/>
-          </a:effectRef>
-          <a:fontRef idx="minor">
-            <a:schemeClr val="lt1"/>
-          </a:fontRef>
-        </p:style>
-        <p:txBody>
-          <a:bodyPr rtlCol="0" anchor="ctr" lIns="0" rIns="0" tIns="0" bIns="0"/>
-          <a:lstStyle/>
-          <a:p>
-            <a:pPr algn="ctr"/>
-            <a:r>
-              <a:rPr sz="1400" b="1">
-                <a:solidFill>
-                  <a:srgbClr val="202122"/>
-                </a:solidFill>
-                <a:latin typeface="Calibri"/>
-              </a:rPr>
-              <a:t>2</a:t>
-            </a:r>
-          </a:p>
-        </p:txBody>
-      </p:sp>
-      <p:sp>
-        <p:nvSpPr>
-          <p:cNvPr id="9" name="TextBox 8"/>
-          <p:cNvSpPr txBox="1"/>
-          <p:nvPr/>
-        </p:nvSpPr>
-        <p:spPr>
-          <a:xfrm>
-            <a:off x="1234440" y="2795778"/>
-            <a:ext cx="10408615" cy="1030986"/>
+              <a:rPr sz="1300" b="1" i="0">
+                <a:solidFill>
+                  <a:srgbClr val="A9C8F0"/>
+                </a:solidFill>
+                <a:latin typeface="Calibri"/>
+              </a:rPr>
+              <a:t>EXAMPLE</a:t>
+            </a:r>
+          </a:p>
+        </p:txBody>
+      </p:sp>
+      <p:sp>
+        <p:nvSpPr>
+          <p:cNvPr id="10" name="TextBox 9"/>
+          <p:cNvSpPr txBox="1"/>
+          <p:nvPr/>
+        </p:nvSpPr>
+        <p:spPr>
+          <a:xfrm>
+            <a:off x="8046720" y="2971800"/>
+            <a:ext cx="3291840" cy="2971800"/>
           </a:xfrm>
           <a:prstGeom prst="rect">
             <a:avLst/>
@@ -10009,185 +12496,13 @@
           <a:p>
             <a:pPr algn="l"/>
             <a:r>
-              <a:rPr sz="2200" b="0" i="0">
-                <a:solidFill>
-                  <a:srgbClr val="202122"/>
-                </a:solidFill>
-                <a:latin typeface="Calibri"/>
-              </a:rPr>
-              <a:t>What is the first thing to do if you suspect asbestos?</a:t>
-            </a:r>
-          </a:p>
-        </p:txBody>
-      </p:sp>
-      <p:sp>
-        <p:nvSpPr>
-          <p:cNvPr id="10" name="Oval 9"/>
-          <p:cNvSpPr/>
-          <p:nvPr/>
-        </p:nvSpPr>
-        <p:spPr>
-          <a:xfrm>
-            <a:off x="548640" y="4009644"/>
-            <a:ext cx="411480" cy="411480"/>
-          </a:xfrm>
-          <a:prstGeom prst="ellipse">
-            <a:avLst/>
-          </a:prstGeom>
-          <a:solidFill>
-            <a:srgbClr val="F2B705"/>
-          </a:solidFill>
-          <a:ln>
-            <a:noFill/>
-          </a:ln>
-          <a:effectLst/>
-        </p:spPr>
-        <p:style>
-          <a:lnRef idx="1">
-            <a:schemeClr val="accent1"/>
-          </a:lnRef>
-          <a:fillRef idx="3">
-            <a:schemeClr val="accent1"/>
-          </a:fillRef>
-          <a:effectRef idx="2">
-            <a:schemeClr val="accent1"/>
-          </a:effectRef>
-          <a:fontRef idx="minor">
-            <a:schemeClr val="lt1"/>
-          </a:fontRef>
-        </p:style>
-        <p:txBody>
-          <a:bodyPr rtlCol="0" anchor="ctr" lIns="0" rIns="0" tIns="0" bIns="0"/>
-          <a:lstStyle/>
-          <a:p>
-            <a:pPr algn="ctr"/>
-            <a:r>
-              <a:rPr sz="1400" b="1">
-                <a:solidFill>
-                  <a:srgbClr val="202122"/>
-                </a:solidFill>
-                <a:latin typeface="Calibri"/>
-              </a:rPr>
-              <a:t>3</a:t>
-            </a:r>
-          </a:p>
-        </p:txBody>
-      </p:sp>
-      <p:sp>
-        <p:nvSpPr>
-          <p:cNvPr id="11" name="TextBox 10"/>
-          <p:cNvSpPr txBox="1"/>
-          <p:nvPr/>
-        </p:nvSpPr>
-        <p:spPr>
-          <a:xfrm>
-            <a:off x="1234440" y="3991356"/>
-            <a:ext cx="10408615" cy="1030986"/>
-          </a:xfrm>
-          <a:prstGeom prst="rect">
-            <a:avLst/>
-          </a:prstGeom>
-          <a:noFill/>
-        </p:spPr>
-        <p:txBody>
-          <a:bodyPr wrap="square" anchor="t" lIns="0" rIns="0" tIns="0" bIns="0"/>
-          <a:lstStyle/>
-          <a:p>
-            <a:pPr algn="l"/>
-            <a:r>
-              <a:rPr sz="2200" b="0" i="0">
-                <a:solidFill>
-                  <a:srgbClr val="202122"/>
-                </a:solidFill>
-                <a:latin typeface="Calibri"/>
-              </a:rPr>
-              <a:t>Which regulations cover work in ceiling voids and ducts?</a:t>
-            </a:r>
-          </a:p>
-        </p:txBody>
-      </p:sp>
-      <p:sp>
-        <p:nvSpPr>
-          <p:cNvPr id="12" name="Oval 11"/>
-          <p:cNvSpPr/>
-          <p:nvPr/>
-        </p:nvSpPr>
-        <p:spPr>
-          <a:xfrm>
-            <a:off x="548640" y="5205221"/>
-            <a:ext cx="411480" cy="411480"/>
-          </a:xfrm>
-          <a:prstGeom prst="ellipse">
-            <a:avLst/>
-          </a:prstGeom>
-          <a:solidFill>
-            <a:srgbClr val="F2B705"/>
-          </a:solidFill>
-          <a:ln>
-            <a:noFill/>
-          </a:ln>
-          <a:effectLst/>
-        </p:spPr>
-        <p:style>
-          <a:lnRef idx="1">
-            <a:schemeClr val="accent1"/>
-          </a:lnRef>
-          <a:fillRef idx="3">
-            <a:schemeClr val="accent1"/>
-          </a:fillRef>
-          <a:effectRef idx="2">
-            <a:schemeClr val="accent1"/>
-          </a:effectRef>
-          <a:fontRef idx="minor">
-            <a:schemeClr val="lt1"/>
-          </a:fontRef>
-        </p:style>
-        <p:txBody>
-          <a:bodyPr rtlCol="0" anchor="ctr" lIns="0" rIns="0" tIns="0" bIns="0"/>
-          <a:lstStyle/>
-          <a:p>
-            <a:pPr algn="ctr"/>
-            <a:r>
-              <a:rPr sz="1400" b="1">
-                <a:solidFill>
-                  <a:srgbClr val="202122"/>
-                </a:solidFill>
-                <a:latin typeface="Calibri"/>
-              </a:rPr>
-              <a:t>4</a:t>
-            </a:r>
-          </a:p>
-        </p:txBody>
-      </p:sp>
-      <p:sp>
-        <p:nvSpPr>
-          <p:cNvPr id="13" name="TextBox 12"/>
-          <p:cNvSpPr txBox="1"/>
-          <p:nvPr/>
-        </p:nvSpPr>
-        <p:spPr>
-          <a:xfrm>
-            <a:off x="1234440" y="5186933"/>
-            <a:ext cx="10408615" cy="1030986"/>
-          </a:xfrm>
-          <a:prstGeom prst="rect">
-            <a:avLst/>
-          </a:prstGeom>
-          <a:noFill/>
-        </p:spPr>
-        <p:txBody>
-          <a:bodyPr wrap="square" anchor="t" lIns="0" rIns="0" tIns="0" bIns="0"/>
-          <a:lstStyle/>
-          <a:p>
-            <a:pPr algn="l"/>
-            <a:r>
-              <a:rPr sz="2200" b="0" i="0">
-                <a:solidFill>
-                  <a:srgbClr val="202122"/>
-                </a:solidFill>
-                <a:latin typeface="Calibri"/>
-              </a:rPr>
-              <a:t>Which standard covers optical fibre safety?</a:t>
+              <a:rPr sz="1900" b="0" i="0">
+                <a:solidFill>
+                  <a:srgbClr val="FFFFFF"/>
+                </a:solidFill>
+                <a:latin typeface="Cambria"/>
+              </a:rPr>
+              <a:t>Lifting a ceiling tile in a 1970s school reveals crumbly grey board. The installer stops, leaves the tile, keeps people out and calls the supervisor.</a:t>
             </a:r>
           </a:p>
         </p:txBody>
@@ -10279,7 +12594,7 @@
                 </a:solidFill>
                 <a:latin typeface="Cambria"/>
               </a:rPr>
-              <a:t>Answers</a:t>
+              <a:t>If you suspect asbestos</a:t>
             </a:r>
           </a:p>
         </p:txBody>
@@ -10352,14 +12667,56 @@
       </p:sp>
       <p:sp>
         <p:nvSpPr>
-          <p:cNvPr id="6" name="Oval 5"/>
+          <p:cNvPr id="6" name="Rectangle 5"/>
           <p:cNvSpPr/>
           <p:nvPr/>
         </p:nvSpPr>
         <p:spPr>
           <a:xfrm>
-            <a:off x="548640" y="1618488"/>
-            <a:ext cx="411480" cy="411480"/>
+            <a:off x="1603217" y="2793492"/>
+            <a:ext cx="8985260" cy="36576"/>
+          </a:xfrm>
+          <a:prstGeom prst="rect">
+            <a:avLst/>
+          </a:prstGeom>
+          <a:solidFill>
+            <a:srgbClr val="A9C8F0"/>
+          </a:solidFill>
+          <a:ln>
+            <a:noFill/>
+          </a:ln>
+          <a:effectLst/>
+        </p:spPr>
+        <p:style>
+          <a:lnRef idx="1">
+            <a:schemeClr val="accent1"/>
+          </a:lnRef>
+          <a:fillRef idx="3">
+            <a:schemeClr val="accent1"/>
+          </a:fillRef>
+          <a:effectRef idx="2">
+            <a:schemeClr val="accent1"/>
+          </a:effectRef>
+          <a:fontRef idx="minor">
+            <a:schemeClr val="lt1"/>
+          </a:fontRef>
+        </p:style>
+        <p:txBody>
+          <a:bodyPr rtlCol="0" anchor="ctr"/>
+          <a:lstStyle/>
+          <a:p/>
+        </p:txBody>
+      </p:sp>
+      <p:sp>
+        <p:nvSpPr>
+          <p:cNvPr id="7" name="Oval 6"/>
+          <p:cNvSpPr/>
+          <p:nvPr/>
+        </p:nvSpPr>
+        <p:spPr>
+          <a:xfrm>
+            <a:off x="1283177" y="2491740"/>
+            <a:ext cx="640080" cy="640080"/>
           </a:xfrm>
           <a:prstGeom prst="ellipse">
             <a:avLst/>
@@ -10392,7 +12749,7 @@
           <a:p>
             <a:pPr algn="ctr"/>
             <a:r>
-              <a:rPr sz="1400" b="1">
+              <a:rPr sz="2000" b="1">
                 <a:solidFill>
                   <a:srgbClr val="202122"/>
                 </a:solidFill>
@@ -10405,14 +12762,14 @@
       </p:sp>
       <p:sp>
         <p:nvSpPr>
-          <p:cNvPr id="7" name="TextBox 6"/>
-          <p:cNvSpPr txBox="1"/>
-          <p:nvPr/>
-        </p:nvSpPr>
-        <p:spPr>
-          <a:xfrm>
-            <a:off x="1234440" y="1600200"/>
-            <a:ext cx="10408615" cy="1030986"/>
+          <p:cNvPr id="8" name="TextBox 7"/>
+          <p:cNvSpPr txBox="1"/>
+          <p:nvPr/>
+        </p:nvSpPr>
+        <p:spPr>
+          <a:xfrm>
+            <a:off x="548640" y="3268979"/>
+            <a:ext cx="2109155" cy="731520"/>
           </a:xfrm>
           <a:prstGeom prst="rect">
             <a:avLst/>
@@ -10423,40 +12780,106 @@
           <a:bodyPr wrap="square" anchor="t" lIns="0" rIns="0" tIns="0" bIns="0"/>
           <a:lstStyle/>
           <a:p>
+            <a:pPr algn="ctr"/>
+            <a:r>
+              <a:rPr sz="1700" b="1" i="0">
+                <a:solidFill>
+                  <a:srgbClr val="03306E"/>
+                </a:solidFill>
+                <a:latin typeface="Calibri"/>
+              </a:rPr>
+              <a:t>Stop</a:t>
+            </a:r>
+          </a:p>
+        </p:txBody>
+      </p:sp>
+      <p:sp>
+        <p:nvSpPr>
+          <p:cNvPr id="9" name="Rounded Rectangle 8"/>
+          <p:cNvSpPr/>
+          <p:nvPr/>
+        </p:nvSpPr>
+        <p:spPr>
+          <a:xfrm>
+            <a:off x="548640" y="4046220"/>
+            <a:ext cx="2109155" cy="1234439"/>
+          </a:xfrm>
+          <a:prstGeom prst="roundRect">
+            <a:avLst>
+              <a:gd name="adj" fmla="val 6000"/>
+            </a:avLst>
+          </a:prstGeom>
+          <a:solidFill>
+            <a:srgbClr val="EAF3FF"/>
+          </a:solidFill>
+          <a:ln>
+            <a:noFill/>
+          </a:ln>
+          <a:effectLst/>
+        </p:spPr>
+        <p:style>
+          <a:lnRef idx="1">
+            <a:schemeClr val="accent1"/>
+          </a:lnRef>
+          <a:fillRef idx="3">
+            <a:schemeClr val="accent1"/>
+          </a:fillRef>
+          <a:effectRef idx="2">
+            <a:schemeClr val="accent1"/>
+          </a:effectRef>
+          <a:fontRef idx="minor">
+            <a:schemeClr val="lt1"/>
+          </a:fontRef>
+        </p:style>
+        <p:txBody>
+          <a:bodyPr rtlCol="0" anchor="ctr"/>
+          <a:lstStyle/>
+          <a:p/>
+        </p:txBody>
+      </p:sp>
+      <p:sp>
+        <p:nvSpPr>
+          <p:cNvPr id="10" name="TextBox 9"/>
+          <p:cNvSpPr txBox="1"/>
+          <p:nvPr/>
+        </p:nvSpPr>
+        <p:spPr>
+          <a:xfrm>
+            <a:off x="685800" y="4183380"/>
+            <a:ext cx="1834835" cy="960119"/>
+          </a:xfrm>
+          <a:prstGeom prst="rect">
+            <a:avLst/>
+          </a:prstGeom>
+          <a:noFill/>
+        </p:spPr>
+        <p:txBody>
+          <a:bodyPr wrap="square" anchor="t" lIns="0" rIns="0" tIns="0" bIns="0"/>
+          <a:lstStyle/>
+          <a:p>
             <a:pPr algn="l"/>
             <a:r>
               <a:rPr sz="1800" b="0" i="0">
                 <a:solidFill>
-                  <a:srgbClr val="54595D"/>
-                </a:solidFill>
-                <a:latin typeface="Calibri"/>
-              </a:rPr>
-              <a:t>Which standard covers segregation of data and power cables?</a:t>
-            </a:r>
-          </a:p>
-          <a:p>
-            <a:r>
-              <a:rPr sz="1800" b="1">
-                <a:solidFill>
-                  <a:srgbClr val="03306E"/>
-                </a:solidFill>
-                <a:latin typeface="Calibri"/>
-              </a:rPr>
-              <a:t>BS EN 50174.</a:t>
-            </a:r>
-          </a:p>
-        </p:txBody>
-      </p:sp>
-      <p:sp>
-        <p:nvSpPr>
-          <p:cNvPr id="8" name="Oval 7"/>
+                  <a:srgbClr val="202122"/>
+                </a:solidFill>
+                <a:latin typeface="Calibri"/>
+              </a:rPr>
+              <a:t>Stop work immediately.</a:t>
+            </a:r>
+          </a:p>
+        </p:txBody>
+      </p:sp>
+      <p:sp>
+        <p:nvSpPr>
+          <p:cNvPr id="11" name="Oval 10"/>
           <p:cNvSpPr/>
           <p:nvPr/>
         </p:nvSpPr>
         <p:spPr>
           <a:xfrm>
-            <a:off x="548640" y="2814066"/>
-            <a:ext cx="411480" cy="411480"/>
+            <a:off x="3529492" y="2491740"/>
+            <a:ext cx="640080" cy="640080"/>
           </a:xfrm>
           <a:prstGeom prst="ellipse">
             <a:avLst/>
@@ -10489,7 +12912,7 @@
           <a:p>
             <a:pPr algn="ctr"/>
             <a:r>
-              <a:rPr sz="1400" b="1">
+              <a:rPr sz="2000" b="1">
                 <a:solidFill>
                   <a:srgbClr val="202122"/>
                 </a:solidFill>
@@ -10502,14 +12925,14 @@
       </p:sp>
       <p:sp>
         <p:nvSpPr>
-          <p:cNvPr id="9" name="TextBox 8"/>
-          <p:cNvSpPr txBox="1"/>
-          <p:nvPr/>
-        </p:nvSpPr>
-        <p:spPr>
-          <a:xfrm>
-            <a:off x="1234440" y="2795778"/>
-            <a:ext cx="10408615" cy="1030986"/>
+          <p:cNvPr id="12" name="TextBox 11"/>
+          <p:cNvSpPr txBox="1"/>
+          <p:nvPr/>
+        </p:nvSpPr>
+        <p:spPr>
+          <a:xfrm>
+            <a:off x="2794955" y="3268979"/>
+            <a:ext cx="2109155" cy="731520"/>
           </a:xfrm>
           <a:prstGeom prst="rect">
             <a:avLst/>
@@ -10520,40 +12943,106 @@
           <a:bodyPr wrap="square" anchor="t" lIns="0" rIns="0" tIns="0" bIns="0"/>
           <a:lstStyle/>
           <a:p>
+            <a:pPr algn="ctr"/>
+            <a:r>
+              <a:rPr sz="1700" b="1" i="0">
+                <a:solidFill>
+                  <a:srgbClr val="03306E"/>
+                </a:solidFill>
+                <a:latin typeface="Calibri"/>
+              </a:rPr>
+              <a:t>Inform</a:t>
+            </a:r>
+          </a:p>
+        </p:txBody>
+      </p:sp>
+      <p:sp>
+        <p:nvSpPr>
+          <p:cNvPr id="13" name="Rounded Rectangle 12"/>
+          <p:cNvSpPr/>
+          <p:nvPr/>
+        </p:nvSpPr>
+        <p:spPr>
+          <a:xfrm>
+            <a:off x="2794955" y="4046220"/>
+            <a:ext cx="2109155" cy="1234439"/>
+          </a:xfrm>
+          <a:prstGeom prst="roundRect">
+            <a:avLst>
+              <a:gd name="adj" fmla="val 6000"/>
+            </a:avLst>
+          </a:prstGeom>
+          <a:solidFill>
+            <a:srgbClr val="EAF3FF"/>
+          </a:solidFill>
+          <a:ln>
+            <a:noFill/>
+          </a:ln>
+          <a:effectLst/>
+        </p:spPr>
+        <p:style>
+          <a:lnRef idx="1">
+            <a:schemeClr val="accent1"/>
+          </a:lnRef>
+          <a:fillRef idx="3">
+            <a:schemeClr val="accent1"/>
+          </a:fillRef>
+          <a:effectRef idx="2">
+            <a:schemeClr val="accent1"/>
+          </a:effectRef>
+          <a:fontRef idx="minor">
+            <a:schemeClr val="lt1"/>
+          </a:fontRef>
+        </p:style>
+        <p:txBody>
+          <a:bodyPr rtlCol="0" anchor="ctr"/>
+          <a:lstStyle/>
+          <a:p/>
+        </p:txBody>
+      </p:sp>
+      <p:sp>
+        <p:nvSpPr>
+          <p:cNvPr id="14" name="TextBox 13"/>
+          <p:cNvSpPr txBox="1"/>
+          <p:nvPr/>
+        </p:nvSpPr>
+        <p:spPr>
+          <a:xfrm>
+            <a:off x="2932115" y="4183380"/>
+            <a:ext cx="1834835" cy="960119"/>
+          </a:xfrm>
+          <a:prstGeom prst="rect">
+            <a:avLst/>
+          </a:prstGeom>
+          <a:noFill/>
+        </p:spPr>
+        <p:txBody>
+          <a:bodyPr wrap="square" anchor="t" lIns="0" rIns="0" tIns="0" bIns="0"/>
+          <a:lstStyle/>
+          <a:p>
             <a:pPr algn="l"/>
             <a:r>
               <a:rPr sz="1800" b="0" i="0">
                 <a:solidFill>
-                  <a:srgbClr val="54595D"/>
-                </a:solidFill>
-                <a:latin typeface="Calibri"/>
-              </a:rPr>
-              <a:t>What is the first thing to do if you suspect asbestos?</a:t>
-            </a:r>
-          </a:p>
-          <a:p>
-            <a:r>
-              <a:rPr sz="1800" b="1">
-                <a:solidFill>
-                  <a:srgbClr val="03306E"/>
-                </a:solidFill>
-                <a:latin typeface="Calibri"/>
-              </a:rPr>
-              <a:t>Stop work immediately.</a:t>
-            </a:r>
-          </a:p>
-        </p:txBody>
-      </p:sp>
-      <p:sp>
-        <p:nvSpPr>
-          <p:cNvPr id="10" name="Oval 9"/>
+                  <a:srgbClr val="202122"/>
+                </a:solidFill>
+                <a:latin typeface="Calibri"/>
+              </a:rPr>
+              <a:t>Tell the relevant people.</a:t>
+            </a:r>
+          </a:p>
+        </p:txBody>
+      </p:sp>
+      <p:sp>
+        <p:nvSpPr>
+          <p:cNvPr id="15" name="Oval 14"/>
           <p:cNvSpPr/>
           <p:nvPr/>
         </p:nvSpPr>
         <p:spPr>
           <a:xfrm>
-            <a:off x="548640" y="4009644"/>
-            <a:ext cx="411480" cy="411480"/>
+            <a:off x="5775807" y="2491740"/>
+            <a:ext cx="640080" cy="640080"/>
           </a:xfrm>
           <a:prstGeom prst="ellipse">
             <a:avLst/>
@@ -10586,7 +13075,7 @@
           <a:p>
             <a:pPr algn="ctr"/>
             <a:r>
-              <a:rPr sz="1400" b="1">
+              <a:rPr sz="2000" b="1">
                 <a:solidFill>
                   <a:srgbClr val="202122"/>
                 </a:solidFill>
@@ -10599,14 +13088,14 @@
       </p:sp>
       <p:sp>
         <p:nvSpPr>
-          <p:cNvPr id="11" name="TextBox 10"/>
-          <p:cNvSpPr txBox="1"/>
-          <p:nvPr/>
-        </p:nvSpPr>
-        <p:spPr>
-          <a:xfrm>
-            <a:off x="1234440" y="3991356"/>
-            <a:ext cx="10408615" cy="1030986"/>
+          <p:cNvPr id="16" name="TextBox 15"/>
+          <p:cNvSpPr txBox="1"/>
+          <p:nvPr/>
+        </p:nvSpPr>
+        <p:spPr>
+          <a:xfrm>
+            <a:off x="5041270" y="3268979"/>
+            <a:ext cx="2109155" cy="731520"/>
           </a:xfrm>
           <a:prstGeom prst="rect">
             <a:avLst/>
@@ -10617,40 +13106,106 @@
           <a:bodyPr wrap="square" anchor="t" lIns="0" rIns="0" tIns="0" bIns="0"/>
           <a:lstStyle/>
           <a:p>
+            <a:pPr algn="ctr"/>
+            <a:r>
+              <a:rPr sz="1700" b="1" i="0">
+                <a:solidFill>
+                  <a:srgbClr val="03306E"/>
+                </a:solidFill>
+                <a:latin typeface="Calibri"/>
+              </a:rPr>
+              <a:t>Isolate</a:t>
+            </a:r>
+          </a:p>
+        </p:txBody>
+      </p:sp>
+      <p:sp>
+        <p:nvSpPr>
+          <p:cNvPr id="17" name="Rounded Rectangle 16"/>
+          <p:cNvSpPr/>
+          <p:nvPr/>
+        </p:nvSpPr>
+        <p:spPr>
+          <a:xfrm>
+            <a:off x="5041270" y="4046220"/>
+            <a:ext cx="2109155" cy="1234439"/>
+          </a:xfrm>
+          <a:prstGeom prst="roundRect">
+            <a:avLst>
+              <a:gd name="adj" fmla="val 6000"/>
+            </a:avLst>
+          </a:prstGeom>
+          <a:solidFill>
+            <a:srgbClr val="EAF3FF"/>
+          </a:solidFill>
+          <a:ln>
+            <a:noFill/>
+          </a:ln>
+          <a:effectLst/>
+        </p:spPr>
+        <p:style>
+          <a:lnRef idx="1">
+            <a:schemeClr val="accent1"/>
+          </a:lnRef>
+          <a:fillRef idx="3">
+            <a:schemeClr val="accent1"/>
+          </a:fillRef>
+          <a:effectRef idx="2">
+            <a:schemeClr val="accent1"/>
+          </a:effectRef>
+          <a:fontRef idx="minor">
+            <a:schemeClr val="lt1"/>
+          </a:fontRef>
+        </p:style>
+        <p:txBody>
+          <a:bodyPr rtlCol="0" anchor="ctr"/>
+          <a:lstStyle/>
+          <a:p/>
+        </p:txBody>
+      </p:sp>
+      <p:sp>
+        <p:nvSpPr>
+          <p:cNvPr id="18" name="TextBox 17"/>
+          <p:cNvSpPr txBox="1"/>
+          <p:nvPr/>
+        </p:nvSpPr>
+        <p:spPr>
+          <a:xfrm>
+            <a:off x="5178430" y="4183380"/>
+            <a:ext cx="1834835" cy="960119"/>
+          </a:xfrm>
+          <a:prstGeom prst="rect">
+            <a:avLst/>
+          </a:prstGeom>
+          <a:noFill/>
+        </p:spPr>
+        <p:txBody>
+          <a:bodyPr wrap="square" anchor="t" lIns="0" rIns="0" tIns="0" bIns="0"/>
+          <a:lstStyle/>
+          <a:p>
             <a:pPr algn="l"/>
             <a:r>
               <a:rPr sz="1800" b="0" i="0">
                 <a:solidFill>
-                  <a:srgbClr val="54595D"/>
-                </a:solidFill>
-                <a:latin typeface="Calibri"/>
-              </a:rPr>
-              <a:t>Which regulations cover work in ceiling voids and ducts?</a:t>
-            </a:r>
-          </a:p>
-          <a:p>
-            <a:r>
-              <a:rPr sz="1800" b="1">
-                <a:solidFill>
-                  <a:srgbClr val="03306E"/>
-                </a:solidFill>
-                <a:latin typeface="Calibri"/>
-              </a:rPr>
-              <a:t>Confined Spaces Regulations 1997.</a:t>
-            </a:r>
-          </a:p>
-        </p:txBody>
-      </p:sp>
-      <p:sp>
-        <p:nvSpPr>
-          <p:cNvPr id="12" name="Oval 11"/>
+                  <a:srgbClr val="202122"/>
+                </a:solidFill>
+                <a:latin typeface="Calibri"/>
+              </a:rPr>
+              <a:t>Restrict access to the area.</a:t>
+            </a:r>
+          </a:p>
+        </p:txBody>
+      </p:sp>
+      <p:sp>
+        <p:nvSpPr>
+          <p:cNvPr id="19" name="Oval 18"/>
           <p:cNvSpPr/>
           <p:nvPr/>
         </p:nvSpPr>
         <p:spPr>
           <a:xfrm>
-            <a:off x="548640" y="5205221"/>
-            <a:ext cx="411480" cy="411480"/>
+            <a:off x="8022122" y="2491740"/>
+            <a:ext cx="640080" cy="640080"/>
           </a:xfrm>
           <a:prstGeom prst="ellipse">
             <a:avLst/>
@@ -10683,7 +13238,7 @@
           <a:p>
             <a:pPr algn="ctr"/>
             <a:r>
-              <a:rPr sz="1400" b="1">
+              <a:rPr sz="2000" b="1">
                 <a:solidFill>
                   <a:srgbClr val="202122"/>
                 </a:solidFill>
@@ -10696,14 +13251,14 @@
       </p:sp>
       <p:sp>
         <p:nvSpPr>
-          <p:cNvPr id="13" name="TextBox 12"/>
-          <p:cNvSpPr txBox="1"/>
-          <p:nvPr/>
-        </p:nvSpPr>
-        <p:spPr>
-          <a:xfrm>
-            <a:off x="1234440" y="5186933"/>
-            <a:ext cx="10408615" cy="1030986"/>
+          <p:cNvPr id="20" name="TextBox 19"/>
+          <p:cNvSpPr txBox="1"/>
+          <p:nvPr/>
+        </p:nvSpPr>
+        <p:spPr>
+          <a:xfrm>
+            <a:off x="7287585" y="3268979"/>
+            <a:ext cx="2109155" cy="731520"/>
           </a:xfrm>
           <a:prstGeom prst="rect">
             <a:avLst/>
@@ -10714,26 +13269,255 @@
           <a:bodyPr wrap="square" anchor="t" lIns="0" rIns="0" tIns="0" bIns="0"/>
           <a:lstStyle/>
           <a:p>
+            <a:pPr algn="ctr"/>
+            <a:r>
+              <a:rPr sz="1700" b="1" i="0">
+                <a:solidFill>
+                  <a:srgbClr val="03306E"/>
+                </a:solidFill>
+                <a:latin typeface="Calibri"/>
+              </a:rPr>
+              <a:t>Investigate</a:t>
+            </a:r>
+          </a:p>
+        </p:txBody>
+      </p:sp>
+      <p:sp>
+        <p:nvSpPr>
+          <p:cNvPr id="21" name="Rounded Rectangle 20"/>
+          <p:cNvSpPr/>
+          <p:nvPr/>
+        </p:nvSpPr>
+        <p:spPr>
+          <a:xfrm>
+            <a:off x="7287585" y="4046220"/>
+            <a:ext cx="2109155" cy="1234439"/>
+          </a:xfrm>
+          <a:prstGeom prst="roundRect">
+            <a:avLst>
+              <a:gd name="adj" fmla="val 6000"/>
+            </a:avLst>
+          </a:prstGeom>
+          <a:solidFill>
+            <a:srgbClr val="EAF3FF"/>
+          </a:solidFill>
+          <a:ln>
+            <a:noFill/>
+          </a:ln>
+          <a:effectLst/>
+        </p:spPr>
+        <p:style>
+          <a:lnRef idx="1">
+            <a:schemeClr val="accent1"/>
+          </a:lnRef>
+          <a:fillRef idx="3">
+            <a:schemeClr val="accent1"/>
+          </a:fillRef>
+          <a:effectRef idx="2">
+            <a:schemeClr val="accent1"/>
+          </a:effectRef>
+          <a:fontRef idx="minor">
+            <a:schemeClr val="lt1"/>
+          </a:fontRef>
+        </p:style>
+        <p:txBody>
+          <a:bodyPr rtlCol="0" anchor="ctr"/>
+          <a:lstStyle/>
+          <a:p/>
+        </p:txBody>
+      </p:sp>
+      <p:sp>
+        <p:nvSpPr>
+          <p:cNvPr id="22" name="TextBox 21"/>
+          <p:cNvSpPr txBox="1"/>
+          <p:nvPr/>
+        </p:nvSpPr>
+        <p:spPr>
+          <a:xfrm>
+            <a:off x="7424745" y="4183380"/>
+            <a:ext cx="1834835" cy="960119"/>
+          </a:xfrm>
+          <a:prstGeom prst="rect">
+            <a:avLst/>
+          </a:prstGeom>
+          <a:noFill/>
+        </p:spPr>
+        <p:txBody>
+          <a:bodyPr wrap="square" anchor="t" lIns="0" rIns="0" tIns="0" bIns="0"/>
+          <a:lstStyle/>
+          <a:p>
             <a:pPr algn="l"/>
             <a:r>
               <a:rPr sz="1800" b="0" i="0">
                 <a:solidFill>
-                  <a:srgbClr val="54595D"/>
-                </a:solidFill>
-                <a:latin typeface="Calibri"/>
-              </a:rPr>
-              <a:t>Which standard covers optical fibre safety?</a:t>
-            </a:r>
-          </a:p>
-          <a:p>
-            <a:r>
-              <a:rPr sz="1800" b="1">
+                  <a:srgbClr val="202122"/>
+                </a:solidFill>
+                <a:latin typeface="Calibri"/>
+              </a:rPr>
+              <a:t>Use an asbestos-registered professional.</a:t>
+            </a:r>
+          </a:p>
+        </p:txBody>
+      </p:sp>
+      <p:sp>
+        <p:nvSpPr>
+          <p:cNvPr id="23" name="Oval 22"/>
+          <p:cNvSpPr/>
+          <p:nvPr/>
+        </p:nvSpPr>
+        <p:spPr>
+          <a:xfrm>
+            <a:off x="10268437" y="2491740"/>
+            <a:ext cx="640080" cy="640080"/>
+          </a:xfrm>
+          <a:prstGeom prst="ellipse">
+            <a:avLst/>
+          </a:prstGeom>
+          <a:solidFill>
+            <a:srgbClr val="F2B705"/>
+          </a:solidFill>
+          <a:ln>
+            <a:noFill/>
+          </a:ln>
+          <a:effectLst/>
+        </p:spPr>
+        <p:style>
+          <a:lnRef idx="1">
+            <a:schemeClr val="accent1"/>
+          </a:lnRef>
+          <a:fillRef idx="3">
+            <a:schemeClr val="accent1"/>
+          </a:fillRef>
+          <a:effectRef idx="2">
+            <a:schemeClr val="accent1"/>
+          </a:effectRef>
+          <a:fontRef idx="minor">
+            <a:schemeClr val="lt1"/>
+          </a:fontRef>
+        </p:style>
+        <p:txBody>
+          <a:bodyPr rtlCol="0" anchor="ctr" lIns="0" rIns="0" tIns="0" bIns="0"/>
+          <a:lstStyle/>
+          <a:p>
+            <a:pPr algn="ctr"/>
+            <a:r>
+              <a:rPr sz="2000" b="1">
+                <a:solidFill>
+                  <a:srgbClr val="202122"/>
+                </a:solidFill>
+                <a:latin typeface="Calibri"/>
+              </a:rPr>
+              <a:t>5</a:t>
+            </a:r>
+          </a:p>
+        </p:txBody>
+      </p:sp>
+      <p:sp>
+        <p:nvSpPr>
+          <p:cNvPr id="24" name="TextBox 23"/>
+          <p:cNvSpPr txBox="1"/>
+          <p:nvPr/>
+        </p:nvSpPr>
+        <p:spPr>
+          <a:xfrm>
+            <a:off x="9533900" y="3268979"/>
+            <a:ext cx="2109155" cy="731520"/>
+          </a:xfrm>
+          <a:prstGeom prst="rect">
+            <a:avLst/>
+          </a:prstGeom>
+          <a:noFill/>
+        </p:spPr>
+        <p:txBody>
+          <a:bodyPr wrap="square" anchor="t" lIns="0" rIns="0" tIns="0" bIns="0"/>
+          <a:lstStyle/>
+          <a:p>
+            <a:pPr algn="ctr"/>
+            <a:r>
+              <a:rPr sz="1700" b="1" i="0">
                 <a:solidFill>
                   <a:srgbClr val="03306E"/>
                 </a:solidFill>
                 <a:latin typeface="Calibri"/>
               </a:rPr>
-              <a:t>BS EN 60825.</a:t>
+              <a:t>Act</a:t>
+            </a:r>
+          </a:p>
+        </p:txBody>
+      </p:sp>
+      <p:sp>
+        <p:nvSpPr>
+          <p:cNvPr id="25" name="Rounded Rectangle 24"/>
+          <p:cNvSpPr/>
+          <p:nvPr/>
+        </p:nvSpPr>
+        <p:spPr>
+          <a:xfrm>
+            <a:off x="9533900" y="4046220"/>
+            <a:ext cx="2109155" cy="1234439"/>
+          </a:xfrm>
+          <a:prstGeom prst="roundRect">
+            <a:avLst>
+              <a:gd name="adj" fmla="val 6000"/>
+            </a:avLst>
+          </a:prstGeom>
+          <a:solidFill>
+            <a:srgbClr val="EAF3FF"/>
+          </a:solidFill>
+          <a:ln>
+            <a:noFill/>
+          </a:ln>
+          <a:effectLst/>
+        </p:spPr>
+        <p:style>
+          <a:lnRef idx="1">
+            <a:schemeClr val="accent1"/>
+          </a:lnRef>
+          <a:fillRef idx="3">
+            <a:schemeClr val="accent1"/>
+          </a:fillRef>
+          <a:effectRef idx="2">
+            <a:schemeClr val="accent1"/>
+          </a:effectRef>
+          <a:fontRef idx="minor">
+            <a:schemeClr val="lt1"/>
+          </a:fontRef>
+        </p:style>
+        <p:txBody>
+          <a:bodyPr rtlCol="0" anchor="ctr"/>
+          <a:lstStyle/>
+          <a:p/>
+        </p:txBody>
+      </p:sp>
+      <p:sp>
+        <p:nvSpPr>
+          <p:cNvPr id="26" name="TextBox 25"/>
+          <p:cNvSpPr txBox="1"/>
+          <p:nvPr/>
+        </p:nvSpPr>
+        <p:spPr>
+          <a:xfrm>
+            <a:off x="9671060" y="4183380"/>
+            <a:ext cx="1834835" cy="960119"/>
+          </a:xfrm>
+          <a:prstGeom prst="rect">
+            <a:avLst/>
+          </a:prstGeom>
+          <a:noFill/>
+        </p:spPr>
+        <p:txBody>
+          <a:bodyPr wrap="square" anchor="t" lIns="0" rIns="0" tIns="0" bIns="0"/>
+          <a:lstStyle/>
+          <a:p>
+            <a:pPr algn="l"/>
+            <a:r>
+              <a:rPr sz="1800" b="0" i="0">
+                <a:solidFill>
+                  <a:srgbClr val="202122"/>
+                </a:solidFill>
+                <a:latin typeface="Calibri"/>
+              </a:rPr>
+              <a:t>Removal, sealing or air-quality checks.</a:t>
             </a:r>
           </a:p>
         </p:txBody>
